--- a/课件/C2/C2-A-09/C2-A-09.pptx
+++ b/课件/C2/C2-A-09/C2-A-09.pptx
@@ -1,33 +1,34 @@
 
 <file path=ppt/presentation.xml><?xml version="1.0" encoding="utf-8"?>
-<p:presentation xmlns:a="http://schemas.openxmlformats.org/drawingml/2006/main" xmlns:r="http://schemas.openxmlformats.org/officeDocument/2006/relationships" xmlns:p="http://schemas.openxmlformats.org/presentationml/2006/main" saveSubsetFonts="1" autoCompressPictures="0">
+<p:presentation xmlns:a="http://schemas.openxmlformats.org/drawingml/2006/main" xmlns:r="http://schemas.openxmlformats.org/officeDocument/2006/relationships" xmlns:p="http://schemas.openxmlformats.org/presentationml/2006/main" autoCompressPictures="0">
   <p:sldMasterIdLst>
     <p:sldMasterId id="2147483648" r:id="rId1"/>
   </p:sldMasterIdLst>
+  <p:notesMasterIdLst>
+    <p:notesMasterId r:id="rId4"/>
+  </p:notesMasterIdLst>
   <p:sldIdLst>
-    <p:sldId id="256" r:id="rId2"/>
-    <p:sldId id="257" r:id="rId3"/>
-    <p:sldId id="258" r:id="rId4"/>
-    <p:sldId id="259" r:id="rId5"/>
-    <p:sldId id="260" r:id="rId6"/>
-    <p:sldId id="261" r:id="rId7"/>
-    <p:sldId id="262" r:id="rId8"/>
-    <p:sldId id="263" r:id="rId9"/>
-    <p:sldId id="264" r:id="rId10"/>
-    <p:sldId id="265" r:id="rId11"/>
-    <p:sldId id="266" r:id="rId12"/>
-    <p:sldId id="267" r:id="rId13"/>
-    <p:sldId id="268" r:id="rId14"/>
-    <p:sldId id="269" r:id="rId15"/>
-    <p:sldId id="270" r:id="rId16"/>
-    <p:sldId id="271" r:id="rId17"/>
-    <p:sldId id="272" r:id="rId18"/>
+    <p:sldId id="256" r:id="rId3"/>
+    <p:sldId id="257" r:id="rId5"/>
+    <p:sldId id="258" r:id="rId6"/>
+    <p:sldId id="259" r:id="rId7"/>
+    <p:sldId id="274" r:id="rId8"/>
+    <p:sldId id="260" r:id="rId9"/>
+    <p:sldId id="261" r:id="rId10"/>
+    <p:sldId id="262" r:id="rId11"/>
+    <p:sldId id="263" r:id="rId12"/>
+    <p:sldId id="264" r:id="rId13"/>
+    <p:sldId id="265" r:id="rId14"/>
+    <p:sldId id="266" r:id="rId15"/>
+    <p:sldId id="267" r:id="rId16"/>
+    <p:sldId id="268" r:id="rId17"/>
+    <p:sldId id="269" r:id="rId18"/>
+    <p:sldId id="270" r:id="rId19"/>
+    <p:sldId id="271" r:id="rId20"/>
+    <p:sldId id="272" r:id="rId21"/>
   </p:sldIdLst>
-  <p:notesMasterIdLst>
-    <p:notesMasterId r:id="rId19"/>
-  </p:notesMasterIdLst>
-  <p:sldSz cx="12191695" cy="6858000"/>
-  <p:notesSz cx="6858000" cy="12191695"/>
+  <p:sldSz cx="12191365" cy="6858000"/>
+  <p:notesSz cx="6858000" cy="12191365"/>
   <p:defaultTextStyle>
     <a:lvl1pPr marL="0" algn="l" defTabSz="914400" rtl="0" eaLnBrk="1" latinLnBrk="0" hangingPunct="1">
       <a:defRPr sz="1800" kern="1200">
@@ -205,7 +206,6 @@
           <a:p>
             <a:fld id="{5282F153-3F37-0F45-9E97-73ACFA13230C}" type="datetimeFigureOut">
               <a:rPr lang="en-US"/>
-              <a:t>7/23/19</a:t>
             </a:fld>
             <a:endParaRPr lang="en-US"/>
           </a:p>
@@ -272,6 +272,7 @@
               <a:rPr lang="en-US"/>
               <a:t>Click to edit Master text styles</a:t>
             </a:r>
+            <a:endParaRPr lang="en-US"/>
           </a:p>
           <a:p>
             <a:pPr lvl="1"/>
@@ -279,6 +280,7 @@
               <a:rPr lang="en-US"/>
               <a:t>Second level</a:t>
             </a:r>
+            <a:endParaRPr lang="en-US"/>
           </a:p>
           <a:p>
             <a:pPr lvl="2"/>
@@ -286,6 +288,7 @@
               <a:rPr lang="en-US"/>
               <a:t>Third level</a:t>
             </a:r>
+            <a:endParaRPr lang="en-US"/>
           </a:p>
           <a:p>
             <a:pPr lvl="3"/>
@@ -293,6 +296,7 @@
               <a:rPr lang="en-US"/>
               <a:t>Fourth level</a:t>
             </a:r>
+            <a:endParaRPr lang="en-US"/>
           </a:p>
           <a:p>
             <a:pPr lvl="4"/>
@@ -300,6 +304,7 @@
               <a:rPr lang="en-US"/>
               <a:t>Fifth level</a:t>
             </a:r>
+            <a:endParaRPr lang="en-US"/>
           </a:p>
         </p:txBody>
       </p:sp>
@@ -363,18 +368,12 @@
           <a:p>
             <a:fld id="{CE5E9CC1-C706-0F49-92D6-E571CC5EEA8F}" type="slidenum">
               <a:rPr lang="en-US"/>
-              <a:t>‹#›</a:t>
             </a:fld>
             <a:endParaRPr lang="en-US"/>
           </a:p>
         </p:txBody>
       </p:sp>
     </p:spTree>
-    <p:extLst>
-      <p:ext uri="{BB962C8B-B14F-4D97-AF65-F5344CB8AC3E}">
-        <p14:creationId xmlns:p14="http://schemas.microsoft.com/office/powerpoint/2010/main" val="1024086991"/>
-      </p:ext>
-    </p:extLst>
   </p:cSld>
   <p:clrMap bg1="lt1" tx1="dk1" bg2="lt2" tx2="dk2" accent1="accent1" accent2="accent2" accent3="accent3" accent4="accent4" accent5="accent5" accent6="accent6" hlink="hlink" folHlink="folHlink"/>
   <p:notesStyle>
@@ -516,10 +515,6 @@
           <a:bodyPr/>
           <a:lstStyle/>
           <a:p>
-            <a:r>
-              <a:rPr lang="en-US" dirty="0"/>
-              <a:t/>
-            </a:r>
             <a:endParaRPr lang="en-US" dirty="0"/>
           </a:p>
         </p:txBody>
@@ -541,18 +536,12 @@
           <a:p>
             <a:fld id="{F7021451-1387-4CA6-816F-3879F97B5CBC}" type="slidenum">
               <a:rPr lang="en-US"/>
-              <a:t>1</a:t>
             </a:fld>
             <a:endParaRPr lang="en-US"/>
           </a:p>
         </p:txBody>
       </p:sp>
     </p:spTree>
-    <p:extLst>
-      <p:ext uri="{BB962C8B-B14F-4D97-AF65-F5344CB8AC3E}">
-        <p14:creationId xmlns:p14="http://schemas.microsoft.com/office/powerpoint/2010/main" val="1024086991"/>
-      </p:ext>
-    </p:extLst>
   </p:cSld>
   <p:clrMapOvr>
     <a:masterClrMapping/>
@@ -604,10 +593,6 @@
           <a:bodyPr/>
           <a:lstStyle/>
           <a:p>
-            <a:r>
-              <a:rPr lang="en-US" dirty="0"/>
-              <a:t/>
-            </a:r>
             <a:endParaRPr lang="en-US" dirty="0"/>
           </a:p>
         </p:txBody>
@@ -629,18 +614,12 @@
           <a:p>
             <a:fld id="{F7021451-1387-4CA6-816F-3879F97B5CBC}" type="slidenum">
               <a:rPr lang="en-US"/>
-              <a:t>10</a:t>
             </a:fld>
             <a:endParaRPr lang="en-US"/>
           </a:p>
         </p:txBody>
       </p:sp>
     </p:spTree>
-    <p:extLst>
-      <p:ext uri="{BB962C8B-B14F-4D97-AF65-F5344CB8AC3E}">
-        <p14:creationId xmlns:p14="http://schemas.microsoft.com/office/powerpoint/2010/main" val="1024086991"/>
-      </p:ext>
-    </p:extLst>
   </p:cSld>
   <p:clrMapOvr>
     <a:masterClrMapping/>
@@ -692,10 +671,6 @@
           <a:bodyPr/>
           <a:lstStyle/>
           <a:p>
-            <a:r>
-              <a:rPr lang="en-US" dirty="0"/>
-              <a:t/>
-            </a:r>
             <a:endParaRPr lang="en-US" dirty="0"/>
           </a:p>
         </p:txBody>
@@ -717,18 +692,12 @@
           <a:p>
             <a:fld id="{F7021451-1387-4CA6-816F-3879F97B5CBC}" type="slidenum">
               <a:rPr lang="en-US"/>
-              <a:t>11</a:t>
             </a:fld>
             <a:endParaRPr lang="en-US"/>
           </a:p>
         </p:txBody>
       </p:sp>
     </p:spTree>
-    <p:extLst>
-      <p:ext uri="{BB962C8B-B14F-4D97-AF65-F5344CB8AC3E}">
-        <p14:creationId xmlns:p14="http://schemas.microsoft.com/office/powerpoint/2010/main" val="1024086991"/>
-      </p:ext>
-    </p:extLst>
   </p:cSld>
   <p:clrMapOvr>
     <a:masterClrMapping/>
@@ -780,10 +749,6 @@
           <a:bodyPr/>
           <a:lstStyle/>
           <a:p>
-            <a:r>
-              <a:rPr lang="en-US" dirty="0"/>
-              <a:t/>
-            </a:r>
             <a:endParaRPr lang="en-US" dirty="0"/>
           </a:p>
         </p:txBody>
@@ -805,18 +770,12 @@
           <a:p>
             <a:fld id="{F7021451-1387-4CA6-816F-3879F97B5CBC}" type="slidenum">
               <a:rPr lang="en-US"/>
-              <a:t>12</a:t>
             </a:fld>
             <a:endParaRPr lang="en-US"/>
           </a:p>
         </p:txBody>
       </p:sp>
     </p:spTree>
-    <p:extLst>
-      <p:ext uri="{BB962C8B-B14F-4D97-AF65-F5344CB8AC3E}">
-        <p14:creationId xmlns:p14="http://schemas.microsoft.com/office/powerpoint/2010/main" val="1024086991"/>
-      </p:ext>
-    </p:extLst>
   </p:cSld>
   <p:clrMapOvr>
     <a:masterClrMapping/>
@@ -868,10 +827,6 @@
           <a:bodyPr/>
           <a:lstStyle/>
           <a:p>
-            <a:r>
-              <a:rPr lang="en-US" dirty="0"/>
-              <a:t/>
-            </a:r>
             <a:endParaRPr lang="en-US" dirty="0"/>
           </a:p>
         </p:txBody>
@@ -893,18 +848,12 @@
           <a:p>
             <a:fld id="{F7021451-1387-4CA6-816F-3879F97B5CBC}" type="slidenum">
               <a:rPr lang="en-US"/>
-              <a:t>13</a:t>
             </a:fld>
             <a:endParaRPr lang="en-US"/>
           </a:p>
         </p:txBody>
       </p:sp>
     </p:spTree>
-    <p:extLst>
-      <p:ext uri="{BB962C8B-B14F-4D97-AF65-F5344CB8AC3E}">
-        <p14:creationId xmlns:p14="http://schemas.microsoft.com/office/powerpoint/2010/main" val="1024086991"/>
-      </p:ext>
-    </p:extLst>
   </p:cSld>
   <p:clrMapOvr>
     <a:masterClrMapping/>
@@ -956,10 +905,6 @@
           <a:bodyPr/>
           <a:lstStyle/>
           <a:p>
-            <a:r>
-              <a:rPr lang="en-US" dirty="0"/>
-              <a:t/>
-            </a:r>
             <a:endParaRPr lang="en-US" dirty="0"/>
           </a:p>
         </p:txBody>
@@ -981,18 +926,12 @@
           <a:p>
             <a:fld id="{F7021451-1387-4CA6-816F-3879F97B5CBC}" type="slidenum">
               <a:rPr lang="en-US"/>
-              <a:t>14</a:t>
             </a:fld>
             <a:endParaRPr lang="en-US"/>
           </a:p>
         </p:txBody>
       </p:sp>
     </p:spTree>
-    <p:extLst>
-      <p:ext uri="{BB962C8B-B14F-4D97-AF65-F5344CB8AC3E}">
-        <p14:creationId xmlns:p14="http://schemas.microsoft.com/office/powerpoint/2010/main" val="1024086991"/>
-      </p:ext>
-    </p:extLst>
   </p:cSld>
   <p:clrMapOvr>
     <a:masterClrMapping/>
@@ -1044,10 +983,6 @@
           <a:bodyPr/>
           <a:lstStyle/>
           <a:p>
-            <a:r>
-              <a:rPr lang="en-US" dirty="0"/>
-              <a:t/>
-            </a:r>
             <a:endParaRPr lang="en-US" dirty="0"/>
           </a:p>
         </p:txBody>
@@ -1069,18 +1004,12 @@
           <a:p>
             <a:fld id="{F7021451-1387-4CA6-816F-3879F97B5CBC}" type="slidenum">
               <a:rPr lang="en-US"/>
-              <a:t>15</a:t>
             </a:fld>
             <a:endParaRPr lang="en-US"/>
           </a:p>
         </p:txBody>
       </p:sp>
     </p:spTree>
-    <p:extLst>
-      <p:ext uri="{BB962C8B-B14F-4D97-AF65-F5344CB8AC3E}">
-        <p14:creationId xmlns:p14="http://schemas.microsoft.com/office/powerpoint/2010/main" val="1024086991"/>
-      </p:ext>
-    </p:extLst>
   </p:cSld>
   <p:clrMapOvr>
     <a:masterClrMapping/>
@@ -1132,10 +1061,6 @@
           <a:bodyPr/>
           <a:lstStyle/>
           <a:p>
-            <a:r>
-              <a:rPr lang="en-US" dirty="0"/>
-              <a:t/>
-            </a:r>
             <a:endParaRPr lang="en-US" dirty="0"/>
           </a:p>
         </p:txBody>
@@ -1157,18 +1082,12 @@
           <a:p>
             <a:fld id="{F7021451-1387-4CA6-816F-3879F97B5CBC}" type="slidenum">
               <a:rPr lang="en-US"/>
-              <a:t>16</a:t>
             </a:fld>
             <a:endParaRPr lang="en-US"/>
           </a:p>
         </p:txBody>
       </p:sp>
     </p:spTree>
-    <p:extLst>
-      <p:ext uri="{BB962C8B-B14F-4D97-AF65-F5344CB8AC3E}">
-        <p14:creationId xmlns:p14="http://schemas.microsoft.com/office/powerpoint/2010/main" val="1024086991"/>
-      </p:ext>
-    </p:extLst>
   </p:cSld>
   <p:clrMapOvr>
     <a:masterClrMapping/>
@@ -1220,10 +1139,6 @@
           <a:bodyPr/>
           <a:lstStyle/>
           <a:p>
-            <a:r>
-              <a:rPr lang="en-US" dirty="0"/>
-              <a:t/>
-            </a:r>
             <a:endParaRPr lang="en-US" dirty="0"/>
           </a:p>
         </p:txBody>
@@ -1245,18 +1160,90 @@
           <a:p>
             <a:fld id="{F7021451-1387-4CA6-816F-3879F97B5CBC}" type="slidenum">
               <a:rPr lang="en-US"/>
-              <a:t>17</a:t>
             </a:fld>
             <a:endParaRPr lang="en-US"/>
           </a:p>
         </p:txBody>
       </p:sp>
     </p:spTree>
-    <p:extLst>
-      <p:ext uri="{BB962C8B-B14F-4D97-AF65-F5344CB8AC3E}">
-        <p14:creationId xmlns:p14="http://schemas.microsoft.com/office/powerpoint/2010/main" val="1024086991"/>
-      </p:ext>
-    </p:extLst>
+  </p:cSld>
+  <p:clrMapOvr>
+    <a:masterClrMapping/>
+  </p:clrMapOvr>
+</p:notes>
+</file>
+
+<file path=ppt/notesSlides/notesSlide18.xml><?xml version="1.0" encoding="utf-8"?>
+<p:notes xmlns:a="http://schemas.openxmlformats.org/drawingml/2006/main" xmlns:r="http://schemas.openxmlformats.org/officeDocument/2006/relationships" xmlns:p="http://schemas.openxmlformats.org/presentationml/2006/main">
+  <p:cSld>
+    <p:spTree>
+      <p:nvGrpSpPr>
+        <p:cNvPr id="1" name=""/>
+        <p:cNvGrpSpPr/>
+        <p:nvPr/>
+      </p:nvGrpSpPr>
+      <p:grpSpPr>
+        <a:xfrm>
+          <a:off x="0" y="0"/>
+          <a:ext cx="0" cy="0"/>
+          <a:chOff x="0" y="0"/>
+          <a:chExt cx="0" cy="0"/>
+        </a:xfrm>
+      </p:grpSpPr>
+      <p:sp>
+        <p:nvSpPr>
+          <p:cNvPr id="2" name="Slide Image Placeholder 1"/>
+          <p:cNvSpPr>
+            <a:spLocks noGrp="1" noRot="1" noChangeAspect="1"/>
+          </p:cNvSpPr>
+          <p:nvPr>
+            <p:ph type="sldImg"/>
+          </p:nvPr>
+        </p:nvSpPr>
+        <p:spPr/>
+      </p:sp>
+      <p:sp>
+        <p:nvSpPr>
+          <p:cNvPr id="3" name="Notes Placeholder 2"/>
+          <p:cNvSpPr>
+            <a:spLocks noGrp="1"/>
+          </p:cNvSpPr>
+          <p:nvPr>
+            <p:ph type="body" idx="1"/>
+          </p:nvPr>
+        </p:nvSpPr>
+        <p:spPr/>
+        <p:txBody>
+          <a:bodyPr/>
+          <a:lstStyle/>
+          <a:p>
+            <a:endParaRPr lang="en-US" dirty="0"/>
+          </a:p>
+        </p:txBody>
+      </p:sp>
+      <p:sp>
+        <p:nvSpPr>
+          <p:cNvPr id="4" name="Slide Number Placeholder 3"/>
+          <p:cNvSpPr>
+            <a:spLocks noGrp="1"/>
+          </p:cNvSpPr>
+          <p:nvPr>
+            <p:ph type="sldNum" sz="quarter" idx="10"/>
+          </p:nvPr>
+        </p:nvSpPr>
+        <p:spPr/>
+        <p:txBody>
+          <a:bodyPr/>
+          <a:lstStyle/>
+          <a:p>
+            <a:fld id="{F7021451-1387-4CA6-816F-3879F97B5CBC}" type="slidenum">
+              <a:rPr lang="en-US"/>
+            </a:fld>
+            <a:endParaRPr lang="en-US"/>
+          </a:p>
+        </p:txBody>
+      </p:sp>
+    </p:spTree>
   </p:cSld>
   <p:clrMapOvr>
     <a:masterClrMapping/>
@@ -1308,10 +1295,6 @@
           <a:bodyPr/>
           <a:lstStyle/>
           <a:p>
-            <a:r>
-              <a:rPr lang="en-US" dirty="0"/>
-              <a:t/>
-            </a:r>
             <a:endParaRPr lang="en-US" dirty="0"/>
           </a:p>
         </p:txBody>
@@ -1333,18 +1316,12 @@
           <a:p>
             <a:fld id="{F7021451-1387-4CA6-816F-3879F97B5CBC}" type="slidenum">
               <a:rPr lang="en-US"/>
-              <a:t>2</a:t>
             </a:fld>
             <a:endParaRPr lang="en-US"/>
           </a:p>
         </p:txBody>
       </p:sp>
     </p:spTree>
-    <p:extLst>
-      <p:ext uri="{BB962C8B-B14F-4D97-AF65-F5344CB8AC3E}">
-        <p14:creationId xmlns:p14="http://schemas.microsoft.com/office/powerpoint/2010/main" val="1024086991"/>
-      </p:ext>
-    </p:extLst>
   </p:cSld>
   <p:clrMapOvr>
     <a:masterClrMapping/>
@@ -1396,10 +1373,6 @@
           <a:bodyPr/>
           <a:lstStyle/>
           <a:p>
-            <a:r>
-              <a:rPr lang="en-US" dirty="0"/>
-              <a:t/>
-            </a:r>
             <a:endParaRPr lang="en-US" dirty="0"/>
           </a:p>
         </p:txBody>
@@ -1421,18 +1394,12 @@
           <a:p>
             <a:fld id="{F7021451-1387-4CA6-816F-3879F97B5CBC}" type="slidenum">
               <a:rPr lang="en-US"/>
-              <a:t>3</a:t>
             </a:fld>
             <a:endParaRPr lang="en-US"/>
           </a:p>
         </p:txBody>
       </p:sp>
     </p:spTree>
-    <p:extLst>
-      <p:ext uri="{BB962C8B-B14F-4D97-AF65-F5344CB8AC3E}">
-        <p14:creationId xmlns:p14="http://schemas.microsoft.com/office/powerpoint/2010/main" val="1024086991"/>
-      </p:ext>
-    </p:extLst>
   </p:cSld>
   <p:clrMapOvr>
     <a:masterClrMapping/>
@@ -1484,10 +1451,6 @@
           <a:bodyPr/>
           <a:lstStyle/>
           <a:p>
-            <a:r>
-              <a:rPr lang="en-US" dirty="0"/>
-              <a:t/>
-            </a:r>
             <a:endParaRPr lang="en-US" dirty="0"/>
           </a:p>
         </p:txBody>
@@ -1509,18 +1472,12 @@
           <a:p>
             <a:fld id="{F7021451-1387-4CA6-816F-3879F97B5CBC}" type="slidenum">
               <a:rPr lang="en-US"/>
-              <a:t>4</a:t>
             </a:fld>
             <a:endParaRPr lang="en-US"/>
           </a:p>
         </p:txBody>
       </p:sp>
     </p:spTree>
-    <p:extLst>
-      <p:ext uri="{BB962C8B-B14F-4D97-AF65-F5344CB8AC3E}">
-        <p14:creationId xmlns:p14="http://schemas.microsoft.com/office/powerpoint/2010/main" val="1024086991"/>
-      </p:ext>
-    </p:extLst>
   </p:cSld>
   <p:clrMapOvr>
     <a:masterClrMapping/>
@@ -1572,10 +1529,6 @@
           <a:bodyPr/>
           <a:lstStyle/>
           <a:p>
-            <a:r>
-              <a:rPr lang="en-US" dirty="0"/>
-              <a:t/>
-            </a:r>
             <a:endParaRPr lang="en-US" dirty="0"/>
           </a:p>
         </p:txBody>
@@ -1597,18 +1550,12 @@
           <a:p>
             <a:fld id="{F7021451-1387-4CA6-816F-3879F97B5CBC}" type="slidenum">
               <a:rPr lang="en-US"/>
-              <a:t>5</a:t>
             </a:fld>
             <a:endParaRPr lang="en-US"/>
           </a:p>
         </p:txBody>
       </p:sp>
     </p:spTree>
-    <p:extLst>
-      <p:ext uri="{BB962C8B-B14F-4D97-AF65-F5344CB8AC3E}">
-        <p14:creationId xmlns:p14="http://schemas.microsoft.com/office/powerpoint/2010/main" val="1024086991"/>
-      </p:ext>
-    </p:extLst>
   </p:cSld>
   <p:clrMapOvr>
     <a:masterClrMapping/>
@@ -1660,10 +1607,6 @@
           <a:bodyPr/>
           <a:lstStyle/>
           <a:p>
-            <a:r>
-              <a:rPr lang="en-US" dirty="0"/>
-              <a:t/>
-            </a:r>
             <a:endParaRPr lang="en-US" dirty="0"/>
           </a:p>
         </p:txBody>
@@ -1685,18 +1628,12 @@
           <a:p>
             <a:fld id="{F7021451-1387-4CA6-816F-3879F97B5CBC}" type="slidenum">
               <a:rPr lang="en-US"/>
-              <a:t>6</a:t>
             </a:fld>
             <a:endParaRPr lang="en-US"/>
           </a:p>
         </p:txBody>
       </p:sp>
     </p:spTree>
-    <p:extLst>
-      <p:ext uri="{BB962C8B-B14F-4D97-AF65-F5344CB8AC3E}">
-        <p14:creationId xmlns:p14="http://schemas.microsoft.com/office/powerpoint/2010/main" val="1024086991"/>
-      </p:ext>
-    </p:extLst>
   </p:cSld>
   <p:clrMapOvr>
     <a:masterClrMapping/>
@@ -1748,10 +1685,6 @@
           <a:bodyPr/>
           <a:lstStyle/>
           <a:p>
-            <a:r>
-              <a:rPr lang="en-US" dirty="0"/>
-              <a:t/>
-            </a:r>
             <a:endParaRPr lang="en-US" dirty="0"/>
           </a:p>
         </p:txBody>
@@ -1773,18 +1706,12 @@
           <a:p>
             <a:fld id="{F7021451-1387-4CA6-816F-3879F97B5CBC}" type="slidenum">
               <a:rPr lang="en-US"/>
-              <a:t>7</a:t>
             </a:fld>
             <a:endParaRPr lang="en-US"/>
           </a:p>
         </p:txBody>
       </p:sp>
     </p:spTree>
-    <p:extLst>
-      <p:ext uri="{BB962C8B-B14F-4D97-AF65-F5344CB8AC3E}">
-        <p14:creationId xmlns:p14="http://schemas.microsoft.com/office/powerpoint/2010/main" val="1024086991"/>
-      </p:ext>
-    </p:extLst>
   </p:cSld>
   <p:clrMapOvr>
     <a:masterClrMapping/>
@@ -1836,10 +1763,6 @@
           <a:bodyPr/>
           <a:lstStyle/>
           <a:p>
-            <a:r>
-              <a:rPr lang="en-US" dirty="0"/>
-              <a:t/>
-            </a:r>
             <a:endParaRPr lang="en-US" dirty="0"/>
           </a:p>
         </p:txBody>
@@ -1861,18 +1784,12 @@
           <a:p>
             <a:fld id="{F7021451-1387-4CA6-816F-3879F97B5CBC}" type="slidenum">
               <a:rPr lang="en-US"/>
-              <a:t>8</a:t>
             </a:fld>
             <a:endParaRPr lang="en-US"/>
           </a:p>
         </p:txBody>
       </p:sp>
     </p:spTree>
-    <p:extLst>
-      <p:ext uri="{BB962C8B-B14F-4D97-AF65-F5344CB8AC3E}">
-        <p14:creationId xmlns:p14="http://schemas.microsoft.com/office/powerpoint/2010/main" val="1024086991"/>
-      </p:ext>
-    </p:extLst>
   </p:cSld>
   <p:clrMapOvr>
     <a:masterClrMapping/>
@@ -1924,10 +1841,6 @@
           <a:bodyPr/>
           <a:lstStyle/>
           <a:p>
-            <a:r>
-              <a:rPr lang="en-US" dirty="0"/>
-              <a:t/>
-            </a:r>
             <a:endParaRPr lang="en-US" dirty="0"/>
           </a:p>
         </p:txBody>
@@ -1949,18 +1862,12 @@
           <a:p>
             <a:fld id="{F7021451-1387-4CA6-816F-3879F97B5CBC}" type="slidenum">
               <a:rPr lang="en-US"/>
-              <a:t>9</a:t>
             </a:fld>
             <a:endParaRPr lang="en-US"/>
           </a:p>
         </p:txBody>
       </p:sp>
     </p:spTree>
-    <p:extLst>
-      <p:ext uri="{BB962C8B-B14F-4D97-AF65-F5344CB8AC3E}">
-        <p14:creationId xmlns:p14="http://schemas.microsoft.com/office/powerpoint/2010/main" val="1024086991"/>
-      </p:ext>
-    </p:extLst>
   </p:cSld>
   <p:clrMapOvr>
     <a:masterClrMapping/>
@@ -2001,6 +1908,11 @@
 <file path=ppt/slideMasters/slideMaster1.xml><?xml version="1.0" encoding="utf-8"?>
 <p:sldMaster xmlns:a="http://schemas.openxmlformats.org/drawingml/2006/main" xmlns:r="http://schemas.openxmlformats.org/officeDocument/2006/relationships" xmlns:p="http://schemas.openxmlformats.org/presentationml/2006/main">
   <p:cSld>
+    <p:bg>
+      <p:bgRef idx="1001">
+        <a:schemeClr val="bg1"/>
+      </p:bgRef>
+    </p:bg>
     <p:spTree>
       <p:nvGrpSpPr>
         <p:cNvPr id="1" name=""/>
@@ -2044,7 +1956,7 @@
         <a:spcBef>
           <a:spcPct val="20000"/>
         </a:spcBef>
-        <a:buFont typeface="Arial" pitchFamily="34" charset="0"/>
+        <a:buFont typeface="Arial" panose="020B0604020202020204" pitchFamily="34" charset="0"/>
         <a:buChar char="•"/>
         <a:defRPr sz="3200" kern="1200">
           <a:solidFill>
@@ -2059,7 +1971,7 @@
         <a:spcBef>
           <a:spcPct val="20000"/>
         </a:spcBef>
-        <a:buFont typeface="Arial" pitchFamily="34" charset="0"/>
+        <a:buFont typeface="Arial" panose="020B0604020202020204" pitchFamily="34" charset="0"/>
         <a:buChar char="–"/>
         <a:defRPr sz="2800" kern="1200">
           <a:solidFill>
@@ -2074,7 +1986,7 @@
         <a:spcBef>
           <a:spcPct val="20000"/>
         </a:spcBef>
-        <a:buFont typeface="Arial" pitchFamily="34" charset="0"/>
+        <a:buFont typeface="Arial" panose="020B0604020202020204" pitchFamily="34" charset="0"/>
         <a:buChar char="•"/>
         <a:defRPr sz="2400" kern="1200">
           <a:solidFill>
@@ -2089,7 +2001,7 @@
         <a:spcBef>
           <a:spcPct val="20000"/>
         </a:spcBef>
-        <a:buFont typeface="Arial" pitchFamily="34" charset="0"/>
+        <a:buFont typeface="Arial" panose="020B0604020202020204" pitchFamily="34" charset="0"/>
         <a:buChar char="–"/>
         <a:defRPr sz="2000" kern="1200">
           <a:solidFill>
@@ -2104,7 +2016,7 @@
         <a:spcBef>
           <a:spcPct val="20000"/>
         </a:spcBef>
-        <a:buFont typeface="Arial" pitchFamily="34" charset="0"/>
+        <a:buFont typeface="Arial" panose="020B0604020202020204" pitchFamily="34" charset="0"/>
         <a:buChar char="»"/>
         <a:defRPr sz="2000" kern="1200">
           <a:solidFill>
@@ -2119,7 +2031,7 @@
         <a:spcBef>
           <a:spcPct val="20000"/>
         </a:spcBef>
-        <a:buFont typeface="Arial" pitchFamily="34" charset="0"/>
+        <a:buFont typeface="Arial" panose="020B0604020202020204" pitchFamily="34" charset="0"/>
         <a:buChar char="•"/>
         <a:defRPr sz="2000" kern="1200">
           <a:solidFill>
@@ -2134,7 +2046,7 @@
         <a:spcBef>
           <a:spcPct val="20000"/>
         </a:spcBef>
-        <a:buFont typeface="Arial" pitchFamily="34" charset="0"/>
+        <a:buFont typeface="Arial" panose="020B0604020202020204" pitchFamily="34" charset="0"/>
         <a:buChar char="•"/>
         <a:defRPr sz="2000" kern="1200">
           <a:solidFill>
@@ -2149,7 +2061,7 @@
         <a:spcBef>
           <a:spcPct val="20000"/>
         </a:spcBef>
-        <a:buFont typeface="Arial" pitchFamily="34" charset="0"/>
+        <a:buFont typeface="Arial" panose="020B0604020202020204" pitchFamily="34" charset="0"/>
         <a:buChar char="•"/>
         <a:defRPr sz="2000" kern="1200">
           <a:solidFill>
@@ -2164,7 +2076,7 @@
         <a:spcBef>
           <a:spcPct val="20000"/>
         </a:spcBef>
-        <a:buFont typeface="Arial" pitchFamily="34" charset="0"/>
+        <a:buFont typeface="Arial" panose="020B0604020202020204" pitchFamily="34" charset="0"/>
         <a:buChar char="•"/>
         <a:defRPr sz="2000" kern="1200">
           <a:solidFill>
@@ -2277,7 +2189,7 @@
 
 <file path=ppt/slides/slide1.xml><?xml version="1.0" encoding="utf-8"?>
 <p:sld xmlns:a="http://schemas.openxmlformats.org/drawingml/2006/main" xmlns:r="http://schemas.openxmlformats.org/officeDocument/2006/relationships" xmlns:p="http://schemas.openxmlformats.org/presentationml/2006/main">
-  <p:cSld name="Slide 1">
+  <p:cSld>
     <p:bg>
       <p:bgPr>
         <a:blipFill dpi="0" rotWithShape="1">
@@ -2321,13 +2233,12 @@
             <a:avLst/>
           </a:prstGeom>
           <a:noFill/>
-          <a:ln/>
         </p:spPr>
         <p:txBody>
           <a:bodyPr wrap="square" rtlCol="0" anchor="ctr"/>
           <a:lstStyle/>
           <a:p>
-            <a:pPr algn="r" indent="0" marL="0">
+            <a:pPr marL="0" indent="0" algn="r">
               <a:buNone/>
             </a:pPr>
             <a:r>
@@ -2335,9 +2246,9 @@
                 <a:solidFill>
                   <a:srgbClr val="8A9099"/>
                 </a:solidFill>
-                <a:latin typeface="微软雅黑" pitchFamily="34" charset="0"/>
-                <a:ea typeface="微软雅黑" pitchFamily="34" charset="-122"/>
-                <a:cs typeface="微软雅黑" pitchFamily="34" charset="-120"/>
+                <a:latin typeface="微软雅黑" panose="020B0503020204020204" pitchFamily="34" charset="-122"/>
+                <a:ea typeface="微软雅黑" panose="020B0503020204020204" pitchFamily="34" charset="-122"/>
+                <a:cs typeface="微软雅黑" panose="020B0503020204020204" pitchFamily="34" charset="-120"/>
               </a:rPr>
               <a:t>1 / 17</a:t>
             </a:r>
@@ -2360,13 +2271,12 @@
             <a:avLst/>
           </a:prstGeom>
           <a:noFill/>
-          <a:ln/>
         </p:spPr>
         <p:txBody>
           <a:bodyPr wrap="square" rtlCol="0" anchor="ctr"/>
           <a:lstStyle/>
           <a:p>
-            <a:pPr algn="ctr" indent="0" marL="0">
+            <a:pPr marL="0" indent="0" algn="ctr">
               <a:buNone/>
             </a:pPr>
             <a:r>
@@ -2374,9 +2284,9 @@
                 <a:solidFill>
                   <a:srgbClr val="1F4E9C"/>
                 </a:solidFill>
-                <a:latin typeface="微软雅黑" pitchFamily="34" charset="0"/>
-                <a:ea typeface="微软雅黑" pitchFamily="34" charset="-122"/>
-                <a:cs typeface="微软雅黑" pitchFamily="34" charset="-120"/>
+                <a:latin typeface="微软雅黑" panose="020B0503020204020204" pitchFamily="34" charset="-122"/>
+                <a:ea typeface="微软雅黑" panose="020B0503020204020204" pitchFamily="34" charset="-122"/>
+                <a:cs typeface="微软雅黑" panose="020B0503020204020204" pitchFamily="34" charset="-120"/>
               </a:rPr>
               <a:t>重邮802 数据结构代码课程</a:t>
             </a:r>
@@ -2399,13 +2309,12 @@
             <a:avLst/>
           </a:prstGeom>
           <a:noFill/>
-          <a:ln/>
         </p:spPr>
         <p:txBody>
           <a:bodyPr wrap="square" rtlCol="0" anchor="ctr"/>
           <a:lstStyle/>
           <a:p>
-            <a:pPr algn="ctr" indent="0" marL="0">
+            <a:pPr marL="0" indent="0" algn="ctr">
               <a:buNone/>
             </a:pPr>
             <a:r>
@@ -2413,9 +2322,9 @@
                 <a:solidFill>
                   <a:srgbClr val="1F2329"/>
                 </a:solidFill>
-                <a:latin typeface="微软雅黑" pitchFamily="34" charset="0"/>
-                <a:ea typeface="微软雅黑" pitchFamily="34" charset="-122"/>
-                <a:cs typeface="微软雅黑" pitchFamily="34" charset="-120"/>
+                <a:latin typeface="微软雅黑" panose="020B0503020204020204" pitchFamily="34" charset="-122"/>
+                <a:ea typeface="微软雅黑" panose="020B0503020204020204" pitchFamily="34" charset="-122"/>
+                <a:cs typeface="微软雅黑" panose="020B0503020204020204" pitchFamily="34" charset="-120"/>
               </a:rPr>
               <a:t>数据结构基础阶段</a:t>
             </a:r>
@@ -2438,13 +2347,12 @@
             <a:avLst/>
           </a:prstGeom>
           <a:noFill/>
-          <a:ln/>
         </p:spPr>
         <p:txBody>
           <a:bodyPr wrap="square" rtlCol="0" anchor="ctr"/>
           <a:lstStyle/>
           <a:p>
-            <a:pPr algn="ctr" indent="0" marL="0">
+            <a:pPr marL="0" indent="0" algn="ctr">
               <a:buNone/>
             </a:pPr>
             <a:r>
@@ -2452,9 +2360,9 @@
                 <a:solidFill>
                   <a:srgbClr val="1F2329"/>
                 </a:solidFill>
-                <a:latin typeface="微软雅黑" pitchFamily="34" charset="0"/>
-                <a:ea typeface="微软雅黑" pitchFamily="34" charset="-122"/>
-                <a:cs typeface="微软雅黑" pitchFamily="34" charset="-120"/>
+                <a:latin typeface="微软雅黑" panose="020B0503020204020204" pitchFamily="34" charset="-122"/>
+                <a:ea typeface="微软雅黑" panose="020B0503020204020204" pitchFamily="34" charset="-122"/>
+                <a:cs typeface="微软雅黑" panose="020B0503020204020204" pitchFamily="34" charset="-120"/>
               </a:rPr>
               <a:t>第9节 图：存储与遍历</a:t>
             </a:r>
@@ -2477,13 +2385,12 @@
             <a:avLst/>
           </a:prstGeom>
           <a:noFill/>
-          <a:ln/>
         </p:spPr>
         <p:txBody>
           <a:bodyPr wrap="square" rtlCol="0" anchor="ctr"/>
           <a:lstStyle/>
           <a:p>
-            <a:pPr algn="ctr" indent="0" marL="0">
+            <a:pPr marL="0" indent="0" algn="ctr">
               <a:buNone/>
             </a:pPr>
             <a:r>
@@ -2491,9 +2398,9 @@
                 <a:solidFill>
                   <a:srgbClr val="8A9099"/>
                 </a:solidFill>
-                <a:latin typeface="微软雅黑" pitchFamily="34" charset="0"/>
-                <a:ea typeface="微软雅黑" pitchFamily="34" charset="-122"/>
-                <a:cs typeface="微软雅黑" pitchFamily="34" charset="-120"/>
+                <a:latin typeface="微软雅黑" panose="020B0503020204020204" pitchFamily="34" charset="-122"/>
+                <a:ea typeface="微软雅黑" panose="020B0503020204020204" pitchFamily="34" charset="-122"/>
+                <a:cs typeface="微软雅黑" panose="020B0503020204020204" pitchFamily="34" charset="-120"/>
               </a:rPr>
               <a:t>阶段：基础 ｜ 主讲：牙膏学长 ｜ 预计45分钟 ｜ 资料答疑：伴梦研途QQ群</a:t>
             </a:r>
@@ -2511,7 +2418,7 @@
 
 <file path=ppt/slides/slide10.xml><?xml version="1.0" encoding="utf-8"?>
 <p:sld xmlns:a="http://schemas.openxmlformats.org/drawingml/2006/main" xmlns:r="http://schemas.openxmlformats.org/officeDocument/2006/relationships" xmlns:p="http://schemas.openxmlformats.org/presentationml/2006/main">
-  <p:cSld name="Slide 10">
+  <p:cSld>
     <p:bg>
       <p:bgPr>
         <a:blipFill dpi="0" rotWithShape="1">
@@ -2555,13 +2462,12 @@
             <a:avLst/>
           </a:prstGeom>
           <a:noFill/>
-          <a:ln/>
         </p:spPr>
         <p:txBody>
           <a:bodyPr wrap="square" rtlCol="0" anchor="ctr"/>
           <a:lstStyle/>
           <a:p>
-            <a:pPr algn="r" indent="0" marL="0">
+            <a:pPr marL="0" indent="0" algn="r">
               <a:buNone/>
             </a:pPr>
             <a:r>
@@ -2569,11 +2475,11 @@
                 <a:solidFill>
                   <a:srgbClr val="8A9099"/>
                 </a:solidFill>
-                <a:latin typeface="微软雅黑" pitchFamily="34" charset="0"/>
-                <a:ea typeface="微软雅黑" pitchFamily="34" charset="-122"/>
-                <a:cs typeface="微软雅黑" pitchFamily="34" charset="-120"/>
-              </a:rPr>
-              <a:t>10 / 17</a:t>
+                <a:latin typeface="微软雅黑" panose="020B0503020204020204" pitchFamily="34" charset="-122"/>
+                <a:ea typeface="微软雅黑" panose="020B0503020204020204" pitchFamily="34" charset="-122"/>
+                <a:cs typeface="微软雅黑" panose="020B0503020204020204" pitchFamily="34" charset="-120"/>
+              </a:rPr>
+              <a:t>9 / 17</a:t>
             </a:r>
             <a:endParaRPr lang="en-US" sz="1000" dirty="0"/>
           </a:p>
@@ -2594,13 +2500,12 @@
             <a:avLst/>
           </a:prstGeom>
           <a:noFill/>
-          <a:ln/>
         </p:spPr>
         <p:txBody>
           <a:bodyPr wrap="square" rtlCol="0" anchor="ctr"/>
           <a:lstStyle/>
           <a:p>
-            <a:pPr algn="l" indent="0" marL="0">
+            <a:pPr marL="0" indent="0" algn="l">
               <a:buNone/>
             </a:pPr>
             <a:r>
@@ -2608,11 +2513,11 @@
                 <a:solidFill>
                   <a:srgbClr val="1F4E9C"/>
                 </a:solidFill>
-                <a:latin typeface="微软雅黑" pitchFamily="34" charset="0"/>
-                <a:ea typeface="微软雅黑" pitchFamily="34" charset="-122"/>
-                <a:cs typeface="微软雅黑" pitchFamily="34" charset="-120"/>
-              </a:rPr>
-              <a:t>遍历 · 过程页</a:t>
+                <a:latin typeface="微软雅黑" panose="020B0503020204020204" pitchFamily="34" charset="-122"/>
+                <a:ea typeface="微软雅黑" panose="020B0503020204020204" pitchFamily="34" charset="-122"/>
+                <a:cs typeface="微软雅黑" panose="020B0503020204020204" pitchFamily="34" charset="-120"/>
+              </a:rPr>
+              <a:t>遍历 · BFS · 检查页</a:t>
             </a:r>
             <a:endParaRPr lang="en-US" sz="1400" dirty="0"/>
           </a:p>
@@ -2633,13 +2538,12 @@
             <a:avLst/>
           </a:prstGeom>
           <a:noFill/>
-          <a:ln/>
         </p:spPr>
         <p:txBody>
           <a:bodyPr wrap="square" rtlCol="0" anchor="ctr"/>
           <a:lstStyle/>
           <a:p>
-            <a:pPr algn="l" indent="0" marL="0">
+            <a:pPr marL="0" indent="0" algn="l">
               <a:buNone/>
             </a:pPr>
             <a:r>
@@ -2647,90 +2551,98 @@
                 <a:solidFill>
                   <a:srgbClr val="1F2329"/>
                 </a:solidFill>
-                <a:latin typeface="微软雅黑" pitchFamily="34" charset="0"/>
-                <a:ea typeface="微软雅黑" pitchFamily="34" charset="-122"/>
-                <a:cs typeface="微软雅黑" pitchFamily="34" charset="-120"/>
-              </a:rPr>
-              <a:t>同一张图，DFS 与 BFS 走一遍对比（拿纸跟画）</a:t>
+                <a:latin typeface="微软雅黑" panose="020B0503020204020204" pitchFamily="34" charset="-122"/>
+                <a:ea typeface="微软雅黑" panose="020B0503020204020204" pitchFamily="34" charset="-122"/>
+                <a:cs typeface="微软雅黑" panose="020B0503020204020204" pitchFamily="34" charset="-120"/>
+              </a:rPr>
+              <a:t>BFS 广度优先：为什么入队时就标记（先自己想）</a:t>
             </a:r>
             <a:endParaRPr lang="en-US" sz="2800" dirty="0"/>
           </a:p>
         </p:txBody>
       </p:sp>
-      <p:pic>
-        <p:nvPicPr>
-          <p:cNvPr id="5" name="Image 0" descr="D:\Program Project\SpecialtyCourses\assets\diagrams\a9-graph.png">    </p:cNvPr>
-          <p:cNvPicPr>
-            <a:picLocks noChangeAspect="1"/>
-          </p:cNvPicPr>
-          <p:nvPr/>
-        </p:nvPicPr>
-        <p:blipFill>
-          <a:blip r:embed="rId2"/>
-          <a:srcRect l="0" r="0" t="0" b="0"/>
-          <a:stretch/>
-        </p:blipFill>
-        <p:spPr>
-          <a:xfrm>
-            <a:off x="2438248" y="2395728"/>
-            <a:ext cx="7315200" cy="2743200"/>
-          </a:xfrm>
-          <a:prstGeom prst="rect">
-            <a:avLst/>
-          </a:prstGeom>
-        </p:spPr>
-      </p:pic>
-      <p:sp>
-        <p:nvSpPr>
-          <p:cNvPr id="6" name="Text 3"/>
-          <p:cNvSpPr/>
-          <p:nvPr/>
-        </p:nvSpPr>
-        <p:spPr>
-          <a:xfrm>
-            <a:off x="896112" y="5321808"/>
-            <a:ext cx="10454335" cy="321564"/>
-          </a:xfrm>
-          <a:prstGeom prst="rect">
-            <a:avLst/>
-          </a:prstGeom>
-          <a:noFill/>
-          <a:ln/>
+      <p:sp>
+        <p:nvSpPr>
+          <p:cNvPr id="5" name="Shape 3"/>
+          <p:cNvSpPr/>
+          <p:nvPr/>
+        </p:nvSpPr>
+        <p:spPr>
+          <a:xfrm>
+            <a:off x="822960" y="2395728"/>
+            <a:ext cx="10545775" cy="2459736"/>
+          </a:xfrm>
+          <a:prstGeom prst="rect">
+            <a:avLst/>
+          </a:prstGeom>
+          <a:solidFill>
+            <a:srgbClr val="F7F9FC"/>
+          </a:solidFill>
+        </p:spPr>
+      </p:sp>
+      <p:sp>
+        <p:nvSpPr>
+          <p:cNvPr id="6" name="Shape 4"/>
+          <p:cNvSpPr/>
+          <p:nvPr/>
+        </p:nvSpPr>
+        <p:spPr>
+          <a:xfrm>
+            <a:off x="822960" y="2395728"/>
+            <a:ext cx="50292" cy="2459736"/>
+          </a:xfrm>
+          <a:prstGeom prst="rect">
+            <a:avLst/>
+          </a:prstGeom>
+          <a:solidFill>
+            <a:srgbClr val="1F4E9C"/>
+          </a:solidFill>
+        </p:spPr>
+      </p:sp>
+      <p:sp>
+        <p:nvSpPr>
+          <p:cNvPr id="7" name="Text 5"/>
+          <p:cNvSpPr/>
+          <p:nvPr/>
+        </p:nvSpPr>
+        <p:spPr>
+          <a:xfrm>
+            <a:off x="1078992" y="2505456"/>
+            <a:ext cx="10033711" cy="2240280"/>
+          </a:xfrm>
+          <a:prstGeom prst="rect">
+            <a:avLst/>
+          </a:prstGeom>
+          <a:noFill/>
         </p:spPr>
         <p:txBody>
           <a:bodyPr wrap="square" rtlCol="0" anchor="t"/>
           <a:lstStyle/>
           <a:p>
-            <a:pPr algn="l" indent="0" marL="0">
+            <a:pPr marL="0" indent="0" algn="l">
               <a:lnSpc>
-                <a:spcPct val="115000"/>
+                <a:spcPct val="125000"/>
               </a:lnSpc>
               <a:buNone/>
             </a:pPr>
             <a:r>
-              <a:rPr lang="en-US" sz="1400" b="1" dirty="0">
-                <a:solidFill>
-                  <a:srgbClr val="1F4E9C"/>
-                </a:solidFill>
-                <a:latin typeface="微软雅黑" pitchFamily="34" charset="0"/>
-                <a:ea typeface="微软雅黑" pitchFamily="34" charset="-122"/>
-                <a:cs typeface="微软雅黑" pitchFamily="34" charset="-120"/>
-              </a:rPr>
-              <a:t>•  </a:t>
-            </a:r>
-            <a:pPr algn="l" indent="0" marL="0">
-              <a:lnSpc>
-                <a:spcPct val="115000"/>
-              </a:lnSpc>
-              <a:buNone/>
-            </a:pPr>
-            <a:r>
               <a:rPr lang="en-US" sz="1400" dirty="0">
                 <a:solidFill>
-                  <a:srgbClr val="000000"/>
-                </a:solidFill>
-              </a:rPr>
-              <a:t>图有5个顶点0到4，边是 0-1、0-2、1-3、2-4、3-4；邻接表按顶点号从小到大排</a:t>
+                  <a:srgbClr val="1F2329"/>
+                </a:solidFill>
+                <a:latin typeface="Consolas" panose="020B0609020204030204" pitchFamily="34" charset="0"/>
+                <a:ea typeface="Consolas" panose="020B0609020204030204" pitchFamily="34" charset="-122"/>
+                <a:cs typeface="Consolas" panose="020B0609020204030204" pitchFamily="34" charset="-120"/>
+              </a:rPr>
+              <a:t>void BFS(ALGraph G, int v){
+    visit(v); visited[v] = true; EnQueue(Q, v);      // 入队时就标记
+    while(!IsEmpty(Q)){
+        DeQueue(Q, v);
+        for(ArcNode *p = G.vertices[v].firstarc; p != NULL; p = p-&gt;nextarc)
+            if(!visited[p-&gt;adjvex]){ visit(p-&gt;adjvex); visited[p-&gt;adjvex]=true; EnQueue(Q, p-&gt;adjvex); }
+    }
+}
+</a:t>
             </a:r>
             <a:endParaRPr lang="en-US" sz="1400" dirty="0"/>
           </a:p>
@@ -2738,152 +2650,39 @@
       </p:sp>
       <p:sp>
         <p:nvSpPr>
-          <p:cNvPr id="7" name="Text 4"/>
-          <p:cNvSpPr/>
-          <p:nvPr/>
-        </p:nvSpPr>
-        <p:spPr>
-          <a:xfrm>
-            <a:off x="896112" y="5716524"/>
-            <a:ext cx="10454335" cy="588264"/>
-          </a:xfrm>
-          <a:prstGeom prst="rect">
-            <a:avLst/>
-          </a:prstGeom>
-          <a:noFill/>
-          <a:ln/>
+          <p:cNvPr id="8" name="Text 6"/>
+          <p:cNvSpPr/>
+          <p:nvPr/>
+        </p:nvSpPr>
+        <p:spPr>
+          <a:xfrm>
+            <a:off x="822960" y="5056632"/>
+            <a:ext cx="10545775" cy="644652"/>
+          </a:xfrm>
+          <a:prstGeom prst="rect">
+            <a:avLst/>
+          </a:prstGeom>
+          <a:noFill/>
         </p:spPr>
         <p:txBody>
           <a:bodyPr wrap="square" rtlCol="0" anchor="t"/>
           <a:lstStyle/>
           <a:p>
-            <a:pPr algn="l" indent="0" marL="0">
-              <a:lnSpc>
-                <a:spcPct val="115000"/>
-              </a:lnSpc>
-              <a:buNone/>
-            </a:pPr>
-            <a:r>
-              <a:rPr lang="en-US" sz="1400" b="1" dirty="0">
-                <a:solidFill>
-                  <a:srgbClr val="1F4E9C"/>
-                </a:solidFill>
-                <a:latin typeface="微软雅黑" pitchFamily="34" charset="0"/>
-                <a:ea typeface="微软雅黑" pitchFamily="34" charset="-122"/>
-                <a:cs typeface="微软雅黑" pitchFamily="34" charset="-120"/>
-              </a:rPr>
-              <a:t>•  </a:t>
-            </a:r>
-            <a:pPr algn="l" indent="0" marL="0">
-              <a:lnSpc>
-                <a:spcPct val="115000"/>
-              </a:lnSpc>
-              <a:buNone/>
-            </a:pPr>
-            <a:r>
-              <a:rPr lang="en-US" sz="1400" dirty="0">
-                <a:solidFill>
-                  <a:srgbClr val="000000"/>
-                </a:solidFill>
-              </a:rPr>
-              <a:t>DFS 从0：访问0→邻居1没访问，进1→1的邻居3没访问，进3→3的邻居4，进4→4的邻居2，进2→2的邻居都访问过，层层回退。序列 0 1 3 4 2</a:t>
-            </a:r>
-            <a:endParaRPr lang="en-US" sz="1400" dirty="0"/>
-          </a:p>
-        </p:txBody>
-      </p:sp>
-      <p:sp>
-        <p:nvSpPr>
-          <p:cNvPr id="8" name="Text 5"/>
-          <p:cNvSpPr/>
-          <p:nvPr/>
-        </p:nvSpPr>
-        <p:spPr>
-          <a:xfrm>
-            <a:off x="896112" y="6377940"/>
-            <a:ext cx="10454335" cy="588264"/>
-          </a:xfrm>
-          <a:prstGeom prst="rect">
-            <a:avLst/>
-          </a:prstGeom>
-          <a:noFill/>
-          <a:ln/>
-        </p:spPr>
-        <p:txBody>
-          <a:bodyPr wrap="square" rtlCol="0" anchor="t"/>
-          <a:lstStyle/>
-          <a:p>
-            <a:pPr algn="l" indent="0" marL="0">
-              <a:lnSpc>
-                <a:spcPct val="115000"/>
-              </a:lnSpc>
-              <a:buNone/>
-            </a:pPr>
-            <a:r>
-              <a:rPr lang="en-US" sz="1400" b="1" dirty="0">
-                <a:solidFill>
-                  <a:srgbClr val="1F4E9C"/>
-                </a:solidFill>
-                <a:latin typeface="微软雅黑" pitchFamily="34" charset="0"/>
-                <a:ea typeface="微软雅黑" pitchFamily="34" charset="-122"/>
-                <a:cs typeface="微软雅黑" pitchFamily="34" charset="-120"/>
-              </a:rPr>
-              <a:t>•  </a:t>
-            </a:r>
-            <a:pPr algn="l" indent="0" marL="0">
-              <a:lnSpc>
-                <a:spcPct val="115000"/>
-              </a:lnSpc>
-              <a:buNone/>
-            </a:pPr>
-            <a:r>
-              <a:rPr lang="en-US" sz="1400" dirty="0">
-                <a:solidFill>
-                  <a:srgbClr val="000000"/>
-                </a:solidFill>
-              </a:rPr>
-              <a:t>BFS 从0：访问0入队；出0，把邻居1、2访问并入队；出1，邻居3访问入队；出2，邻居4访问入队；出3、出4无新顶点。序列 0 1 2 3 4</a:t>
-            </a:r>
-            <a:endParaRPr lang="en-US" sz="1400" dirty="0"/>
-          </a:p>
-        </p:txBody>
-      </p:sp>
-      <p:sp>
-        <p:nvSpPr>
-          <p:cNvPr id="9" name="Text 6"/>
-          <p:cNvSpPr/>
-          <p:nvPr/>
-        </p:nvSpPr>
-        <p:spPr>
-          <a:xfrm>
-            <a:off x="822960" y="7130796"/>
-            <a:ext cx="10545775" cy="530352"/>
-          </a:xfrm>
-          <a:prstGeom prst="rect">
-            <a:avLst/>
-          </a:prstGeom>
-          <a:noFill/>
-          <a:ln/>
-        </p:spPr>
-        <p:txBody>
-          <a:bodyPr wrap="square" rtlCol="0" anchor="t"/>
-          <a:lstStyle/>
-          <a:p>
-            <a:pPr algn="l" indent="0" marL="0">
-              <a:buNone/>
-            </a:pPr>
-            <a:r>
-              <a:rPr lang="en-US" sz="1200" dirty="0">
+            <a:pPr marL="0" indent="0" algn="l">
+              <a:buNone/>
+            </a:pPr>
+            <a:r>
+              <a:rPr lang="en-US" sz="1500" dirty="0">
                 <a:solidFill>
                   <a:srgbClr val="8A9099"/>
                 </a:solidFill>
-                <a:latin typeface="微软雅黑" pitchFamily="34" charset="0"/>
-                <a:ea typeface="微软雅黑" pitchFamily="34" charset="-122"/>
-                <a:cs typeface="微软雅黑" pitchFamily="34" charset="-120"/>
-              </a:rPr>
-              <a:t>同一张图，DFS 一路往深走（0 1 3 4 2），BFS 一层层扩（0 1 2 3 4）；你把 visited 和队列的状态一步步标出来就看清了</a:t>
-            </a:r>
-            <a:endParaRPr lang="en-US" sz="1200" dirty="0"/>
+                <a:latin typeface="微软雅黑" panose="020B0503020204020204" pitchFamily="34" charset="-122"/>
+                <a:ea typeface="微软雅黑" panose="020B0503020204020204" pitchFamily="34" charset="-122"/>
+                <a:cs typeface="微软雅黑" panose="020B0503020204020204" pitchFamily="34" charset="-120"/>
+              </a:rPr>
+              <a:t>先想：如果把标记挪到出队时才做，会怎样？——同一个顶点会被多个邻居重复入队，visit 输出好几遍、队列也变长。入队时就标记，保证每个顶点最多入队一次</a:t>
+            </a:r>
+            <a:endParaRPr lang="en-US" sz="1500" dirty="0"/>
           </a:p>
         </p:txBody>
       </p:sp>
@@ -2897,7 +2696,7 @@
 
 <file path=ppt/slides/slide11.xml><?xml version="1.0" encoding="utf-8"?>
 <p:sld xmlns:a="http://schemas.openxmlformats.org/drawingml/2006/main" xmlns:r="http://schemas.openxmlformats.org/officeDocument/2006/relationships" xmlns:p="http://schemas.openxmlformats.org/presentationml/2006/main">
-  <p:cSld name="Slide 11">
+  <p:cSld>
     <p:bg>
       <p:bgPr>
         <a:blipFill dpi="0" rotWithShape="1">
@@ -2941,13 +2740,12 @@
             <a:avLst/>
           </a:prstGeom>
           <a:noFill/>
-          <a:ln/>
         </p:spPr>
         <p:txBody>
           <a:bodyPr wrap="square" rtlCol="0" anchor="ctr"/>
           <a:lstStyle/>
           <a:p>
-            <a:pPr algn="r" indent="0" marL="0">
+            <a:pPr marL="0" indent="0" algn="r">
               <a:buNone/>
             </a:pPr>
             <a:r>
@@ -2955,11 +2753,11 @@
                 <a:solidFill>
                   <a:srgbClr val="8A9099"/>
                 </a:solidFill>
-                <a:latin typeface="微软雅黑" pitchFamily="34" charset="0"/>
-                <a:ea typeface="微软雅黑" pitchFamily="34" charset="-122"/>
-                <a:cs typeface="微软雅黑" pitchFamily="34" charset="-120"/>
-              </a:rPr>
-              <a:t>11 / 17</a:t>
+                <a:latin typeface="微软雅黑" panose="020B0503020204020204" pitchFamily="34" charset="-122"/>
+                <a:ea typeface="微软雅黑" panose="020B0503020204020204" pitchFamily="34" charset="-122"/>
+                <a:cs typeface="微软雅黑" panose="020B0503020204020204" pitchFamily="34" charset="-120"/>
+              </a:rPr>
+              <a:t>10 / 17</a:t>
             </a:r>
             <a:endParaRPr lang="en-US" sz="1000" dirty="0"/>
           </a:p>
@@ -2980,13 +2778,12 @@
             <a:avLst/>
           </a:prstGeom>
           <a:noFill/>
-          <a:ln/>
         </p:spPr>
         <p:txBody>
           <a:bodyPr wrap="square" rtlCol="0" anchor="ctr"/>
           <a:lstStyle/>
           <a:p>
-            <a:pPr algn="l" indent="0" marL="0">
+            <a:pPr marL="0" indent="0" algn="l">
               <a:buNone/>
             </a:pPr>
             <a:r>
@@ -2994,11 +2791,11 @@
                 <a:solidFill>
                   <a:srgbClr val="1F4E9C"/>
                 </a:solidFill>
-                <a:latin typeface="微软雅黑" pitchFamily="34" charset="0"/>
-                <a:ea typeface="微软雅黑" pitchFamily="34" charset="-122"/>
-                <a:cs typeface="微软雅黑" pitchFamily="34" charset="-120"/>
-              </a:rPr>
-              <a:t>遍历 · 非连通图</a:t>
+                <a:latin typeface="微软雅黑" panose="020B0503020204020204" pitchFamily="34" charset="-122"/>
+                <a:ea typeface="微软雅黑" panose="020B0503020204020204" pitchFamily="34" charset="-122"/>
+                <a:cs typeface="微软雅黑" panose="020B0503020204020204" pitchFamily="34" charset="-120"/>
+              </a:rPr>
+              <a:t>遍历 · 过程页</a:t>
             </a:r>
             <a:endParaRPr lang="en-US" sz="1400" dirty="0"/>
           </a:p>
@@ -3019,13 +2816,12 @@
             <a:avLst/>
           </a:prstGeom>
           <a:noFill/>
-          <a:ln/>
         </p:spPr>
         <p:txBody>
           <a:bodyPr wrap="square" rtlCol="0" anchor="ctr"/>
           <a:lstStyle/>
           <a:p>
-            <a:pPr algn="l" indent="0" marL="0">
+            <a:pPr marL="0" indent="0" algn="l">
               <a:buNone/>
             </a:pPr>
             <a:r>
@@ -3033,98 +2829,85 @@
                 <a:solidFill>
                   <a:srgbClr val="1F2329"/>
                 </a:solidFill>
-                <a:latin typeface="微软雅黑" pitchFamily="34" charset="0"/>
-                <a:ea typeface="微软雅黑" pitchFamily="34" charset="-122"/>
-                <a:cs typeface="微软雅黑" pitchFamily="34" charset="-120"/>
-              </a:rPr>
-              <a:t>非连通图：外套一层 Traverse</a:t>
+                <a:latin typeface="微软雅黑" panose="020B0503020204020204" pitchFamily="34" charset="-122"/>
+                <a:ea typeface="微软雅黑" panose="020B0503020204020204" pitchFamily="34" charset="-122"/>
+                <a:cs typeface="微软雅黑" panose="020B0503020204020204" pitchFamily="34" charset="-120"/>
+              </a:rPr>
+              <a:t>同一张图，DFS 与 BFS 走一遍对比（拿纸跟画）</a:t>
             </a:r>
             <a:endParaRPr lang="en-US" sz="2800" dirty="0"/>
           </a:p>
         </p:txBody>
       </p:sp>
-      <p:sp>
-        <p:nvSpPr>
-          <p:cNvPr id="5" name="Shape 3"/>
-          <p:cNvSpPr/>
-          <p:nvPr/>
-        </p:nvSpPr>
-        <p:spPr>
-          <a:xfrm>
-            <a:off x="822960" y="2395728"/>
-            <a:ext cx="10545775" cy="1746504"/>
-          </a:xfrm>
-          <a:prstGeom prst="rect">
-            <a:avLst/>
-          </a:prstGeom>
-          <a:solidFill>
-            <a:srgbClr val="F7F9FC"/>
-          </a:solidFill>
-          <a:ln/>
-        </p:spPr>
-      </p:sp>
-      <p:sp>
-        <p:nvSpPr>
-          <p:cNvPr id="6" name="Shape 4"/>
-          <p:cNvSpPr/>
-          <p:nvPr/>
-        </p:nvSpPr>
-        <p:spPr>
-          <a:xfrm>
-            <a:off x="822960" y="2395728"/>
-            <a:ext cx="50292" cy="1746504"/>
-          </a:xfrm>
-          <a:prstGeom prst="rect">
-            <a:avLst/>
-          </a:prstGeom>
-          <a:solidFill>
-            <a:srgbClr val="1F4E9C"/>
-          </a:solidFill>
-          <a:ln/>
-        </p:spPr>
-      </p:sp>
-      <p:sp>
-        <p:nvSpPr>
-          <p:cNvPr id="7" name="Text 5"/>
-          <p:cNvSpPr/>
-          <p:nvPr/>
-        </p:nvSpPr>
-        <p:spPr>
-          <a:xfrm>
-            <a:off x="1078992" y="2505456"/>
-            <a:ext cx="10033711" cy="1527048"/>
-          </a:xfrm>
-          <a:prstGeom prst="rect">
-            <a:avLst/>
-          </a:prstGeom>
-          <a:noFill/>
-          <a:ln/>
+      <p:pic>
+        <p:nvPicPr>
+          <p:cNvPr id="5" name="Image 0" descr="D:\Program Project\SpecialtyCourses\assets\diagrams\a9-graph.png"/>
+          <p:cNvPicPr>
+            <a:picLocks noChangeAspect="1"/>
+          </p:cNvPicPr>
+          <p:nvPr/>
+        </p:nvPicPr>
+        <p:blipFill>
+          <a:blip r:embed="rId2"/>
+          <a:srcRect/>
+          <a:stretch>
+            <a:fillRect/>
+          </a:stretch>
+        </p:blipFill>
+        <p:spPr>
+          <a:xfrm>
+            <a:off x="2438248" y="2395728"/>
+            <a:ext cx="7315200" cy="2743200"/>
+          </a:xfrm>
+          <a:prstGeom prst="rect">
+            <a:avLst/>
+          </a:prstGeom>
+        </p:spPr>
+      </p:pic>
+      <p:sp>
+        <p:nvSpPr>
+          <p:cNvPr id="6" name="Text 3"/>
+          <p:cNvSpPr/>
+          <p:nvPr/>
+        </p:nvSpPr>
+        <p:spPr>
+          <a:xfrm>
+            <a:off x="325120" y="5321935"/>
+            <a:ext cx="6536055" cy="321310"/>
+          </a:xfrm>
+          <a:prstGeom prst="rect">
+            <a:avLst/>
+          </a:prstGeom>
+          <a:noFill/>
         </p:spPr>
         <p:txBody>
           <a:bodyPr wrap="square" rtlCol="0" anchor="t"/>
           <a:lstStyle/>
           <a:p>
-            <a:pPr algn="l" indent="0" marL="0">
+            <a:pPr marL="0" indent="0" algn="l">
               <a:lnSpc>
-                <a:spcPct val="125000"/>
+                <a:spcPct val="115000"/>
               </a:lnSpc>
               <a:buNone/>
             </a:pPr>
             <a:r>
+              <a:rPr lang="en-US" sz="1400" b="1" dirty="0">
+                <a:solidFill>
+                  <a:srgbClr val="1F4E9C"/>
+                </a:solidFill>
+                <a:latin typeface="微软雅黑" panose="020B0503020204020204" pitchFamily="34" charset="-122"/>
+                <a:ea typeface="微软雅黑" panose="020B0503020204020204" pitchFamily="34" charset="-122"/>
+                <a:cs typeface="微软雅黑" panose="020B0503020204020204" pitchFamily="34" charset="-120"/>
+              </a:rPr>
+              <a:t>•  </a:t>
+            </a:r>
+            <a:r>
               <a:rPr lang="en-US" sz="1400" dirty="0">
                 <a:solidFill>
-                  <a:srgbClr val="1F2329"/>
-                </a:solidFill>
-                <a:latin typeface="Consolas" pitchFamily="34" charset="0"/>
-                <a:ea typeface="Consolas" pitchFamily="34" charset="-122"/>
-                <a:cs typeface="Consolas" pitchFamily="34" charset="-120"/>
-              </a:rPr>
-              <a:t>void DFS_Traverse(ALGraph G){
-    for(int i = 0; i &lt; G.vexnum; i++) visited[i] = false;   // 先全部复位
-    for(int i = 0; i &lt; G.vexnum; i++)
-        if(!visited[i]) DFS(G, i);                          // 每个没访问的顶点各走一次
-}
-</a:t>
+                  <a:srgbClr val="000000"/>
+                </a:solidFill>
+              </a:rPr>
+              <a:t>图有5个顶点0到4，边是 0-1、0-2、1-3、2-4、3-4；邻接表按顶点号从小到大排</a:t>
             </a:r>
             <a:endParaRPr lang="en-US" sz="1400" dirty="0"/>
           </a:p>
@@ -3132,40 +2915,99 @@
       </p:sp>
       <p:sp>
         <p:nvSpPr>
-          <p:cNvPr id="8" name="Text 6"/>
-          <p:cNvSpPr/>
-          <p:nvPr/>
-        </p:nvSpPr>
-        <p:spPr>
-          <a:xfrm>
-            <a:off x="822960" y="4343400"/>
-            <a:ext cx="10545775" cy="644652"/>
-          </a:xfrm>
-          <a:prstGeom prst="rect">
-            <a:avLst/>
-          </a:prstGeom>
-          <a:noFill/>
-          <a:ln/>
+          <p:cNvPr id="7" name="Text 4"/>
+          <p:cNvSpPr/>
+          <p:nvPr/>
+        </p:nvSpPr>
+        <p:spPr>
+          <a:xfrm>
+            <a:off x="325120" y="5716270"/>
+            <a:ext cx="11228705" cy="365125"/>
+          </a:xfrm>
+          <a:prstGeom prst="rect">
+            <a:avLst/>
+          </a:prstGeom>
+          <a:noFill/>
         </p:spPr>
         <p:txBody>
           <a:bodyPr wrap="square" rtlCol="0" anchor="t"/>
           <a:lstStyle/>
           <a:p>
-            <a:pPr algn="l" indent="0" marL="0">
-              <a:buNone/>
-            </a:pPr>
-            <a:r>
-              <a:rPr lang="en-US" sz="1500" dirty="0">
-                <a:solidFill>
-                  <a:srgbClr val="8A9099"/>
-                </a:solidFill>
-                <a:latin typeface="微软雅黑" pitchFamily="34" charset="0"/>
-                <a:ea typeface="微软雅黑" pitchFamily="34" charset="-122"/>
-                <a:cs typeface="微软雅黑" pitchFamily="34" charset="-120"/>
-              </a:rPr>
-              <a:t>两层要点：进 Traverse 先把 visited 复位（全局数组会残留上次标记）；外套一层 for，是因为非连通图有多个连通分量，要从每个还没访问的顶点各启动一次 DFS，才能走遍全图</a:t>
-            </a:r>
-            <a:endParaRPr lang="en-US" sz="1500" dirty="0"/>
+            <a:pPr marL="0" indent="0" algn="l">
+              <a:lnSpc>
+                <a:spcPct val="115000"/>
+              </a:lnSpc>
+              <a:buNone/>
+            </a:pPr>
+            <a:r>
+              <a:rPr lang="en-US" sz="1400" b="1" dirty="0">
+                <a:solidFill>
+                  <a:srgbClr val="1F4E9C"/>
+                </a:solidFill>
+                <a:latin typeface="微软雅黑" panose="020B0503020204020204" pitchFamily="34" charset="-122"/>
+                <a:ea typeface="微软雅黑" panose="020B0503020204020204" pitchFamily="34" charset="-122"/>
+                <a:cs typeface="微软雅黑" panose="020B0503020204020204" pitchFamily="34" charset="-120"/>
+              </a:rPr>
+              <a:t>•  </a:t>
+            </a:r>
+            <a:r>
+              <a:rPr lang="en-US" sz="1400" dirty="0">
+                <a:solidFill>
+                  <a:srgbClr val="000000"/>
+                </a:solidFill>
+              </a:rPr>
+              <a:t>DFS 从0：访问0→邻居1没访问，进1→1的邻居3没访问，进3→3的邻居4，进4→4的邻居2，进2→2的邻居都访问过，层层回退。序列 0 1 3 4 2</a:t>
+            </a:r>
+            <a:endParaRPr lang="en-US" sz="1400" dirty="0"/>
+          </a:p>
+        </p:txBody>
+      </p:sp>
+      <p:sp>
+        <p:nvSpPr>
+          <p:cNvPr id="8" name="Text 5"/>
+          <p:cNvSpPr/>
+          <p:nvPr/>
+        </p:nvSpPr>
+        <p:spPr>
+          <a:xfrm>
+            <a:off x="358140" y="6057265"/>
+            <a:ext cx="10760075" cy="588010"/>
+          </a:xfrm>
+          <a:prstGeom prst="rect">
+            <a:avLst/>
+          </a:prstGeom>
+          <a:noFill/>
+        </p:spPr>
+        <p:txBody>
+          <a:bodyPr wrap="square" rtlCol="0" anchor="t"/>
+          <a:lstStyle/>
+          <a:p>
+            <a:pPr marL="0" indent="0" algn="l">
+              <a:lnSpc>
+                <a:spcPct val="115000"/>
+              </a:lnSpc>
+              <a:buNone/>
+            </a:pPr>
+            <a:r>
+              <a:rPr lang="en-US" sz="1400" b="1" dirty="0">
+                <a:solidFill>
+                  <a:srgbClr val="1F4E9C"/>
+                </a:solidFill>
+                <a:latin typeface="微软雅黑" panose="020B0503020204020204" pitchFamily="34" charset="-122"/>
+                <a:ea typeface="微软雅黑" panose="020B0503020204020204" pitchFamily="34" charset="-122"/>
+                <a:cs typeface="微软雅黑" panose="020B0503020204020204" pitchFamily="34" charset="-120"/>
+              </a:rPr>
+              <a:t>•  </a:t>
+            </a:r>
+            <a:r>
+              <a:rPr lang="en-US" sz="1400" dirty="0">
+                <a:solidFill>
+                  <a:srgbClr val="000000"/>
+                </a:solidFill>
+              </a:rPr>
+              <a:t>BFS 从0：访问0入队；出0，把邻居1、2访问并入队；出1，邻居3访问入队；出2，邻居4访问入队；出3、出4无新顶点。序列 0 1 2 3 4</a:t>
+            </a:r>
+            <a:endParaRPr lang="en-US" sz="1400" dirty="0"/>
           </a:p>
         </p:txBody>
       </p:sp>
@@ -3179,7 +3021,7 @@
 
 <file path=ppt/slides/slide12.xml><?xml version="1.0" encoding="utf-8"?>
 <p:sld xmlns:a="http://schemas.openxmlformats.org/drawingml/2006/main" xmlns:r="http://schemas.openxmlformats.org/officeDocument/2006/relationships" xmlns:p="http://schemas.openxmlformats.org/presentationml/2006/main">
-  <p:cSld name="Slide 12">
+  <p:cSld>
     <p:bg>
       <p:bgPr>
         <a:blipFill dpi="0" rotWithShape="1">
@@ -3223,13 +3065,12 @@
             <a:avLst/>
           </a:prstGeom>
           <a:noFill/>
-          <a:ln/>
         </p:spPr>
         <p:txBody>
           <a:bodyPr wrap="square" rtlCol="0" anchor="ctr"/>
           <a:lstStyle/>
           <a:p>
-            <a:pPr algn="r" indent="0" marL="0">
+            <a:pPr marL="0" indent="0" algn="r">
               <a:buNone/>
             </a:pPr>
             <a:r>
@@ -3237,11 +3078,11 @@
                 <a:solidFill>
                   <a:srgbClr val="8A9099"/>
                 </a:solidFill>
-                <a:latin typeface="微软雅黑" pitchFamily="34" charset="0"/>
-                <a:ea typeface="微软雅黑" pitchFamily="34" charset="-122"/>
-                <a:cs typeface="微软雅黑" pitchFamily="34" charset="-120"/>
-              </a:rPr>
-              <a:t>12 / 17</a:t>
+                <a:latin typeface="微软雅黑" panose="020B0503020204020204" pitchFamily="34" charset="-122"/>
+                <a:ea typeface="微软雅黑" panose="020B0503020204020204" pitchFamily="34" charset="-122"/>
+                <a:cs typeface="微软雅黑" panose="020B0503020204020204" pitchFamily="34" charset="-120"/>
+              </a:rPr>
+              <a:t>11 / 17</a:t>
             </a:r>
             <a:endParaRPr lang="en-US" sz="1000" dirty="0"/>
           </a:p>
@@ -3262,13 +3103,12 @@
             <a:avLst/>
           </a:prstGeom>
           <a:noFill/>
-          <a:ln/>
         </p:spPr>
         <p:txBody>
           <a:bodyPr wrap="square" rtlCol="0" anchor="ctr"/>
           <a:lstStyle/>
           <a:p>
-            <a:pPr algn="l" indent="0" marL="0">
+            <a:pPr marL="0" indent="0" algn="l">
               <a:buNone/>
             </a:pPr>
             <a:r>
@@ -3276,11 +3116,11 @@
                 <a:solidFill>
                   <a:srgbClr val="1F4E9C"/>
                 </a:solidFill>
-                <a:latin typeface="微软雅黑" pitchFamily="34" charset="0"/>
-                <a:ea typeface="微软雅黑" pitchFamily="34" charset="-122"/>
-                <a:cs typeface="微软雅黑" pitchFamily="34" charset="-120"/>
-              </a:rPr>
-              <a:t>复杂度对比</a:t>
+                <a:latin typeface="微软雅黑" panose="020B0503020204020204" pitchFamily="34" charset="-122"/>
+                <a:ea typeface="微软雅黑" panose="020B0503020204020204" pitchFamily="34" charset="-122"/>
+                <a:cs typeface="微软雅黑" panose="020B0503020204020204" pitchFamily="34" charset="-120"/>
+              </a:rPr>
+              <a:t>遍历 · 非连通图</a:t>
             </a:r>
             <a:endParaRPr lang="en-US" sz="1400" dirty="0"/>
           </a:p>
@@ -3301,13 +3141,12 @@
             <a:avLst/>
           </a:prstGeom>
           <a:noFill/>
-          <a:ln/>
         </p:spPr>
         <p:txBody>
           <a:bodyPr wrap="square" rtlCol="0" anchor="ctr"/>
           <a:lstStyle/>
           <a:p>
-            <a:pPr algn="l" indent="0" marL="0">
+            <a:pPr marL="0" indent="0" algn="l">
               <a:buNone/>
             </a:pPr>
             <a:r>
@@ -3315,9 +3154,284 @@
                 <a:solidFill>
                   <a:srgbClr val="1F2329"/>
                 </a:solidFill>
-                <a:latin typeface="微软雅黑" pitchFamily="34" charset="0"/>
-                <a:ea typeface="微软雅黑" pitchFamily="34" charset="-122"/>
-                <a:cs typeface="微软雅黑" pitchFamily="34" charset="-120"/>
+                <a:latin typeface="微软雅黑" panose="020B0503020204020204" pitchFamily="34" charset="-122"/>
+                <a:ea typeface="微软雅黑" panose="020B0503020204020204" pitchFamily="34" charset="-122"/>
+                <a:cs typeface="微软雅黑" panose="020B0503020204020204" pitchFamily="34" charset="-120"/>
+              </a:rPr>
+              <a:t>非连通图：外套一层 Traverse</a:t>
+            </a:r>
+            <a:endParaRPr lang="en-US" sz="2800" dirty="0"/>
+          </a:p>
+        </p:txBody>
+      </p:sp>
+      <p:sp>
+        <p:nvSpPr>
+          <p:cNvPr id="5" name="Shape 3"/>
+          <p:cNvSpPr/>
+          <p:nvPr/>
+        </p:nvSpPr>
+        <p:spPr>
+          <a:xfrm>
+            <a:off x="822960" y="2395728"/>
+            <a:ext cx="10545775" cy="1746504"/>
+          </a:xfrm>
+          <a:prstGeom prst="rect">
+            <a:avLst/>
+          </a:prstGeom>
+          <a:solidFill>
+            <a:srgbClr val="F7F9FC"/>
+          </a:solidFill>
+        </p:spPr>
+      </p:sp>
+      <p:sp>
+        <p:nvSpPr>
+          <p:cNvPr id="6" name="Shape 4"/>
+          <p:cNvSpPr/>
+          <p:nvPr/>
+        </p:nvSpPr>
+        <p:spPr>
+          <a:xfrm>
+            <a:off x="822960" y="2395728"/>
+            <a:ext cx="50292" cy="1746504"/>
+          </a:xfrm>
+          <a:prstGeom prst="rect">
+            <a:avLst/>
+          </a:prstGeom>
+          <a:solidFill>
+            <a:srgbClr val="1F4E9C"/>
+          </a:solidFill>
+        </p:spPr>
+      </p:sp>
+      <p:sp>
+        <p:nvSpPr>
+          <p:cNvPr id="7" name="Text 5"/>
+          <p:cNvSpPr/>
+          <p:nvPr/>
+        </p:nvSpPr>
+        <p:spPr>
+          <a:xfrm>
+            <a:off x="1078992" y="2505456"/>
+            <a:ext cx="10033711" cy="1527048"/>
+          </a:xfrm>
+          <a:prstGeom prst="rect">
+            <a:avLst/>
+          </a:prstGeom>
+          <a:noFill/>
+        </p:spPr>
+        <p:txBody>
+          <a:bodyPr wrap="square" rtlCol="0" anchor="t"/>
+          <a:lstStyle/>
+          <a:p>
+            <a:pPr marL="0" indent="0" algn="l">
+              <a:lnSpc>
+                <a:spcPct val="125000"/>
+              </a:lnSpc>
+              <a:buNone/>
+            </a:pPr>
+            <a:r>
+              <a:rPr lang="en-US" sz="1400" dirty="0">
+                <a:solidFill>
+                  <a:srgbClr val="1F2329"/>
+                </a:solidFill>
+                <a:latin typeface="Consolas" panose="020B0609020204030204" pitchFamily="34" charset="0"/>
+                <a:ea typeface="Consolas" panose="020B0609020204030204" pitchFamily="34" charset="-122"/>
+                <a:cs typeface="Consolas" panose="020B0609020204030204" pitchFamily="34" charset="-120"/>
+              </a:rPr>
+              <a:t>void DFS_Traverse(ALGraph G){
+    for(int i = 0; i &lt; G.vexnum; i++) visited[i] = false;   // 先全部复位
+    for(int i = 0; i &lt; G.vexnum; i++)
+        if(!visited[i]) DFS(G, i);                          // 每个没访问的顶点各走一次
+}
+</a:t>
+            </a:r>
+            <a:endParaRPr lang="en-US" sz="1400" dirty="0"/>
+          </a:p>
+        </p:txBody>
+      </p:sp>
+      <p:sp>
+        <p:nvSpPr>
+          <p:cNvPr id="8" name="Text 6"/>
+          <p:cNvSpPr/>
+          <p:nvPr/>
+        </p:nvSpPr>
+        <p:spPr>
+          <a:xfrm>
+            <a:off x="822960" y="4343400"/>
+            <a:ext cx="10545775" cy="644652"/>
+          </a:xfrm>
+          <a:prstGeom prst="rect">
+            <a:avLst/>
+          </a:prstGeom>
+          <a:noFill/>
+        </p:spPr>
+        <p:txBody>
+          <a:bodyPr wrap="square" rtlCol="0" anchor="t"/>
+          <a:lstStyle/>
+          <a:p>
+            <a:pPr marL="0" indent="0" algn="l">
+              <a:buNone/>
+            </a:pPr>
+            <a:r>
+              <a:rPr lang="en-US" sz="1500" dirty="0">
+                <a:solidFill>
+                  <a:srgbClr val="8A9099"/>
+                </a:solidFill>
+                <a:latin typeface="微软雅黑" panose="020B0503020204020204" pitchFamily="34" charset="-122"/>
+                <a:ea typeface="微软雅黑" panose="020B0503020204020204" pitchFamily="34" charset="-122"/>
+                <a:cs typeface="微软雅黑" panose="020B0503020204020204" pitchFamily="34" charset="-120"/>
+              </a:rPr>
+              <a:t>两层要点：进 Traverse 先把 visited 复位（全局数组会残留上次标记）；外套一层 for，是因为非连通图有多个连通分量，要从每个还没访问的顶点各启动一次 DFS，才能走遍全图</a:t>
+            </a:r>
+            <a:endParaRPr lang="en-US" sz="1500" dirty="0"/>
+          </a:p>
+        </p:txBody>
+      </p:sp>
+    </p:spTree>
+  </p:cSld>
+  <p:clrMapOvr>
+    <a:masterClrMapping/>
+  </p:clrMapOvr>
+</p:sld>
+</file>
+
+<file path=ppt/slides/slide13.xml><?xml version="1.0" encoding="utf-8"?>
+<p:sld xmlns:a="http://schemas.openxmlformats.org/drawingml/2006/main" xmlns:r="http://schemas.openxmlformats.org/officeDocument/2006/relationships" xmlns:p="http://schemas.openxmlformats.org/presentationml/2006/main">
+  <p:cSld>
+    <p:bg>
+      <p:bgPr>
+        <a:blipFill dpi="0" rotWithShape="1">
+          <a:blip r:embed="rId1">
+            <a:lum/>
+          </a:blip>
+          <a:srcRect/>
+          <a:stretch>
+            <a:fillRect/>
+          </a:stretch>
+        </a:blipFill>
+        <a:effectLst/>
+      </p:bgPr>
+    </p:bg>
+    <p:spTree>
+      <p:nvGrpSpPr>
+        <p:cNvPr id="1" name=""/>
+        <p:cNvGrpSpPr/>
+        <p:nvPr/>
+      </p:nvGrpSpPr>
+      <p:grpSpPr>
+        <a:xfrm>
+          <a:off x="0" y="0"/>
+          <a:ext cx="0" cy="0"/>
+          <a:chOff x="0" y="0"/>
+          <a:chExt cx="0" cy="0"/>
+        </a:xfrm>
+      </p:grpSpPr>
+      <p:sp>
+        <p:nvSpPr>
+          <p:cNvPr id="2" name="Text 0"/>
+          <p:cNvSpPr/>
+          <p:nvPr/>
+        </p:nvSpPr>
+        <p:spPr>
+          <a:xfrm>
+            <a:off x="10362895" y="6016752"/>
+            <a:ext cx="1463040" cy="320040"/>
+          </a:xfrm>
+          <a:prstGeom prst="rect">
+            <a:avLst/>
+          </a:prstGeom>
+          <a:noFill/>
+        </p:spPr>
+        <p:txBody>
+          <a:bodyPr wrap="square" rtlCol="0" anchor="ctr"/>
+          <a:lstStyle/>
+          <a:p>
+            <a:pPr marL="0" indent="0" algn="r">
+              <a:buNone/>
+            </a:pPr>
+            <a:r>
+              <a:rPr lang="en-US" sz="1000" dirty="0">
+                <a:solidFill>
+                  <a:srgbClr val="8A9099"/>
+                </a:solidFill>
+                <a:latin typeface="微软雅黑" panose="020B0503020204020204" pitchFamily="34" charset="-122"/>
+                <a:ea typeface="微软雅黑" panose="020B0503020204020204" pitchFamily="34" charset="-122"/>
+                <a:cs typeface="微软雅黑" panose="020B0503020204020204" pitchFamily="34" charset="-120"/>
+              </a:rPr>
+              <a:t>12 / 17</a:t>
+            </a:r>
+            <a:endParaRPr lang="en-US" sz="1000" dirty="0"/>
+          </a:p>
+        </p:txBody>
+      </p:sp>
+      <p:sp>
+        <p:nvSpPr>
+          <p:cNvPr id="3" name="Text 1"/>
+          <p:cNvSpPr/>
+          <p:nvPr/>
+        </p:nvSpPr>
+        <p:spPr>
+          <a:xfrm>
+            <a:off x="822960" y="960120"/>
+            <a:ext cx="10545775" cy="365760"/>
+          </a:xfrm>
+          <a:prstGeom prst="rect">
+            <a:avLst/>
+          </a:prstGeom>
+          <a:noFill/>
+        </p:spPr>
+        <p:txBody>
+          <a:bodyPr wrap="square" rtlCol="0" anchor="ctr"/>
+          <a:lstStyle/>
+          <a:p>
+            <a:pPr marL="0" indent="0" algn="l">
+              <a:buNone/>
+            </a:pPr>
+            <a:r>
+              <a:rPr lang="en-US" sz="1400" b="1" dirty="0">
+                <a:solidFill>
+                  <a:srgbClr val="1F4E9C"/>
+                </a:solidFill>
+                <a:latin typeface="微软雅黑" panose="020B0503020204020204" pitchFamily="34" charset="-122"/>
+                <a:ea typeface="微软雅黑" panose="020B0503020204020204" pitchFamily="34" charset="-122"/>
+                <a:cs typeface="微软雅黑" panose="020B0503020204020204" pitchFamily="34" charset="-120"/>
+              </a:rPr>
+              <a:t>复杂度对比</a:t>
+            </a:r>
+            <a:endParaRPr lang="en-US" sz="1400" dirty="0"/>
+          </a:p>
+        </p:txBody>
+      </p:sp>
+      <p:sp>
+        <p:nvSpPr>
+          <p:cNvPr id="4" name="Text 2"/>
+          <p:cNvSpPr/>
+          <p:nvPr/>
+        </p:nvSpPr>
+        <p:spPr>
+          <a:xfrm>
+            <a:off x="822960" y="1344168"/>
+            <a:ext cx="10545775" cy="731520"/>
+          </a:xfrm>
+          <a:prstGeom prst="rect">
+            <a:avLst/>
+          </a:prstGeom>
+          <a:noFill/>
+        </p:spPr>
+        <p:txBody>
+          <a:bodyPr wrap="square" rtlCol="0" anchor="ctr"/>
+          <a:lstStyle/>
+          <a:p>
+            <a:pPr marL="0" indent="0" algn="l">
+              <a:buNone/>
+            </a:pPr>
+            <a:r>
+              <a:rPr lang="en-US" sz="2800" b="1" dirty="0">
+                <a:solidFill>
+                  <a:srgbClr val="1F2329"/>
+                </a:solidFill>
+                <a:latin typeface="微软雅黑" panose="020B0503020204020204" pitchFamily="34" charset="-122"/>
+                <a:ea typeface="微软雅黑" panose="020B0503020204020204" pitchFamily="34" charset="-122"/>
+                <a:cs typeface="微软雅黑" panose="020B0503020204020204" pitchFamily="34" charset="-120"/>
               </a:rPr>
               <a:t>两种存储下遍历的复杂度</a:t>
             </a:r>
@@ -3331,17 +3445,11 @@
           <p:cNvGraphicFramePr>
             <a:graphicFrameLocks noGrp="1"/>
           </p:cNvGraphicFramePr>
-          <p:nvPr>
-            <p:extLst>
-              <p:ext uri="{D42A27DB-BD31-4B8C-83A1-F6EECF244321}">
-                <p14:modId xmlns:p14="http://schemas.microsoft.com/office/powerpoint/2010/main" val="1579011935"/>
-              </p:ext>
-            </p:extLst>
-          </p:nvPr>
+          <p:nvPr/>
         </p:nvGraphicFramePr>
         <p:xfrm>
           <a:off x="822960" y="2395728"/>
-          <a:ext cx="10545775" cy="914400"/>
+          <a:ext cx="10545775" cy="1261872"/>
         </p:xfrm>
         <a:graphic>
           <a:graphicData uri="http://schemas.openxmlformats.org/drawingml/2006/table">
@@ -3359,7 +3467,7 @@
                     <a:bodyPr/>
                     <a:lstStyle/>
                     <a:p>
-                      <a:pPr algn="ctr" indent="0" marL="0">
+                      <a:pPr marL="0" indent="0" algn="ctr">
                         <a:buNone/>
                       </a:pPr>
                       <a:r>
@@ -3367,20 +3475,20 @@
                           <a:solidFill>
                             <a:srgbClr val="1F4E9C"/>
                           </a:solidFill>
-                          <a:latin typeface="微软雅黑" pitchFamily="34" charset="0"/>
-                          <a:ea typeface="微软雅黑" pitchFamily="34" charset="-122"/>
-                          <a:cs typeface="微软雅黑" pitchFamily="34" charset="-120"/>
+                          <a:latin typeface="微软雅黑" panose="020B0503020204020204" pitchFamily="34" charset="-122"/>
+                          <a:ea typeface="微软雅黑" panose="020B0503020204020204" pitchFamily="34" charset="-122"/>
+                          <a:cs typeface="微软雅黑" panose="020B0503020204020204" pitchFamily="34" charset="-120"/>
                         </a:rPr>
                         <a:t>存储</a:t>
                       </a:r>
                       <a:endParaRPr lang="en-US" sz="1500" dirty="0">
-                        <a:latin typeface="微软雅黑" charset="0"/>
-                        <a:ea typeface="微软雅黑" charset="0"/>
-                        <a:cs typeface="微软雅黑" charset="0"/>
+                        <a:latin typeface="微软雅黑" panose="020B0503020204020204" pitchFamily="34" charset="-122"/>
+                        <a:ea typeface="微软雅黑" panose="020B0503020204020204" pitchFamily="34" charset="-122"/>
+                        <a:cs typeface="微软雅黑" panose="020B0503020204020204" pitchFamily="34" charset="-122"/>
                       </a:endParaRPr>
                     </a:p>
                   </a:txBody>
-                  <a:tcPr marL="91440" marR="91440" marT="45720" marB="45720" anchor="ctr">
+                  <a:tcPr anchor="ctr">
                     <a:lnL w="9525" cap="flat" cmpd="sng" algn="ctr">
                       <a:solidFill>
                         <a:srgbClr val="D8DBE0"/>
@@ -3427,7 +3535,7 @@
                     <a:bodyPr/>
                     <a:lstStyle/>
                     <a:p>
-                      <a:pPr algn="ctr" indent="0" marL="0">
+                      <a:pPr marL="0" indent="0" algn="ctr">
                         <a:buNone/>
                       </a:pPr>
                       <a:r>
@@ -3435,20 +3543,20 @@
                           <a:solidFill>
                             <a:srgbClr val="1F4E9C"/>
                           </a:solidFill>
-                          <a:latin typeface="微软雅黑" pitchFamily="34" charset="0"/>
-                          <a:ea typeface="微软雅黑" pitchFamily="34" charset="-122"/>
-                          <a:cs typeface="微软雅黑" pitchFamily="34" charset="-120"/>
+                          <a:latin typeface="微软雅黑" panose="020B0503020204020204" pitchFamily="34" charset="-122"/>
+                          <a:ea typeface="微软雅黑" panose="020B0503020204020204" pitchFamily="34" charset="-122"/>
+                          <a:cs typeface="微软雅黑" panose="020B0503020204020204" pitchFamily="34" charset="-120"/>
                         </a:rPr>
                         <a:t>DFS/BFS 时间</a:t>
                       </a:r>
                       <a:endParaRPr lang="en-US" sz="1500" dirty="0">
-                        <a:latin typeface="微软雅黑" charset="0"/>
-                        <a:ea typeface="微软雅黑" charset="0"/>
-                        <a:cs typeface="微软雅黑" charset="0"/>
+                        <a:latin typeface="微软雅黑" panose="020B0503020204020204" pitchFamily="34" charset="-122"/>
+                        <a:ea typeface="微软雅黑" panose="020B0503020204020204" pitchFamily="34" charset="-122"/>
+                        <a:cs typeface="微软雅黑" panose="020B0503020204020204" pitchFamily="34" charset="-122"/>
                       </a:endParaRPr>
                     </a:p>
                   </a:txBody>
-                  <a:tcPr marL="91440" marR="91440" marT="45720" marB="45720" anchor="ctr">
+                  <a:tcPr anchor="ctr">
                     <a:lnL w="9525" cap="flat" cmpd="sng" algn="ctr">
                       <a:solidFill>
                         <a:srgbClr val="D8DBE0"/>
@@ -3495,7 +3603,7 @@
                     <a:bodyPr/>
                     <a:lstStyle/>
                     <a:p>
-                      <a:pPr algn="ctr" indent="0" marL="0">
+                      <a:pPr marL="0" indent="0" algn="ctr">
                         <a:buNone/>
                       </a:pPr>
                       <a:r>
@@ -3503,20 +3611,20 @@
                           <a:solidFill>
                             <a:srgbClr val="1F4E9C"/>
                           </a:solidFill>
-                          <a:latin typeface="微软雅黑" pitchFamily="34" charset="0"/>
-                          <a:ea typeface="微软雅黑" pitchFamily="34" charset="-122"/>
-                          <a:cs typeface="微软雅黑" pitchFamily="34" charset="-120"/>
+                          <a:latin typeface="微软雅黑" panose="020B0503020204020204" pitchFamily="34" charset="-122"/>
+                          <a:ea typeface="微软雅黑" panose="020B0503020204020204" pitchFamily="34" charset="-122"/>
+                          <a:cs typeface="微软雅黑" panose="020B0503020204020204" pitchFamily="34" charset="-120"/>
                         </a:rPr>
                         <a:t>空间</a:t>
                       </a:r>
                       <a:endParaRPr lang="en-US" sz="1500" dirty="0">
-                        <a:latin typeface="微软雅黑" charset="0"/>
-                        <a:ea typeface="微软雅黑" charset="0"/>
-                        <a:cs typeface="微软雅黑" charset="0"/>
+                        <a:latin typeface="微软雅黑" panose="020B0503020204020204" pitchFamily="34" charset="-122"/>
+                        <a:ea typeface="微软雅黑" panose="020B0503020204020204" pitchFamily="34" charset="-122"/>
+                        <a:cs typeface="微软雅黑" panose="020B0503020204020204" pitchFamily="34" charset="-122"/>
                       </a:endParaRPr>
                     </a:p>
                   </a:txBody>
-                  <a:tcPr marL="91440" marR="91440" marT="45720" marB="45720" anchor="ctr">
+                  <a:tcPr anchor="ctr">
                     <a:lnL w="9525" cap="flat" cmpd="sng" algn="ctr">
                       <a:solidFill>
                         <a:srgbClr val="D8DBE0"/>
@@ -3563,7 +3671,7 @@
                     <a:bodyPr/>
                     <a:lstStyle/>
                     <a:p>
-                      <a:pPr algn="ctr" indent="0" marL="0">
+                      <a:pPr marL="0" indent="0" algn="ctr">
                         <a:buNone/>
                       </a:pPr>
                       <a:r>
@@ -3571,20 +3679,20 @@
                           <a:solidFill>
                             <a:srgbClr val="1F4E9C"/>
                           </a:solidFill>
-                          <a:latin typeface="微软雅黑" pitchFamily="34" charset="0"/>
-                          <a:ea typeface="微软雅黑" pitchFamily="34" charset="-122"/>
-                          <a:cs typeface="微软雅黑" pitchFamily="34" charset="-120"/>
+                          <a:latin typeface="微软雅黑" panose="020B0503020204020204" pitchFamily="34" charset="-122"/>
+                          <a:ea typeface="微软雅黑" panose="020B0503020204020204" pitchFamily="34" charset="-122"/>
+                          <a:cs typeface="微软雅黑" panose="020B0503020204020204" pitchFamily="34" charset="-120"/>
                         </a:rPr>
                         <a:t>存储开销</a:t>
                       </a:r>
                       <a:endParaRPr lang="en-US" sz="1500" dirty="0">
-                        <a:latin typeface="微软雅黑" charset="0"/>
-                        <a:ea typeface="微软雅黑" charset="0"/>
-                        <a:cs typeface="微软雅黑" charset="0"/>
+                        <a:latin typeface="微软雅黑" panose="020B0503020204020204" pitchFamily="34" charset="-122"/>
+                        <a:ea typeface="微软雅黑" panose="020B0503020204020204" pitchFamily="34" charset="-122"/>
+                        <a:cs typeface="微软雅黑" panose="020B0503020204020204" pitchFamily="34" charset="-122"/>
                       </a:endParaRPr>
                     </a:p>
                   </a:txBody>
-                  <a:tcPr marL="91440" marR="91440" marT="45720" marB="45720" anchor="ctr">
+                  <a:tcPr anchor="ctr">
                     <a:lnL w="9525" cap="flat" cmpd="sng" algn="ctr">
                       <a:solidFill>
                         <a:srgbClr val="D8DBE0"/>
@@ -3633,7 +3741,7 @@
                     <a:bodyPr/>
                     <a:lstStyle/>
                     <a:p>
-                      <a:pPr algn="ctr" indent="0" marL="0">
+                      <a:pPr marL="0" indent="0" algn="ctr">
                         <a:buNone/>
                       </a:pPr>
                       <a:r>
@@ -3641,20 +3749,20 @@
                           <a:solidFill>
                             <a:srgbClr val="1F2329"/>
                           </a:solidFill>
-                          <a:latin typeface="微软雅黑" pitchFamily="34" charset="0"/>
-                          <a:ea typeface="微软雅黑" pitchFamily="34" charset="-122"/>
-                          <a:cs typeface="微软雅黑" pitchFamily="34" charset="-120"/>
+                          <a:latin typeface="微软雅黑" panose="020B0503020204020204" pitchFamily="34" charset="-122"/>
+                          <a:ea typeface="微软雅黑" panose="020B0503020204020204" pitchFamily="34" charset="-122"/>
+                          <a:cs typeface="微软雅黑" panose="020B0503020204020204" pitchFamily="34" charset="-120"/>
                         </a:rPr>
                         <a:t>邻接矩阵</a:t>
                       </a:r>
                       <a:endParaRPr lang="en-US" sz="1500" dirty="0">
-                        <a:latin typeface="微软雅黑" charset="0"/>
-                        <a:ea typeface="微软雅黑" charset="0"/>
-                        <a:cs typeface="微软雅黑" charset="0"/>
+                        <a:latin typeface="微软雅黑" panose="020B0503020204020204" pitchFamily="34" charset="-122"/>
+                        <a:ea typeface="微软雅黑" panose="020B0503020204020204" pitchFamily="34" charset="-122"/>
+                        <a:cs typeface="微软雅黑" panose="020B0503020204020204" pitchFamily="34" charset="-122"/>
                       </a:endParaRPr>
                     </a:p>
                   </a:txBody>
-                  <a:tcPr marL="91440" marR="91440" marT="45720" marB="45720" anchor="ctr">
+                  <a:tcPr anchor="ctr">
                     <a:lnL w="9525" cap="flat" cmpd="sng" algn="ctr">
                       <a:solidFill>
                         <a:srgbClr val="D8DBE0"/>
@@ -3701,7 +3809,7 @@
                     <a:bodyPr/>
                     <a:lstStyle/>
                     <a:p>
-                      <a:pPr algn="ctr" indent="0" marL="0">
+                      <a:pPr marL="0" indent="0" algn="ctr">
                         <a:buNone/>
                       </a:pPr>
                       <a:r>
@@ -3709,20 +3817,20 @@
                           <a:solidFill>
                             <a:srgbClr val="1F2329"/>
                           </a:solidFill>
-                          <a:latin typeface="微软雅黑" pitchFamily="34" charset="0"/>
-                          <a:ea typeface="微软雅黑" pitchFamily="34" charset="-122"/>
-                          <a:cs typeface="微软雅黑" pitchFamily="34" charset="-120"/>
+                          <a:latin typeface="微软雅黑" panose="020B0503020204020204" pitchFamily="34" charset="-122"/>
+                          <a:ea typeface="微软雅黑" panose="020B0503020204020204" pitchFamily="34" charset="-122"/>
+                          <a:cs typeface="微软雅黑" panose="020B0503020204020204" pitchFamily="34" charset="-120"/>
                         </a:rPr>
                         <a:t>O(n²)：每个顶点扫一整行 n 个</a:t>
                       </a:r>
                       <a:endParaRPr lang="en-US" sz="1500" dirty="0">
-                        <a:latin typeface="微软雅黑" charset="0"/>
-                        <a:ea typeface="微软雅黑" charset="0"/>
-                        <a:cs typeface="微软雅黑" charset="0"/>
+                        <a:latin typeface="微软雅黑" panose="020B0503020204020204" pitchFamily="34" charset="-122"/>
+                        <a:ea typeface="微软雅黑" panose="020B0503020204020204" pitchFamily="34" charset="-122"/>
+                        <a:cs typeface="微软雅黑" panose="020B0503020204020204" pitchFamily="34" charset="-122"/>
                       </a:endParaRPr>
                     </a:p>
                   </a:txBody>
-                  <a:tcPr marL="91440" marR="91440" marT="45720" marB="45720" anchor="ctr">
+                  <a:tcPr anchor="ctr">
                     <a:lnL w="9525" cap="flat" cmpd="sng" algn="ctr">
                       <a:solidFill>
                         <a:srgbClr val="D8DBE0"/>
@@ -3769,7 +3877,7 @@
                     <a:bodyPr/>
                     <a:lstStyle/>
                     <a:p>
-                      <a:pPr algn="ctr" indent="0" marL="0">
+                      <a:pPr marL="0" indent="0" algn="ctr">
                         <a:buNone/>
                       </a:pPr>
                       <a:r>
@@ -3777,20 +3885,20 @@
                           <a:solidFill>
                             <a:srgbClr val="1F2329"/>
                           </a:solidFill>
-                          <a:latin typeface="微软雅黑" pitchFamily="34" charset="0"/>
-                          <a:ea typeface="微软雅黑" pitchFamily="34" charset="-122"/>
-                          <a:cs typeface="微软雅黑" pitchFamily="34" charset="-120"/>
+                          <a:latin typeface="微软雅黑" panose="020B0503020204020204" pitchFamily="34" charset="-122"/>
+                          <a:ea typeface="微软雅黑" panose="020B0503020204020204" pitchFamily="34" charset="-122"/>
+                          <a:cs typeface="微软雅黑" panose="020B0503020204020204" pitchFamily="34" charset="-120"/>
                         </a:rPr>
                         <a:t>O(n)</a:t>
                       </a:r>
                       <a:endParaRPr lang="en-US" sz="1500" dirty="0">
-                        <a:latin typeface="微软雅黑" charset="0"/>
-                        <a:ea typeface="微软雅黑" charset="0"/>
-                        <a:cs typeface="微软雅黑" charset="0"/>
+                        <a:latin typeface="微软雅黑" panose="020B0503020204020204" pitchFamily="34" charset="-122"/>
+                        <a:ea typeface="微软雅黑" panose="020B0503020204020204" pitchFamily="34" charset="-122"/>
+                        <a:cs typeface="微软雅黑" panose="020B0503020204020204" pitchFamily="34" charset="-122"/>
                       </a:endParaRPr>
                     </a:p>
                   </a:txBody>
-                  <a:tcPr marL="91440" marR="91440" marT="45720" marB="45720" anchor="ctr">
+                  <a:tcPr anchor="ctr">
                     <a:lnL w="9525" cap="flat" cmpd="sng" algn="ctr">
                       <a:solidFill>
                         <a:srgbClr val="D8DBE0"/>
@@ -3837,7 +3945,7 @@
                     <a:bodyPr/>
                     <a:lstStyle/>
                     <a:p>
-                      <a:pPr algn="ctr" indent="0" marL="0">
+                      <a:pPr marL="0" indent="0" algn="ctr">
                         <a:buNone/>
                       </a:pPr>
                       <a:r>
@@ -3845,20 +3953,20 @@
                           <a:solidFill>
                             <a:srgbClr val="1F2329"/>
                           </a:solidFill>
-                          <a:latin typeface="微软雅黑" pitchFamily="34" charset="0"/>
-                          <a:ea typeface="微软雅黑" pitchFamily="34" charset="-122"/>
-                          <a:cs typeface="微软雅黑" pitchFamily="34" charset="-120"/>
+                          <a:latin typeface="微软雅黑" panose="020B0503020204020204" pitchFamily="34" charset="-122"/>
+                          <a:ea typeface="微软雅黑" panose="020B0503020204020204" pitchFamily="34" charset="-122"/>
+                          <a:cs typeface="微软雅黑" panose="020B0503020204020204" pitchFamily="34" charset="-120"/>
                         </a:rPr>
                         <a:t>O(n²)</a:t>
                       </a:r>
                       <a:endParaRPr lang="en-US" sz="1500" dirty="0">
-                        <a:latin typeface="微软雅黑" charset="0"/>
-                        <a:ea typeface="微软雅黑" charset="0"/>
-                        <a:cs typeface="微软雅黑" charset="0"/>
+                        <a:latin typeface="微软雅黑" panose="020B0503020204020204" pitchFamily="34" charset="-122"/>
+                        <a:ea typeface="微软雅黑" panose="020B0503020204020204" pitchFamily="34" charset="-122"/>
+                        <a:cs typeface="微软雅黑" panose="020B0503020204020204" pitchFamily="34" charset="-122"/>
                       </a:endParaRPr>
                     </a:p>
                   </a:txBody>
-                  <a:tcPr marL="91440" marR="91440" marT="45720" marB="45720" anchor="ctr">
+                  <a:tcPr anchor="ctr">
                     <a:lnL w="9525" cap="flat" cmpd="sng" algn="ctr">
                       <a:solidFill>
                         <a:srgbClr val="D8DBE0"/>
@@ -3907,7 +4015,7 @@
                     <a:bodyPr/>
                     <a:lstStyle/>
                     <a:p>
-                      <a:pPr algn="ctr" indent="0" marL="0">
+                      <a:pPr marL="0" indent="0" algn="ctr">
                         <a:buNone/>
                       </a:pPr>
                       <a:r>
@@ -3915,20 +4023,20 @@
                           <a:solidFill>
                             <a:srgbClr val="1F2329"/>
                           </a:solidFill>
-                          <a:latin typeface="微软雅黑" pitchFamily="34" charset="0"/>
-                          <a:ea typeface="微软雅黑" pitchFamily="34" charset="-122"/>
-                          <a:cs typeface="微软雅黑" pitchFamily="34" charset="-120"/>
+                          <a:latin typeface="微软雅黑" panose="020B0503020204020204" pitchFamily="34" charset="-122"/>
+                          <a:ea typeface="微软雅黑" panose="020B0503020204020204" pitchFamily="34" charset="-122"/>
+                          <a:cs typeface="微软雅黑" panose="020B0503020204020204" pitchFamily="34" charset="-120"/>
                         </a:rPr>
                         <a:t>邻接表</a:t>
                       </a:r>
                       <a:endParaRPr lang="en-US" sz="1500" dirty="0">
-                        <a:latin typeface="微软雅黑" charset="0"/>
-                        <a:ea typeface="微软雅黑" charset="0"/>
-                        <a:cs typeface="微软雅黑" charset="0"/>
+                        <a:latin typeface="微软雅黑" panose="020B0503020204020204" pitchFamily="34" charset="-122"/>
+                        <a:ea typeface="微软雅黑" panose="020B0503020204020204" pitchFamily="34" charset="-122"/>
+                        <a:cs typeface="微软雅黑" panose="020B0503020204020204" pitchFamily="34" charset="-122"/>
                       </a:endParaRPr>
                     </a:p>
                   </a:txBody>
-                  <a:tcPr marL="91440" marR="91440" marT="45720" marB="45720" anchor="ctr">
+                  <a:tcPr anchor="ctr">
                     <a:lnL w="9525" cap="flat" cmpd="sng" algn="ctr">
                       <a:solidFill>
                         <a:srgbClr val="D8DBE0"/>
@@ -3975,7 +4083,7 @@
                     <a:bodyPr/>
                     <a:lstStyle/>
                     <a:p>
-                      <a:pPr algn="ctr" indent="0" marL="0">
+                      <a:pPr marL="0" indent="0" algn="ctr">
                         <a:buNone/>
                       </a:pPr>
                       <a:r>
@@ -3983,20 +4091,20 @@
                           <a:solidFill>
                             <a:srgbClr val="1F2329"/>
                           </a:solidFill>
-                          <a:latin typeface="微软雅黑" pitchFamily="34" charset="0"/>
-                          <a:ea typeface="微软雅黑" pitchFamily="34" charset="-122"/>
-                          <a:cs typeface="微软雅黑" pitchFamily="34" charset="-120"/>
+                          <a:latin typeface="微软雅黑" panose="020B0503020204020204" pitchFamily="34" charset="-122"/>
+                          <a:ea typeface="微软雅黑" panose="020B0503020204020204" pitchFamily="34" charset="-122"/>
+                          <a:cs typeface="微软雅黑" panose="020B0503020204020204" pitchFamily="34" charset="-120"/>
                         </a:rPr>
                         <a:t>O(n+e)：n 个顶点加 e 条边各一次</a:t>
                       </a:r>
                       <a:endParaRPr lang="en-US" sz="1500" dirty="0">
-                        <a:latin typeface="微软雅黑" charset="0"/>
-                        <a:ea typeface="微软雅黑" charset="0"/>
-                        <a:cs typeface="微软雅黑" charset="0"/>
+                        <a:latin typeface="微软雅黑" panose="020B0503020204020204" pitchFamily="34" charset="-122"/>
+                        <a:ea typeface="微软雅黑" panose="020B0503020204020204" pitchFamily="34" charset="-122"/>
+                        <a:cs typeface="微软雅黑" panose="020B0503020204020204" pitchFamily="34" charset="-122"/>
                       </a:endParaRPr>
                     </a:p>
                   </a:txBody>
-                  <a:tcPr marL="91440" marR="91440" marT="45720" marB="45720" anchor="ctr">
+                  <a:tcPr anchor="ctr">
                     <a:lnL w="9525" cap="flat" cmpd="sng" algn="ctr">
                       <a:solidFill>
                         <a:srgbClr val="D8DBE0"/>
@@ -4043,7 +4151,7 @@
                     <a:bodyPr/>
                     <a:lstStyle/>
                     <a:p>
-                      <a:pPr algn="ctr" indent="0" marL="0">
+                      <a:pPr marL="0" indent="0" algn="ctr">
                         <a:buNone/>
                       </a:pPr>
                       <a:r>
@@ -4051,20 +4159,20 @@
                           <a:solidFill>
                             <a:srgbClr val="1F2329"/>
                           </a:solidFill>
-                          <a:latin typeface="微软雅黑" pitchFamily="34" charset="0"/>
-                          <a:ea typeface="微软雅黑" pitchFamily="34" charset="-122"/>
-                          <a:cs typeface="微软雅黑" pitchFamily="34" charset="-120"/>
+                          <a:latin typeface="微软雅黑" panose="020B0503020204020204" pitchFamily="34" charset="-122"/>
+                          <a:ea typeface="微软雅黑" panose="020B0503020204020204" pitchFamily="34" charset="-122"/>
+                          <a:cs typeface="微软雅黑" panose="020B0503020204020204" pitchFamily="34" charset="-120"/>
                         </a:rPr>
                         <a:t>O(n)</a:t>
                       </a:r>
                       <a:endParaRPr lang="en-US" sz="1500" dirty="0">
-                        <a:latin typeface="微软雅黑" charset="0"/>
-                        <a:ea typeface="微软雅黑" charset="0"/>
-                        <a:cs typeface="微软雅黑" charset="0"/>
+                        <a:latin typeface="微软雅黑" panose="020B0503020204020204" pitchFamily="34" charset="-122"/>
+                        <a:ea typeface="微软雅黑" panose="020B0503020204020204" pitchFamily="34" charset="-122"/>
+                        <a:cs typeface="微软雅黑" panose="020B0503020204020204" pitchFamily="34" charset="-122"/>
                       </a:endParaRPr>
                     </a:p>
                   </a:txBody>
-                  <a:tcPr marL="91440" marR="91440" marT="45720" marB="45720" anchor="ctr">
+                  <a:tcPr anchor="ctr">
                     <a:lnL w="9525" cap="flat" cmpd="sng" algn="ctr">
                       <a:solidFill>
                         <a:srgbClr val="D8DBE0"/>
@@ -4111,7 +4219,7 @@
                     <a:bodyPr/>
                     <a:lstStyle/>
                     <a:p>
-                      <a:pPr algn="ctr" indent="0" marL="0">
+                      <a:pPr marL="0" indent="0" algn="ctr">
                         <a:buNone/>
                       </a:pPr>
                       <a:r>
@@ -4119,20 +4227,20 @@
                           <a:solidFill>
                             <a:srgbClr val="1F2329"/>
                           </a:solidFill>
-                          <a:latin typeface="微软雅黑" pitchFamily="34" charset="0"/>
-                          <a:ea typeface="微软雅黑" pitchFamily="34" charset="-122"/>
-                          <a:cs typeface="微软雅黑" pitchFamily="34" charset="-120"/>
+                          <a:latin typeface="微软雅黑" panose="020B0503020204020204" pitchFamily="34" charset="-122"/>
+                          <a:ea typeface="微软雅黑" panose="020B0503020204020204" pitchFamily="34" charset="-122"/>
+                          <a:cs typeface="微软雅黑" panose="020B0503020204020204" pitchFamily="34" charset="-120"/>
                         </a:rPr>
                         <a:t>O(n+e)</a:t>
                       </a:r>
                       <a:endParaRPr lang="en-US" sz="1500" dirty="0">
-                        <a:latin typeface="微软雅黑" charset="0"/>
-                        <a:ea typeface="微软雅黑" charset="0"/>
-                        <a:cs typeface="微软雅黑" charset="0"/>
+                        <a:latin typeface="微软雅黑" panose="020B0503020204020204" pitchFamily="34" charset="-122"/>
+                        <a:ea typeface="微软雅黑" panose="020B0503020204020204" pitchFamily="34" charset="-122"/>
+                        <a:cs typeface="微软雅黑" panose="020B0503020204020204" pitchFamily="34" charset="-122"/>
                       </a:endParaRPr>
                     </a:p>
                   </a:txBody>
-                  <a:tcPr marL="91440" marR="91440" marT="45720" marB="45720" anchor="ctr">
+                  <a:tcPr anchor="ctr">
                     <a:lnL w="9525" cap="flat" cmpd="sng" algn="ctr">
                       <a:solidFill>
                         <a:srgbClr val="D8DBE0"/>
@@ -4194,13 +4302,12 @@
             <a:avLst/>
           </a:prstGeom>
           <a:noFill/>
-          <a:ln/>
         </p:spPr>
         <p:txBody>
           <a:bodyPr wrap="square" rtlCol="0" anchor="t"/>
           <a:lstStyle/>
           <a:p>
-            <a:pPr algn="l" indent="0" marL="0">
+            <a:pPr marL="0" indent="0" algn="l">
               <a:buNone/>
             </a:pPr>
             <a:r>
@@ -4208,9 +4315,9 @@
                 <a:solidFill>
                   <a:srgbClr val="8A9099"/>
                 </a:solidFill>
-                <a:latin typeface="微软雅黑" pitchFamily="34" charset="0"/>
-                <a:ea typeface="微软雅黑" pitchFamily="34" charset="-122"/>
-                <a:cs typeface="微软雅黑" pitchFamily="34" charset="-120"/>
+                <a:latin typeface="微软雅黑" panose="020B0503020204020204" pitchFamily="34" charset="-122"/>
+                <a:ea typeface="微软雅黑" panose="020B0503020204020204" pitchFamily="34" charset="-122"/>
+                <a:cs typeface="微软雅黑" panose="020B0503020204020204" pitchFamily="34" charset="-120"/>
               </a:rPr>
               <a:t>为什么矩阵是 O(n²)？找某顶点的邻居要扫它那一整行 n 个格子，n 个顶点就是 n²。邻接表只走真实存在的边，是 O(n+e)。所以稀疏图用邻接表、稠密图用矩阵</a:t>
             </a:r>
@@ -4226,9 +4333,9 @@
 </p:sld>
 </file>
 
-<file path=ppt/slides/slide13.xml><?xml version="1.0" encoding="utf-8"?>
+<file path=ppt/slides/slide14.xml><?xml version="1.0" encoding="utf-8"?>
 <p:sld xmlns:a="http://schemas.openxmlformats.org/drawingml/2006/main" xmlns:r="http://schemas.openxmlformats.org/officeDocument/2006/relationships" xmlns:p="http://schemas.openxmlformats.org/presentationml/2006/main">
-  <p:cSld name="Slide 13">
+  <p:cSld>
     <p:bg>
       <p:bgPr>
         <a:blipFill dpi="0" rotWithShape="1">
@@ -4272,13 +4379,12 @@
             <a:avLst/>
           </a:prstGeom>
           <a:noFill/>
-          <a:ln/>
         </p:spPr>
         <p:txBody>
           <a:bodyPr wrap="square" rtlCol="0" anchor="ctr"/>
           <a:lstStyle/>
           <a:p>
-            <a:pPr algn="r" indent="0" marL="0">
+            <a:pPr marL="0" indent="0" algn="r">
               <a:buNone/>
             </a:pPr>
             <a:r>
@@ -4286,9 +4392,9 @@
                 <a:solidFill>
                   <a:srgbClr val="8A9099"/>
                 </a:solidFill>
-                <a:latin typeface="微软雅黑" pitchFamily="34" charset="0"/>
-                <a:ea typeface="微软雅黑" pitchFamily="34" charset="-122"/>
-                <a:cs typeface="微软雅黑" pitchFamily="34" charset="-120"/>
+                <a:latin typeface="微软雅黑" panose="020B0503020204020204" pitchFamily="34" charset="-122"/>
+                <a:ea typeface="微软雅黑" panose="020B0503020204020204" pitchFamily="34" charset="-122"/>
+                <a:cs typeface="微软雅黑" panose="020B0503020204020204" pitchFamily="34" charset="-120"/>
               </a:rPr>
               <a:t>13 / 17</a:t>
             </a:r>
@@ -4311,13 +4417,12 @@
             <a:avLst/>
           </a:prstGeom>
           <a:noFill/>
-          <a:ln/>
         </p:spPr>
         <p:txBody>
           <a:bodyPr wrap="square" rtlCol="0" anchor="ctr"/>
           <a:lstStyle/>
           <a:p>
-            <a:pPr algn="l" indent="0" marL="0">
+            <a:pPr marL="0" indent="0" algn="l">
               <a:buNone/>
             </a:pPr>
             <a:r>
@@ -4325,9 +4430,9 @@
                 <a:solidFill>
                   <a:srgbClr val="1F4E9C"/>
                 </a:solidFill>
-                <a:latin typeface="微软雅黑" pitchFamily="34" charset="0"/>
-                <a:ea typeface="微软雅黑" pitchFamily="34" charset="-122"/>
-                <a:cs typeface="微软雅黑" pitchFamily="34" charset="-120"/>
+                <a:latin typeface="微软雅黑" panose="020B0503020204020204" pitchFamily="34" charset="-122"/>
+                <a:ea typeface="微软雅黑" panose="020B0503020204020204" pitchFamily="34" charset="-122"/>
+                <a:cs typeface="微软雅黑" panose="020B0503020204020204" pitchFamily="34" charset="-120"/>
               </a:rPr>
               <a:t>生成树与森林</a:t>
             </a:r>
@@ -4350,13 +4455,12 @@
             <a:avLst/>
           </a:prstGeom>
           <a:noFill/>
-          <a:ln/>
         </p:spPr>
         <p:txBody>
           <a:bodyPr wrap="square" rtlCol="0" anchor="ctr"/>
           <a:lstStyle/>
           <a:p>
-            <a:pPr algn="l" indent="0" marL="0">
+            <a:pPr marL="0" indent="0" algn="l">
               <a:buNone/>
             </a:pPr>
             <a:r>
@@ -4364,9 +4468,9 @@
                 <a:solidFill>
                   <a:srgbClr val="1F2329"/>
                 </a:solidFill>
-                <a:latin typeface="微软雅黑" pitchFamily="34" charset="0"/>
-                <a:ea typeface="微软雅黑" pitchFamily="34" charset="-122"/>
-                <a:cs typeface="微软雅黑" pitchFamily="34" charset="-120"/>
+                <a:latin typeface="微软雅黑" panose="020B0503020204020204" pitchFamily="34" charset="-122"/>
+                <a:ea typeface="微软雅黑" panose="020B0503020204020204" pitchFamily="34" charset="-122"/>
+                <a:cs typeface="微软雅黑" panose="020B0503020204020204" pitchFamily="34" charset="-120"/>
               </a:rPr>
               <a:t>DFS 生成树、BFS 生成树与生成森林</a:t>
             </a:r>
@@ -4389,13 +4493,12 @@
             <a:avLst/>
           </a:prstGeom>
           <a:noFill/>
-          <a:ln/>
         </p:spPr>
         <p:txBody>
           <a:bodyPr wrap="square" rtlCol="0" anchor="t"/>
           <a:lstStyle/>
           <a:p>
-            <a:pPr algn="l" indent="0" marL="0">
+            <a:pPr marL="0" indent="0" algn="l">
               <a:lnSpc>
                 <a:spcPct val="115000"/>
               </a:lnSpc>
@@ -4406,25 +4509,68 @@
                 <a:solidFill>
                   <a:srgbClr val="1F4E9C"/>
                 </a:solidFill>
-                <a:latin typeface="微软雅黑" pitchFamily="34" charset="0"/>
-                <a:ea typeface="微软雅黑" pitchFamily="34" charset="-122"/>
-                <a:cs typeface="微软雅黑" pitchFamily="34" charset="-120"/>
+                <a:latin typeface="微软雅黑" panose="020B0503020204020204" pitchFamily="34" charset="-122"/>
+                <a:ea typeface="微软雅黑" panose="020B0503020204020204" pitchFamily="34" charset="-122"/>
+                <a:cs typeface="微软雅黑" panose="020B0503020204020204" pitchFamily="34" charset="-120"/>
               </a:rPr>
               <a:t>•  </a:t>
             </a:r>
-            <a:pPr algn="l" indent="0" marL="0">
+            <a:r>
+              <a:rPr lang="en-US" sz="1800" dirty="0">
+                <a:solidFill>
+                  <a:srgbClr val="000000"/>
+                </a:solidFill>
+              </a:rPr>
+              <a:t>遍历一个连通图时，走过的边会构成一棵树：DFS 走过的边叫 DFS 生成树，BFS 走过的边叫 BFS 生成树</a:t>
+            </a:r>
+            <a:endParaRPr lang="en-US" sz="1800" dirty="0"/>
+          </a:p>
+        </p:txBody>
+      </p:sp>
+      <p:sp>
+        <p:nvSpPr>
+          <p:cNvPr id="6" name="Text 4"/>
+          <p:cNvSpPr/>
+          <p:nvPr/>
+        </p:nvSpPr>
+        <p:spPr>
+          <a:xfrm>
+            <a:off x="896112" y="3209544"/>
+            <a:ext cx="10454335" cy="397764"/>
+          </a:xfrm>
+          <a:prstGeom prst="rect">
+            <a:avLst/>
+          </a:prstGeom>
+          <a:noFill/>
+        </p:spPr>
+        <p:txBody>
+          <a:bodyPr wrap="square" rtlCol="0" anchor="t"/>
+          <a:lstStyle/>
+          <a:p>
+            <a:pPr marL="0" indent="0" algn="l">
               <a:lnSpc>
                 <a:spcPct val="115000"/>
               </a:lnSpc>
               <a:buNone/>
             </a:pPr>
             <a:r>
+              <a:rPr lang="en-US" sz="1800" b="1" dirty="0">
+                <a:solidFill>
+                  <a:srgbClr val="1F4E9C"/>
+                </a:solidFill>
+                <a:latin typeface="微软雅黑" panose="020B0503020204020204" pitchFamily="34" charset="-122"/>
+                <a:ea typeface="微软雅黑" panose="020B0503020204020204" pitchFamily="34" charset="-122"/>
+                <a:cs typeface="微软雅黑" panose="020B0503020204020204" pitchFamily="34" charset="-120"/>
+              </a:rPr>
+              <a:t>•  </a:t>
+            </a:r>
+            <a:r>
               <a:rPr lang="en-US" sz="1800" dirty="0">
                 <a:solidFill>
                   <a:srgbClr val="000000"/>
                 </a:solidFill>
               </a:rPr>
-              <a:t>遍历一个连通图时，走过的边会构成一棵树：DFS 走过的边叫 DFS 生成树，BFS 走过的边叫 BFS 生成树</a:t>
+              <a:t>非连通图遍历完，每个连通分量各得一棵生成树，合起来是生成森林</a:t>
             </a:r>
             <a:endParaRPr lang="en-US" sz="1800" dirty="0"/>
           </a:p>
@@ -4432,26 +4578,25 @@
       </p:sp>
       <p:sp>
         <p:nvSpPr>
-          <p:cNvPr id="6" name="Text 4"/>
-          <p:cNvSpPr/>
-          <p:nvPr/>
-        </p:nvSpPr>
-        <p:spPr>
-          <a:xfrm>
-            <a:off x="896112" y="3209544"/>
+          <p:cNvPr id="7" name="Text 5"/>
+          <p:cNvSpPr/>
+          <p:nvPr/>
+        </p:nvSpPr>
+        <p:spPr>
+          <a:xfrm>
+            <a:off x="896112" y="3680460"/>
             <a:ext cx="10454335" cy="397764"/>
           </a:xfrm>
           <a:prstGeom prst="rect">
             <a:avLst/>
           </a:prstGeom>
           <a:noFill/>
-          <a:ln/>
         </p:spPr>
         <p:txBody>
           <a:bodyPr wrap="square" rtlCol="0" anchor="t"/>
           <a:lstStyle/>
           <a:p>
-            <a:pPr algn="l" indent="0" marL="0">
+            <a:pPr marL="0" indent="0" algn="l">
               <a:lnSpc>
                 <a:spcPct val="115000"/>
               </a:lnSpc>
@@ -4462,74 +4607,12 @@
                 <a:solidFill>
                   <a:srgbClr val="1F4E9C"/>
                 </a:solidFill>
-                <a:latin typeface="微软雅黑" pitchFamily="34" charset="0"/>
-                <a:ea typeface="微软雅黑" pitchFamily="34" charset="-122"/>
-                <a:cs typeface="微软雅黑" pitchFamily="34" charset="-120"/>
+                <a:latin typeface="微软雅黑" panose="020B0503020204020204" pitchFamily="34" charset="-122"/>
+                <a:ea typeface="微软雅黑" panose="020B0503020204020204" pitchFamily="34" charset="-122"/>
+                <a:cs typeface="微软雅黑" panose="020B0503020204020204" pitchFamily="34" charset="-120"/>
               </a:rPr>
               <a:t>•  </a:t>
             </a:r>
-            <a:pPr algn="l" indent="0" marL="0">
-              <a:lnSpc>
-                <a:spcPct val="115000"/>
-              </a:lnSpc>
-              <a:buNone/>
-            </a:pPr>
-            <a:r>
-              <a:rPr lang="en-US" sz="1800" dirty="0">
-                <a:solidFill>
-                  <a:srgbClr val="000000"/>
-                </a:solidFill>
-              </a:rPr>
-              <a:t>非连通图遍历完，每个连通分量各得一棵生成树，合起来是生成森林</a:t>
-            </a:r>
-            <a:endParaRPr lang="en-US" sz="1800" dirty="0"/>
-          </a:p>
-        </p:txBody>
-      </p:sp>
-      <p:sp>
-        <p:nvSpPr>
-          <p:cNvPr id="7" name="Text 5"/>
-          <p:cNvSpPr/>
-          <p:nvPr/>
-        </p:nvSpPr>
-        <p:spPr>
-          <a:xfrm>
-            <a:off x="896112" y="3680460"/>
-            <a:ext cx="10454335" cy="397764"/>
-          </a:xfrm>
-          <a:prstGeom prst="rect">
-            <a:avLst/>
-          </a:prstGeom>
-          <a:noFill/>
-          <a:ln/>
-        </p:spPr>
-        <p:txBody>
-          <a:bodyPr wrap="square" rtlCol="0" anchor="t"/>
-          <a:lstStyle/>
-          <a:p>
-            <a:pPr algn="l" indent="0" marL="0">
-              <a:lnSpc>
-                <a:spcPct val="115000"/>
-              </a:lnSpc>
-              <a:buNone/>
-            </a:pPr>
-            <a:r>
-              <a:rPr lang="en-US" sz="1800" b="1" dirty="0">
-                <a:solidFill>
-                  <a:srgbClr val="1F4E9C"/>
-                </a:solidFill>
-                <a:latin typeface="微软雅黑" pitchFamily="34" charset="0"/>
-                <a:ea typeface="微软雅黑" pitchFamily="34" charset="-122"/>
-                <a:cs typeface="微软雅黑" pitchFamily="34" charset="-120"/>
-              </a:rPr>
-              <a:t>•  </a:t>
-            </a:r>
-            <a:pPr algn="l" indent="0" marL="0">
-              <a:lnSpc>
-                <a:spcPct val="115000"/>
-              </a:lnSpc>
-              <a:buNone/>
-            </a:pPr>
             <a:r>
               <a:rPr lang="en-US" sz="1800" dirty="0">
                 <a:solidFill>
@@ -4557,13 +4640,12 @@
             <a:avLst/>
           </a:prstGeom>
           <a:noFill/>
-          <a:ln/>
         </p:spPr>
         <p:txBody>
           <a:bodyPr wrap="square" rtlCol="0" anchor="t"/>
           <a:lstStyle/>
           <a:p>
-            <a:pPr algn="l" indent="0" marL="0">
+            <a:pPr marL="0" indent="0" algn="l">
               <a:buNone/>
             </a:pPr>
             <a:r>
@@ -4571,9 +4653,9 @@
                 <a:solidFill>
                   <a:srgbClr val="8A9099"/>
                 </a:solidFill>
-                <a:latin typeface="微软雅黑" pitchFamily="34" charset="0"/>
-                <a:ea typeface="微软雅黑" pitchFamily="34" charset="-122"/>
-                <a:cs typeface="微软雅黑" pitchFamily="34" charset="-120"/>
+                <a:latin typeface="微软雅黑" panose="020B0503020204020204" pitchFamily="34" charset="-122"/>
+                <a:ea typeface="微软雅黑" panose="020B0503020204020204" pitchFamily="34" charset="-122"/>
+                <a:cs typeface="微软雅黑" panose="020B0503020204020204" pitchFamily="34" charset="-120"/>
               </a:rPr>
               <a:t>求生成树是画图题的常考点（题集勾画 7答5）；你按遍历的走法把经过的边画出来就是生成树</a:t>
             </a:r>
@@ -4589,9 +4671,9 @@
 </p:sld>
 </file>
 
-<file path=ppt/slides/slide14.xml><?xml version="1.0" encoding="utf-8"?>
+<file path=ppt/slides/slide15.xml><?xml version="1.0" encoding="utf-8"?>
 <p:sld xmlns:a="http://schemas.openxmlformats.org/drawingml/2006/main" xmlns:r="http://schemas.openxmlformats.org/officeDocument/2006/relationships" xmlns:p="http://schemas.openxmlformats.org/presentationml/2006/main">
-  <p:cSld name="Slide 14">
+  <p:cSld>
     <p:bg>
       <p:bgPr>
         <a:blipFill dpi="0" rotWithShape="1">
@@ -4635,13 +4717,12 @@
             <a:avLst/>
           </a:prstGeom>
           <a:noFill/>
-          <a:ln/>
         </p:spPr>
         <p:txBody>
           <a:bodyPr wrap="square" rtlCol="0" anchor="ctr"/>
           <a:lstStyle/>
           <a:p>
-            <a:pPr algn="r" indent="0" marL="0">
+            <a:pPr marL="0" indent="0" algn="r">
               <a:buNone/>
             </a:pPr>
             <a:r>
@@ -4649,9 +4730,9 @@
                 <a:solidFill>
                   <a:srgbClr val="8A9099"/>
                 </a:solidFill>
-                <a:latin typeface="微软雅黑" pitchFamily="34" charset="0"/>
-                <a:ea typeface="微软雅黑" pitchFamily="34" charset="-122"/>
-                <a:cs typeface="微软雅黑" pitchFamily="34" charset="-120"/>
+                <a:latin typeface="微软雅黑" panose="020B0503020204020204" pitchFamily="34" charset="-122"/>
+                <a:ea typeface="微软雅黑" panose="020B0503020204020204" pitchFamily="34" charset="-122"/>
+                <a:cs typeface="微软雅黑" panose="020B0503020204020204" pitchFamily="34" charset="-120"/>
               </a:rPr>
               <a:t>14 / 17</a:t>
             </a:r>
@@ -4674,13 +4755,12 @@
             <a:avLst/>
           </a:prstGeom>
           <a:noFill/>
-          <a:ln/>
         </p:spPr>
         <p:txBody>
           <a:bodyPr wrap="square" rtlCol="0" anchor="ctr"/>
           <a:lstStyle/>
           <a:p>
-            <a:pPr algn="l" indent="0" marL="0">
+            <a:pPr marL="0" indent="0" algn="l">
               <a:buNone/>
             </a:pPr>
             <a:r>
@@ -4688,9 +4768,9 @@
                 <a:solidFill>
                   <a:srgbClr val="1F4E9C"/>
                 </a:solidFill>
-                <a:latin typeface="微软雅黑" pitchFamily="34" charset="0"/>
-                <a:ea typeface="微软雅黑" pitchFamily="34" charset="-122"/>
-                <a:cs typeface="微软雅黑" pitchFamily="34" charset="-120"/>
+                <a:latin typeface="微软雅黑" panose="020B0503020204020204" pitchFamily="34" charset="-122"/>
+                <a:ea typeface="微软雅黑" panose="020B0503020204020204" pitchFamily="34" charset="-122"/>
+                <a:cs typeface="微软雅黑" panose="020B0503020204020204" pitchFamily="34" charset="-120"/>
               </a:rPr>
               <a:t>拓展 · 并查集</a:t>
             </a:r>
@@ -4713,13 +4793,12 @@
             <a:avLst/>
           </a:prstGeom>
           <a:noFill/>
-          <a:ln/>
         </p:spPr>
         <p:txBody>
           <a:bodyPr wrap="square" rtlCol="0" anchor="ctr"/>
           <a:lstStyle/>
           <a:p>
-            <a:pPr algn="l" indent="0" marL="0">
+            <a:pPr marL="0" indent="0" algn="l">
               <a:buNone/>
             </a:pPr>
             <a:r>
@@ -4727,9 +4806,9 @@
                 <a:solidFill>
                   <a:srgbClr val="1F2329"/>
                 </a:solidFill>
-                <a:latin typeface="微软雅黑" pitchFamily="34" charset="0"/>
-                <a:ea typeface="微软雅黑" pitchFamily="34" charset="-122"/>
-                <a:cs typeface="微软雅黑" pitchFamily="34" charset="-120"/>
+                <a:latin typeface="微软雅黑" panose="020B0503020204020204" pitchFamily="34" charset="-122"/>
+                <a:ea typeface="微软雅黑" panose="020B0503020204020204" pitchFamily="34" charset="-122"/>
+                <a:cs typeface="微软雅黑" panose="020B0503020204020204" pitchFamily="34" charset="-120"/>
               </a:rPr>
               <a:t>并查集：先认个脸，强化阶段要用</a:t>
             </a:r>
@@ -4752,13 +4831,12 @@
             <a:avLst/>
           </a:prstGeom>
           <a:noFill/>
-          <a:ln/>
         </p:spPr>
         <p:txBody>
           <a:bodyPr wrap="square" rtlCol="0" anchor="t"/>
           <a:lstStyle/>
           <a:p>
-            <a:pPr algn="l" indent="0" marL="0">
+            <a:pPr marL="0" indent="0" algn="l">
               <a:lnSpc>
                 <a:spcPct val="115000"/>
               </a:lnSpc>
@@ -4769,25 +4847,68 @@
                 <a:solidFill>
                   <a:srgbClr val="1F4E9C"/>
                 </a:solidFill>
-                <a:latin typeface="微软雅黑" pitchFamily="34" charset="0"/>
-                <a:ea typeface="微软雅黑" pitchFamily="34" charset="-122"/>
-                <a:cs typeface="微软雅黑" pitchFamily="34" charset="-120"/>
+                <a:latin typeface="微软雅黑" panose="020B0503020204020204" pitchFamily="34" charset="-122"/>
+                <a:ea typeface="微软雅黑" panose="020B0503020204020204" pitchFamily="34" charset="-122"/>
+                <a:cs typeface="微软雅黑" panose="020B0503020204020204" pitchFamily="34" charset="-120"/>
               </a:rPr>
               <a:t>•  </a:t>
             </a:r>
-            <a:pPr algn="l" indent="0" marL="0">
+            <a:r>
+              <a:rPr lang="en-US" sz="1800" dirty="0">
+                <a:solidFill>
+                  <a:srgbClr val="000000"/>
+                </a:solidFill>
+              </a:rPr>
+              <a:t>并查集用一个数组 parent，parent[i] 记 i 的父结点，根结点的 parent 指向自己</a:t>
+            </a:r>
+            <a:endParaRPr lang="en-US" sz="1800" dirty="0"/>
+          </a:p>
+        </p:txBody>
+      </p:sp>
+      <p:sp>
+        <p:nvSpPr>
+          <p:cNvPr id="6" name="Text 4"/>
+          <p:cNvSpPr/>
+          <p:nvPr/>
+        </p:nvSpPr>
+        <p:spPr>
+          <a:xfrm>
+            <a:off x="896112" y="3209544"/>
+            <a:ext cx="10454335" cy="740664"/>
+          </a:xfrm>
+          <a:prstGeom prst="rect">
+            <a:avLst/>
+          </a:prstGeom>
+          <a:noFill/>
+        </p:spPr>
+        <p:txBody>
+          <a:bodyPr wrap="square" rtlCol="0" anchor="t"/>
+          <a:lstStyle/>
+          <a:p>
+            <a:pPr marL="0" indent="0" algn="l">
               <a:lnSpc>
                 <a:spcPct val="115000"/>
               </a:lnSpc>
               <a:buNone/>
             </a:pPr>
             <a:r>
+              <a:rPr lang="en-US" sz="1800" b="1" dirty="0">
+                <a:solidFill>
+                  <a:srgbClr val="1F4E9C"/>
+                </a:solidFill>
+                <a:latin typeface="微软雅黑" panose="020B0503020204020204" pitchFamily="34" charset="-122"/>
+                <a:ea typeface="微软雅黑" panose="020B0503020204020204" pitchFamily="34" charset="-122"/>
+                <a:cs typeface="微软雅黑" panose="020B0503020204020204" pitchFamily="34" charset="-120"/>
+              </a:rPr>
+              <a:t>•  </a:t>
+            </a:r>
+            <a:r>
               <a:rPr lang="en-US" sz="1800" dirty="0">
                 <a:solidFill>
                   <a:srgbClr val="000000"/>
                 </a:solidFill>
               </a:rPr>
-              <a:t>并查集用一个数组 parent，parent[i] 记 i 的父结点，根结点的 parent 指向自己</a:t>
+              <a:t>两个操作：Find 沿父结点一路往上找到根；Union 把一棵树的根接到另一棵树的根下，合并两个集合</a:t>
             </a:r>
             <a:endParaRPr lang="en-US" sz="1800" dirty="0"/>
           </a:p>
@@ -4795,26 +4916,25 @@
       </p:sp>
       <p:sp>
         <p:nvSpPr>
-          <p:cNvPr id="6" name="Text 4"/>
-          <p:cNvSpPr/>
-          <p:nvPr/>
-        </p:nvSpPr>
-        <p:spPr>
-          <a:xfrm>
-            <a:off x="896112" y="3209544"/>
+          <p:cNvPr id="7" name="Text 5"/>
+          <p:cNvSpPr/>
+          <p:nvPr/>
+        </p:nvSpPr>
+        <p:spPr>
+          <a:xfrm>
+            <a:off x="896112" y="4023360"/>
             <a:ext cx="10454335" cy="740664"/>
           </a:xfrm>
           <a:prstGeom prst="rect">
             <a:avLst/>
           </a:prstGeom>
           <a:noFill/>
-          <a:ln/>
         </p:spPr>
         <p:txBody>
           <a:bodyPr wrap="square" rtlCol="0" anchor="t"/>
           <a:lstStyle/>
           <a:p>
-            <a:pPr algn="l" indent="0" marL="0">
+            <a:pPr marL="0" indent="0" algn="l">
               <a:lnSpc>
                 <a:spcPct val="115000"/>
               </a:lnSpc>
@@ -4825,74 +4945,12 @@
                 <a:solidFill>
                   <a:srgbClr val="1F4E9C"/>
                 </a:solidFill>
-                <a:latin typeface="微软雅黑" pitchFamily="34" charset="0"/>
-                <a:ea typeface="微软雅黑" pitchFamily="34" charset="-122"/>
-                <a:cs typeface="微软雅黑" pitchFamily="34" charset="-120"/>
+                <a:latin typeface="微软雅黑" panose="020B0503020204020204" pitchFamily="34" charset="-122"/>
+                <a:ea typeface="微软雅黑" panose="020B0503020204020204" pitchFamily="34" charset="-122"/>
+                <a:cs typeface="微软雅黑" panose="020B0503020204020204" pitchFamily="34" charset="-120"/>
               </a:rPr>
               <a:t>•  </a:t>
             </a:r>
-            <a:pPr algn="l" indent="0" marL="0">
-              <a:lnSpc>
-                <a:spcPct val="115000"/>
-              </a:lnSpc>
-              <a:buNone/>
-            </a:pPr>
-            <a:r>
-              <a:rPr lang="en-US" sz="1800" dirty="0">
-                <a:solidFill>
-                  <a:srgbClr val="000000"/>
-                </a:solidFill>
-              </a:rPr>
-              <a:t>两个操作：Find 沿父结点一路往上找到根；Union 把一棵树的根接到另一棵树的根下，合并两个集合</a:t>
-            </a:r>
-            <a:endParaRPr lang="en-US" sz="1800" dirty="0"/>
-          </a:p>
-        </p:txBody>
-      </p:sp>
-      <p:sp>
-        <p:nvSpPr>
-          <p:cNvPr id="7" name="Text 5"/>
-          <p:cNvSpPr/>
-          <p:nvPr/>
-        </p:nvSpPr>
-        <p:spPr>
-          <a:xfrm>
-            <a:off x="896112" y="4023360"/>
-            <a:ext cx="10454335" cy="740664"/>
-          </a:xfrm>
-          <a:prstGeom prst="rect">
-            <a:avLst/>
-          </a:prstGeom>
-          <a:noFill/>
-          <a:ln/>
-        </p:spPr>
-        <p:txBody>
-          <a:bodyPr wrap="square" rtlCol="0" anchor="t"/>
-          <a:lstStyle/>
-          <a:p>
-            <a:pPr algn="l" indent="0" marL="0">
-              <a:lnSpc>
-                <a:spcPct val="115000"/>
-              </a:lnSpc>
-              <a:buNone/>
-            </a:pPr>
-            <a:r>
-              <a:rPr lang="en-US" sz="1800" b="1" dirty="0">
-                <a:solidFill>
-                  <a:srgbClr val="1F4E9C"/>
-                </a:solidFill>
-                <a:latin typeface="微软雅黑" pitchFamily="34" charset="0"/>
-                <a:ea typeface="微软雅黑" pitchFamily="34" charset="-122"/>
-                <a:cs typeface="微软雅黑" pitchFamily="34" charset="-120"/>
-              </a:rPr>
-              <a:t>•  </a:t>
-            </a:r>
-            <a:pPr algn="l" indent="0" marL="0">
-              <a:lnSpc>
-                <a:spcPct val="115000"/>
-              </a:lnSpc>
-              <a:buNone/>
-            </a:pPr>
             <a:r>
               <a:rPr lang="en-US" sz="1800" dirty="0">
                 <a:solidFill>
@@ -4920,13 +4978,12 @@
             <a:avLst/>
           </a:prstGeom>
           <a:noFill/>
-          <a:ln/>
         </p:spPr>
         <p:txBody>
           <a:bodyPr wrap="square" rtlCol="0" anchor="t"/>
           <a:lstStyle/>
           <a:p>
-            <a:pPr algn="l" indent="0" marL="0">
+            <a:pPr marL="0" indent="0" algn="l">
               <a:buNone/>
             </a:pPr>
             <a:r>
@@ -4934,9 +4991,9 @@
                 <a:solidFill>
                   <a:srgbClr val="8A9099"/>
                 </a:solidFill>
-                <a:latin typeface="微软雅黑" pitchFamily="34" charset="0"/>
-                <a:ea typeface="微软雅黑" pitchFamily="34" charset="-122"/>
-                <a:cs typeface="微软雅黑" pitchFamily="34" charset="-120"/>
+                <a:latin typeface="微软雅黑" panose="020B0503020204020204" pitchFamily="34" charset="-122"/>
+                <a:ea typeface="微软雅黑" panose="020B0503020204020204" pitchFamily="34" charset="-122"/>
+                <a:cs typeface="微软雅黑" panose="020B0503020204020204" pitchFamily="34" charset="-120"/>
               </a:rPr>
               <a:t>这一页先理这些概念，不展开代码；等强化阶段讲 Kruskal 时兑现，到时候你会看到并查集怎么用来判断加一条边会不会成环</a:t>
             </a:r>
@@ -4952,9 +5009,9 @@
 </p:sld>
 </file>
 
-<file path=ppt/slides/slide15.xml><?xml version="1.0" encoding="utf-8"?>
+<file path=ppt/slides/slide16.xml><?xml version="1.0" encoding="utf-8"?>
 <p:sld xmlns:a="http://schemas.openxmlformats.org/drawingml/2006/main" xmlns:r="http://schemas.openxmlformats.org/officeDocument/2006/relationships" xmlns:p="http://schemas.openxmlformats.org/presentationml/2006/main">
-  <p:cSld name="Slide 15">
+  <p:cSld>
     <p:bg>
       <p:bgPr>
         <a:blipFill dpi="0" rotWithShape="1">
@@ -4998,13 +5055,12 @@
             <a:avLst/>
           </a:prstGeom>
           <a:noFill/>
-          <a:ln/>
         </p:spPr>
         <p:txBody>
           <a:bodyPr wrap="square" rtlCol="0" anchor="ctr"/>
           <a:lstStyle/>
           <a:p>
-            <a:pPr algn="r" indent="0" marL="0">
+            <a:pPr marL="0" indent="0" algn="r">
               <a:buNone/>
             </a:pPr>
             <a:r>
@@ -5012,9 +5068,9 @@
                 <a:solidFill>
                   <a:srgbClr val="8A9099"/>
                 </a:solidFill>
-                <a:latin typeface="微软雅黑" pitchFamily="34" charset="0"/>
-                <a:ea typeface="微软雅黑" pitchFamily="34" charset="-122"/>
-                <a:cs typeface="微软雅黑" pitchFamily="34" charset="-120"/>
+                <a:latin typeface="微软雅黑" panose="020B0503020204020204" pitchFamily="34" charset="-122"/>
+                <a:ea typeface="微软雅黑" panose="020B0503020204020204" pitchFamily="34" charset="-122"/>
+                <a:cs typeface="微软雅黑" panose="020B0503020204020204" pitchFamily="34" charset="-120"/>
               </a:rPr>
               <a:t>15 / 17</a:t>
             </a:r>
@@ -5037,13 +5093,12 @@
             <a:avLst/>
           </a:prstGeom>
           <a:noFill/>
-          <a:ln/>
         </p:spPr>
         <p:txBody>
           <a:bodyPr wrap="square" rtlCol="0" anchor="ctr"/>
           <a:lstStyle/>
           <a:p>
-            <a:pPr algn="l" indent="0" marL="0">
+            <a:pPr marL="0" indent="0" algn="l">
               <a:buNone/>
             </a:pPr>
             <a:r>
@@ -5051,9 +5106,9 @@
                 <a:solidFill>
                   <a:srgbClr val="1F4E9C"/>
                 </a:solidFill>
-                <a:latin typeface="微软雅黑" pitchFamily="34" charset="0"/>
-                <a:ea typeface="微软雅黑" pitchFamily="34" charset="-122"/>
-                <a:cs typeface="微软雅黑" pitchFamily="34" charset="-120"/>
+                <a:latin typeface="微软雅黑" panose="020B0503020204020204" pitchFamily="34" charset="-122"/>
+                <a:ea typeface="微软雅黑" panose="020B0503020204020204" pitchFamily="34" charset="-122"/>
+                <a:cs typeface="微软雅黑" panose="020B0503020204020204" pitchFamily="34" charset="-120"/>
               </a:rPr>
               <a:t>本节小结与课后</a:t>
             </a:r>
@@ -5076,13 +5131,12 @@
             <a:avLst/>
           </a:prstGeom>
           <a:noFill/>
-          <a:ln/>
         </p:spPr>
         <p:txBody>
           <a:bodyPr wrap="square" rtlCol="0" anchor="ctr"/>
           <a:lstStyle/>
           <a:p>
-            <a:pPr algn="l" indent="0" marL="0">
+            <a:pPr marL="0" indent="0" algn="l">
               <a:buNone/>
             </a:pPr>
             <a:r>
@@ -5090,9 +5144,9 @@
                 <a:solidFill>
                   <a:srgbClr val="1F2329"/>
                 </a:solidFill>
-                <a:latin typeface="微软雅黑" pitchFamily="34" charset="0"/>
-                <a:ea typeface="微软雅黑" pitchFamily="34" charset="-122"/>
-                <a:cs typeface="微软雅黑" pitchFamily="34" charset="-120"/>
+                <a:latin typeface="微软雅黑" panose="020B0503020204020204" pitchFamily="34" charset="-122"/>
+                <a:ea typeface="微软雅黑" panose="020B0503020204020204" pitchFamily="34" charset="-122"/>
+                <a:cs typeface="微软雅黑" panose="020B0503020204020204" pitchFamily="34" charset="-120"/>
               </a:rPr>
               <a:t>小结与课后任务</a:t>
             </a:r>
@@ -5115,13 +5169,12 @@
             <a:avLst/>
           </a:prstGeom>
           <a:noFill/>
-          <a:ln/>
         </p:spPr>
         <p:txBody>
           <a:bodyPr wrap="square" rtlCol="0" anchor="t"/>
           <a:lstStyle/>
           <a:p>
-            <a:pPr algn="l" indent="0" marL="0">
+            <a:pPr marL="0" indent="0" algn="l">
               <a:lnSpc>
                 <a:spcPct val="115000"/>
               </a:lnSpc>
@@ -5132,25 +5185,68 @@
                 <a:solidFill>
                   <a:srgbClr val="1F4E9C"/>
                 </a:solidFill>
-                <a:latin typeface="微软雅黑" pitchFamily="34" charset="0"/>
-                <a:ea typeface="微软雅黑" pitchFamily="34" charset="-122"/>
-                <a:cs typeface="微软雅黑" pitchFamily="34" charset="-120"/>
+                <a:latin typeface="微软雅黑" panose="020B0503020204020204" pitchFamily="34" charset="-122"/>
+                <a:ea typeface="微软雅黑" panose="020B0503020204020204" pitchFamily="34" charset="-122"/>
+                <a:cs typeface="微软雅黑" panose="020B0503020204020204" pitchFamily="34" charset="-120"/>
               </a:rPr>
               <a:t>•  </a:t>
             </a:r>
-            <a:pPr algn="l" indent="0" marL="0">
+            <a:r>
+              <a:rPr lang="en-US" sz="1700" dirty="0">
+                <a:solidFill>
+                  <a:srgbClr val="000000"/>
+                </a:solidFill>
+              </a:rPr>
+              <a:t>存储：邻接矩阵 O(n²) 适合稠密图，邻接表 O(n+e) 适合稀疏图；求入度要遍历所有顶点的边表</a:t>
+            </a:r>
+            <a:endParaRPr lang="en-US" sz="1700" dirty="0"/>
+          </a:p>
+        </p:txBody>
+      </p:sp>
+      <p:sp>
+        <p:nvSpPr>
+          <p:cNvPr id="6" name="Text 4"/>
+          <p:cNvSpPr/>
+          <p:nvPr/>
+        </p:nvSpPr>
+        <p:spPr>
+          <a:xfrm>
+            <a:off x="896112" y="3171444"/>
+            <a:ext cx="10454335" cy="702564"/>
+          </a:xfrm>
+          <a:prstGeom prst="rect">
+            <a:avLst/>
+          </a:prstGeom>
+          <a:noFill/>
+        </p:spPr>
+        <p:txBody>
+          <a:bodyPr wrap="square" rtlCol="0" anchor="t"/>
+          <a:lstStyle/>
+          <a:p>
+            <a:pPr marL="0" indent="0" algn="l">
               <a:lnSpc>
                 <a:spcPct val="115000"/>
               </a:lnSpc>
               <a:buNone/>
             </a:pPr>
             <a:r>
+              <a:rPr lang="en-US" sz="1700" b="1" dirty="0">
+                <a:solidFill>
+                  <a:srgbClr val="1F4E9C"/>
+                </a:solidFill>
+                <a:latin typeface="微软雅黑" panose="020B0503020204020204" pitchFamily="34" charset="-122"/>
+                <a:ea typeface="微软雅黑" panose="020B0503020204020204" pitchFamily="34" charset="-122"/>
+                <a:cs typeface="微软雅黑" panose="020B0503020204020204" pitchFamily="34" charset="-120"/>
+              </a:rPr>
+              <a:t>•  </a:t>
+            </a:r>
+            <a:r>
               <a:rPr lang="en-US" sz="1700" dirty="0">
                 <a:solidFill>
                   <a:srgbClr val="000000"/>
                 </a:solidFill>
               </a:rPr>
-              <a:t>存储：邻接矩阵 O(n²) 适合稠密图，邻接表 O(n+e) 适合稀疏图；求入度要遍历所有顶点的边表</a:t>
+              <a:t>遍历：DFS 递归、一路往深走到底再回退；BFS 用队列、一层层扩，入队时就标记 visited；非连通图外套 Traverse、先复位</a:t>
             </a:r>
             <a:endParaRPr lang="en-US" sz="1700" dirty="0"/>
           </a:p>
@@ -5158,26 +5254,25 @@
       </p:sp>
       <p:sp>
         <p:nvSpPr>
-          <p:cNvPr id="6" name="Text 4"/>
-          <p:cNvSpPr/>
-          <p:nvPr/>
-        </p:nvSpPr>
-        <p:spPr>
-          <a:xfrm>
-            <a:off x="896112" y="3171444"/>
-            <a:ext cx="10454335" cy="702564"/>
-          </a:xfrm>
-          <a:prstGeom prst="rect">
-            <a:avLst/>
-          </a:prstGeom>
-          <a:noFill/>
-          <a:ln/>
+          <p:cNvPr id="7" name="Text 5"/>
+          <p:cNvSpPr/>
+          <p:nvPr/>
+        </p:nvSpPr>
+        <p:spPr>
+          <a:xfrm>
+            <a:off x="896112" y="3947160"/>
+            <a:ext cx="10454335" cy="378714"/>
+          </a:xfrm>
+          <a:prstGeom prst="rect">
+            <a:avLst/>
+          </a:prstGeom>
+          <a:noFill/>
         </p:spPr>
         <p:txBody>
           <a:bodyPr wrap="square" rtlCol="0" anchor="t"/>
           <a:lstStyle/>
           <a:p>
-            <a:pPr algn="l" indent="0" marL="0">
+            <a:pPr marL="0" indent="0" algn="l">
               <a:lnSpc>
                 <a:spcPct val="115000"/>
               </a:lnSpc>
@@ -5188,172 +5283,85 @@
                 <a:solidFill>
                   <a:srgbClr val="1F4E9C"/>
                 </a:solidFill>
-                <a:latin typeface="微软雅黑" pitchFamily="34" charset="0"/>
-                <a:ea typeface="微软雅黑" pitchFamily="34" charset="-122"/>
-                <a:cs typeface="微软雅黑" pitchFamily="34" charset="-120"/>
+                <a:latin typeface="微软雅黑" panose="020B0503020204020204" pitchFamily="34" charset="-122"/>
+                <a:ea typeface="微软雅黑" panose="020B0503020204020204" pitchFamily="34" charset="-122"/>
+                <a:cs typeface="微软雅黑" panose="020B0503020204020204" pitchFamily="34" charset="-120"/>
               </a:rPr>
               <a:t>•  </a:t>
             </a:r>
-            <a:pPr algn="l" indent="0" marL="0">
+            <a:r>
+              <a:rPr lang="en-US" sz="1700" dirty="0">
+                <a:solidFill>
+                  <a:srgbClr val="000000"/>
+                </a:solidFill>
+              </a:rPr>
+              <a:t>复杂度：矩阵 O(n²)、邻接表 O(n+e)；遍历走过的边构成生成树或生成森林</a:t>
+            </a:r>
+            <a:endParaRPr lang="en-US" sz="1700" dirty="0"/>
+          </a:p>
+        </p:txBody>
+      </p:sp>
+      <p:sp>
+        <p:nvSpPr>
+          <p:cNvPr id="8" name="Text 6"/>
+          <p:cNvSpPr/>
+          <p:nvPr/>
+        </p:nvSpPr>
+        <p:spPr>
+          <a:xfrm>
+            <a:off x="896112" y="4399026"/>
+            <a:ext cx="10454335" cy="1026414"/>
+          </a:xfrm>
+          <a:prstGeom prst="rect">
+            <a:avLst/>
+          </a:prstGeom>
+          <a:noFill/>
+        </p:spPr>
+        <p:txBody>
+          <a:bodyPr wrap="square" rtlCol="0" anchor="t"/>
+          <a:lstStyle/>
+          <a:p>
+            <a:pPr marL="0" indent="0" algn="l">
               <a:lnSpc>
                 <a:spcPct val="115000"/>
               </a:lnSpc>
               <a:buNone/>
             </a:pPr>
             <a:r>
+              <a:rPr lang="en-US" sz="1700" b="1" dirty="0">
+                <a:solidFill>
+                  <a:srgbClr val="1F4E9C"/>
+                </a:solidFill>
+                <a:latin typeface="微软雅黑" panose="020B0503020204020204" pitchFamily="34" charset="-122"/>
+                <a:ea typeface="微软雅黑" panose="020B0503020204020204" pitchFamily="34" charset="-122"/>
+                <a:cs typeface="微软雅黑" panose="020B0503020204020204" pitchFamily="34" charset="-120"/>
+              </a:rPr>
+              <a:t>•  </a:t>
+            </a:r>
+            <a:r>
+              <a:rPr lang="en-US" sz="1700" b="1" dirty="0">
+                <a:solidFill>
+                  <a:srgbClr val="000000"/>
+                </a:solidFill>
+              </a:rPr>
+              <a:t>跟练</a:t>
+            </a:r>
+            <a:r>
               <a:rPr lang="en-US" sz="1700" dirty="0">
                 <a:solidFill>
                   <a:srgbClr val="000000"/>
                 </a:solidFill>
               </a:rPr>
-              <a:t>遍历：DFS 递归、一路往深走到底再回退；BFS 用队列、一层层扩，入队时就标记 visited；非连通图外套 Traverse、先复位</a:t>
-            </a:r>
-            <a:endParaRPr lang="en-US" sz="1700" dirty="0"/>
-          </a:p>
-        </p:txBody>
-      </p:sp>
-      <p:sp>
-        <p:nvSpPr>
-          <p:cNvPr id="7" name="Text 5"/>
-          <p:cNvSpPr/>
-          <p:nvPr/>
-        </p:nvSpPr>
-        <p:spPr>
-          <a:xfrm>
-            <a:off x="896112" y="3947160"/>
-            <a:ext cx="10454335" cy="378714"/>
-          </a:xfrm>
-          <a:prstGeom prst="rect">
-            <a:avLst/>
-          </a:prstGeom>
-          <a:noFill/>
-          <a:ln/>
-        </p:spPr>
-        <p:txBody>
-          <a:bodyPr wrap="square" rtlCol="0" anchor="t"/>
-          <a:lstStyle/>
-          <a:p>
-            <a:pPr algn="l" indent="0" marL="0">
-              <a:lnSpc>
-                <a:spcPct val="115000"/>
-              </a:lnSpc>
-              <a:buNone/>
-            </a:pPr>
+              <a:t>：默写邻接表定义、DFS、BFS、Indegree；给一张5顶点的图写出邻接矩阵与邻接表、从0出发的 DFS 与 BFS 序列。</a:t>
+            </a:r>
             <a:r>
               <a:rPr lang="en-US" sz="1700" b="1" dirty="0">
                 <a:solidFill>
-                  <a:srgbClr val="1F4E9C"/>
-                </a:solidFill>
-                <a:latin typeface="微软雅黑" pitchFamily="34" charset="0"/>
-                <a:ea typeface="微软雅黑" pitchFamily="34" charset="-122"/>
-                <a:cs typeface="微软雅黑" pitchFamily="34" charset="-120"/>
-              </a:rPr>
-              <a:t>•  </a:t>
-            </a:r>
-            <a:pPr algn="l" indent="0" marL="0">
-              <a:lnSpc>
-                <a:spcPct val="115000"/>
-              </a:lnSpc>
-              <a:buNone/>
-            </a:pPr>
-            <a:r>
-              <a:rPr lang="en-US" sz="1700" dirty="0">
-                <a:solidFill>
                   <a:srgbClr val="000000"/>
                 </a:solidFill>
               </a:rPr>
-              <a:t>复杂度：矩阵 O(n²)、邻接表 O(n+e)；遍历走过的边构成生成树或生成森林</a:t>
-            </a:r>
-            <a:endParaRPr lang="en-US" sz="1700" dirty="0"/>
-          </a:p>
-        </p:txBody>
-      </p:sp>
-      <p:sp>
-        <p:nvSpPr>
-          <p:cNvPr id="8" name="Text 6"/>
-          <p:cNvSpPr/>
-          <p:nvPr/>
-        </p:nvSpPr>
-        <p:spPr>
-          <a:xfrm>
-            <a:off x="896112" y="4399026"/>
-            <a:ext cx="10454335" cy="1026414"/>
-          </a:xfrm>
-          <a:prstGeom prst="rect">
-            <a:avLst/>
-          </a:prstGeom>
-          <a:noFill/>
-          <a:ln/>
-        </p:spPr>
-        <p:txBody>
-          <a:bodyPr wrap="square" rtlCol="0" anchor="t"/>
-          <a:lstStyle/>
-          <a:p>
-            <a:pPr algn="l" indent="0" marL="0">
-              <a:lnSpc>
-                <a:spcPct val="115000"/>
-              </a:lnSpc>
-              <a:buNone/>
-            </a:pPr>
-            <a:r>
-              <a:rPr lang="en-US" sz="1700" b="1" dirty="0">
-                <a:solidFill>
-                  <a:srgbClr val="1F4E9C"/>
-                </a:solidFill>
-                <a:latin typeface="微软雅黑" pitchFamily="34" charset="0"/>
-                <a:ea typeface="微软雅黑" pitchFamily="34" charset="-122"/>
-                <a:cs typeface="微软雅黑" pitchFamily="34" charset="-120"/>
-              </a:rPr>
-              <a:t>•  </a:t>
-            </a:r>
-            <a:pPr algn="l" indent="0" marL="0">
-              <a:lnSpc>
-                <a:spcPct val="115000"/>
-              </a:lnSpc>
-              <a:buNone/>
-            </a:pPr>
-            <a:r>
-              <a:rPr lang="en-US" sz="1700" b="1" dirty="0">
-                <a:solidFill>
-                  <a:srgbClr val="000000"/>
-                </a:solidFill>
-              </a:rPr>
-              <a:t>跟练</a:t>
-            </a:r>
-            <a:pPr algn="l" indent="0" marL="0">
-              <a:lnSpc>
-                <a:spcPct val="115000"/>
-              </a:lnSpc>
-              <a:buNone/>
-            </a:pPr>
-            <a:r>
-              <a:rPr lang="en-US" sz="1700" dirty="0">
-                <a:solidFill>
-                  <a:srgbClr val="000000"/>
-                </a:solidFill>
-              </a:rPr>
-              <a:t>：默写邻接表定义、DFS、BFS、Indegree；给一张5顶点的图写出邻接矩阵与邻接表、从0出发的 DFS 与 BFS 序列。</a:t>
-            </a:r>
-            <a:pPr algn="l" indent="0" marL="0">
-              <a:lnSpc>
-                <a:spcPct val="115000"/>
-              </a:lnSpc>
-              <a:buNone/>
-            </a:pPr>
-            <a:r>
-              <a:rPr lang="en-US" sz="1700" b="1" dirty="0">
-                <a:solidFill>
-                  <a:srgbClr val="000000"/>
-                </a:solidFill>
-              </a:rPr>
               <a:t>模仿</a:t>
             </a:r>
-            <a:pPr algn="l" indent="0" marL="0">
-              <a:lnSpc>
-                <a:spcPct val="115000"/>
-              </a:lnSpc>
-              <a:buNone/>
-            </a:pPr>
             <a:r>
               <a:rPr lang="en-US" sz="1700" dirty="0">
                 <a:solidFill>
@@ -5381,13 +5389,12 @@
             <a:avLst/>
           </a:prstGeom>
           <a:noFill/>
-          <a:ln/>
         </p:spPr>
         <p:txBody>
           <a:bodyPr wrap="square" rtlCol="0" anchor="t"/>
           <a:lstStyle/>
           <a:p>
-            <a:pPr algn="l" indent="0" marL="0">
+            <a:pPr marL="0" indent="0" algn="l">
               <a:buNone/>
             </a:pPr>
             <a:r>
@@ -5395,9 +5402,9 @@
                 <a:solidFill>
                   <a:srgbClr val="8A9099"/>
                 </a:solidFill>
-                <a:latin typeface="微软雅黑" pitchFamily="34" charset="0"/>
-                <a:ea typeface="微软雅黑" pitchFamily="34" charset="-122"/>
-                <a:cs typeface="微软雅黑" pitchFamily="34" charset="-120"/>
+                <a:latin typeface="微软雅黑" panose="020B0503020204020204" pitchFamily="34" charset="-122"/>
+                <a:ea typeface="微软雅黑" panose="020B0503020204020204" pitchFamily="34" charset="-122"/>
+                <a:cs typeface="微软雅黑" panose="020B0503020204020204" pitchFamily="34" charset="-120"/>
               </a:rPr>
               <a:t>参考答案在本PPT最后两页，课后自行对照。下一节进入强化阶段，从链表算法开始</a:t>
             </a:r>
@@ -5413,9 +5420,9 @@
 </p:sld>
 </file>
 
-<file path=ppt/slides/slide16.xml><?xml version="1.0" encoding="utf-8"?>
+<file path=ppt/slides/slide17.xml><?xml version="1.0" encoding="utf-8"?>
 <p:sld xmlns:a="http://schemas.openxmlformats.org/drawingml/2006/main" xmlns:r="http://schemas.openxmlformats.org/officeDocument/2006/relationships" xmlns:p="http://schemas.openxmlformats.org/presentationml/2006/main">
-  <p:cSld name="Slide 16">
+  <p:cSld>
     <p:bg>
       <p:bgPr>
         <a:blipFill dpi="0" rotWithShape="1">
@@ -5459,13 +5466,12 @@
             <a:avLst/>
           </a:prstGeom>
           <a:noFill/>
-          <a:ln/>
         </p:spPr>
         <p:txBody>
           <a:bodyPr wrap="square" rtlCol="0" anchor="ctr"/>
           <a:lstStyle/>
           <a:p>
-            <a:pPr algn="r" indent="0" marL="0">
+            <a:pPr marL="0" indent="0" algn="r">
               <a:buNone/>
             </a:pPr>
             <a:r>
@@ -5473,9 +5479,9 @@
                 <a:solidFill>
                   <a:srgbClr val="8A9099"/>
                 </a:solidFill>
-                <a:latin typeface="微软雅黑" pitchFamily="34" charset="0"/>
-                <a:ea typeface="微软雅黑" pitchFamily="34" charset="-122"/>
-                <a:cs typeface="微软雅黑" pitchFamily="34" charset="-120"/>
+                <a:latin typeface="微软雅黑" panose="020B0503020204020204" pitchFamily="34" charset="-122"/>
+                <a:ea typeface="微软雅黑" panose="020B0503020204020204" pitchFamily="34" charset="-122"/>
+                <a:cs typeface="微软雅黑" panose="020B0503020204020204" pitchFamily="34" charset="-120"/>
               </a:rPr>
               <a:t>16 / 17</a:t>
             </a:r>
@@ -5498,13 +5504,12 @@
             <a:avLst/>
           </a:prstGeom>
           <a:noFill/>
-          <a:ln/>
         </p:spPr>
         <p:txBody>
           <a:bodyPr wrap="square" rtlCol="0" anchor="ctr"/>
           <a:lstStyle/>
           <a:p>
-            <a:pPr algn="l" indent="0" marL="0">
+            <a:pPr marL="0" indent="0" algn="l">
               <a:buNone/>
             </a:pPr>
             <a:r>
@@ -5512,9 +5517,9 @@
                 <a:solidFill>
                   <a:srgbClr val="1F4E9C"/>
                 </a:solidFill>
-                <a:latin typeface="微软雅黑" pitchFamily="34" charset="0"/>
-                <a:ea typeface="微软雅黑" pitchFamily="34" charset="-122"/>
-                <a:cs typeface="微软雅黑" pitchFamily="34" charset="-120"/>
+                <a:latin typeface="微软雅黑" panose="020B0503020204020204" pitchFamily="34" charset="-122"/>
+                <a:ea typeface="微软雅黑" panose="020B0503020204020204" pitchFamily="34" charset="-122"/>
+                <a:cs typeface="微软雅黑" panose="020B0503020204020204" pitchFamily="34" charset="-120"/>
               </a:rPr>
               <a:t>参考答案 · 跟练题</a:t>
             </a:r>
@@ -5537,13 +5542,12 @@
             <a:avLst/>
           </a:prstGeom>
           <a:noFill/>
-          <a:ln/>
         </p:spPr>
         <p:txBody>
           <a:bodyPr wrap="square" rtlCol="0" anchor="ctr"/>
           <a:lstStyle/>
           <a:p>
-            <a:pPr algn="l" indent="0" marL="0">
+            <a:pPr marL="0" indent="0" algn="l">
               <a:buNone/>
             </a:pPr>
             <a:r>
@@ -5551,9 +5555,9 @@
                 <a:solidFill>
                   <a:srgbClr val="1F2329"/>
                 </a:solidFill>
-                <a:latin typeface="微软雅黑" pitchFamily="34" charset="0"/>
-                <a:ea typeface="微软雅黑" pitchFamily="34" charset="-122"/>
-                <a:cs typeface="微软雅黑" pitchFamily="34" charset="-120"/>
+                <a:latin typeface="微软雅黑" panose="020B0503020204020204" pitchFamily="34" charset="-122"/>
+                <a:ea typeface="微软雅黑" panose="020B0503020204020204" pitchFamily="34" charset="-122"/>
+                <a:cs typeface="微软雅黑" panose="020B0503020204020204" pitchFamily="34" charset="-120"/>
               </a:rPr>
               <a:t>跟练题参考答案（自行对照）</a:t>
             </a:r>
@@ -5578,7 +5582,6 @@
           <a:solidFill>
             <a:srgbClr val="F7F9FC"/>
           </a:solidFill>
-          <a:ln/>
         </p:spPr>
       </p:sp>
       <p:sp>
@@ -5598,7 +5601,6 @@
           <a:solidFill>
             <a:srgbClr val="1F4E9C"/>
           </a:solidFill>
-          <a:ln/>
         </p:spPr>
       </p:sp>
       <p:sp>
@@ -5616,13 +5618,12 @@
             <a:avLst/>
           </a:prstGeom>
           <a:noFill/>
-          <a:ln/>
         </p:spPr>
         <p:txBody>
           <a:bodyPr wrap="square" rtlCol="0" anchor="t"/>
           <a:lstStyle/>
           <a:p>
-            <a:pPr algn="l" indent="0" marL="0">
+            <a:pPr marL="0" indent="0" algn="l">
               <a:lnSpc>
                 <a:spcPct val="125000"/>
               </a:lnSpc>
@@ -5633,9 +5634,9 @@
                 <a:solidFill>
                   <a:srgbClr val="1F2329"/>
                 </a:solidFill>
-                <a:latin typeface="Consolas" pitchFamily="34" charset="0"/>
-                <a:ea typeface="Consolas" pitchFamily="34" charset="-122"/>
-                <a:cs typeface="Consolas" pitchFamily="34" charset="-120"/>
+                <a:latin typeface="Consolas" panose="020B0609020204030204" pitchFamily="34" charset="0"/>
+                <a:ea typeface="Consolas" panose="020B0609020204030204" pitchFamily="34" charset="-122"/>
+                <a:cs typeface="Consolas" panose="020B0609020204030204" pitchFamily="34" charset="-120"/>
               </a:rPr>
               <a:t>void DFS(ALGraph G, int v){ visit(v); visited[v]=true;
     for(ArcNode *p=G.vertices[v].firstarc; p; p=p-&gt;nextarc)
@@ -5665,13 +5666,12 @@
             <a:avLst/>
           </a:prstGeom>
           <a:noFill/>
-          <a:ln/>
         </p:spPr>
         <p:txBody>
           <a:bodyPr wrap="square" rtlCol="0" anchor="t"/>
           <a:lstStyle/>
           <a:p>
-            <a:pPr algn="l" indent="0" marL="0">
+            <a:pPr marL="0" indent="0" algn="l">
               <a:buNone/>
             </a:pPr>
             <a:r>
@@ -5679,9 +5679,9 @@
                 <a:solidFill>
                   <a:srgbClr val="8A9099"/>
                 </a:solidFill>
-                <a:latin typeface="微软雅黑" pitchFamily="34" charset="0"/>
-                <a:ea typeface="微软雅黑" pitchFamily="34" charset="-122"/>
-                <a:cs typeface="微软雅黑" pitchFamily="34" charset="-120"/>
+                <a:latin typeface="微软雅黑" panose="020B0503020204020204" pitchFamily="34" charset="-122"/>
+                <a:ea typeface="微软雅黑" panose="020B0503020204020204" pitchFamily="34" charset="-122"/>
+                <a:cs typeface="微软雅黑" panose="020B0503020204020204" pitchFamily="34" charset="-120"/>
               </a:rPr>
               <a:t>5顶点图（边0-1、0-2、1-3、2-4、3-4）从0出发：DFS 得 0 1 3 4 2，BFS 得 0 1 2 3 4；邻接表定义与 Indegree 见本节代码合集</a:t>
             </a:r>
@@ -5697,9 +5697,9 @@
 </p:sld>
 </file>
 
-<file path=ppt/slides/slide17.xml><?xml version="1.0" encoding="utf-8"?>
+<file path=ppt/slides/slide18.xml><?xml version="1.0" encoding="utf-8"?>
 <p:sld xmlns:a="http://schemas.openxmlformats.org/drawingml/2006/main" xmlns:r="http://schemas.openxmlformats.org/officeDocument/2006/relationships" xmlns:p="http://schemas.openxmlformats.org/presentationml/2006/main">
-  <p:cSld name="Slide 17">
+  <p:cSld>
     <p:bg>
       <p:bgPr>
         <a:blipFill dpi="0" rotWithShape="1">
@@ -5743,13 +5743,12 @@
             <a:avLst/>
           </a:prstGeom>
           <a:noFill/>
-          <a:ln/>
         </p:spPr>
         <p:txBody>
           <a:bodyPr wrap="square" rtlCol="0" anchor="ctr"/>
           <a:lstStyle/>
           <a:p>
-            <a:pPr algn="r" indent="0" marL="0">
+            <a:pPr marL="0" indent="0" algn="r">
               <a:buNone/>
             </a:pPr>
             <a:r>
@@ -5757,9 +5756,9 @@
                 <a:solidFill>
                   <a:srgbClr val="8A9099"/>
                 </a:solidFill>
-                <a:latin typeface="微软雅黑" pitchFamily="34" charset="0"/>
-                <a:ea typeface="微软雅黑" pitchFamily="34" charset="-122"/>
-                <a:cs typeface="微软雅黑" pitchFamily="34" charset="-120"/>
+                <a:latin typeface="微软雅黑" panose="020B0503020204020204" pitchFamily="34" charset="-122"/>
+                <a:ea typeface="微软雅黑" panose="020B0503020204020204" pitchFamily="34" charset="-122"/>
+                <a:cs typeface="微软雅黑" panose="020B0503020204020204" pitchFamily="34" charset="-120"/>
               </a:rPr>
               <a:t>17 / 17</a:t>
             </a:r>
@@ -5782,13 +5781,12 @@
             <a:avLst/>
           </a:prstGeom>
           <a:noFill/>
-          <a:ln/>
         </p:spPr>
         <p:txBody>
           <a:bodyPr wrap="square" rtlCol="0" anchor="ctr"/>
           <a:lstStyle/>
           <a:p>
-            <a:pPr algn="l" indent="0" marL="0">
+            <a:pPr marL="0" indent="0" algn="l">
               <a:buNone/>
             </a:pPr>
             <a:r>
@@ -5796,9 +5794,9 @@
                 <a:solidFill>
                   <a:srgbClr val="1F4E9C"/>
                 </a:solidFill>
-                <a:latin typeface="微软雅黑" pitchFamily="34" charset="0"/>
-                <a:ea typeface="微软雅黑" pitchFamily="34" charset="-122"/>
-                <a:cs typeface="微软雅黑" pitchFamily="34" charset="-120"/>
+                <a:latin typeface="微软雅黑" panose="020B0503020204020204" pitchFamily="34" charset="-122"/>
+                <a:ea typeface="微软雅黑" panose="020B0503020204020204" pitchFamily="34" charset="-122"/>
+                <a:cs typeface="微软雅黑" panose="020B0503020204020204" pitchFamily="34" charset="-120"/>
               </a:rPr>
               <a:t>参考答案 · 模仿题</a:t>
             </a:r>
@@ -5821,13 +5819,12 @@
             <a:avLst/>
           </a:prstGeom>
           <a:noFill/>
-          <a:ln/>
         </p:spPr>
         <p:txBody>
           <a:bodyPr wrap="square" rtlCol="0" anchor="ctr"/>
           <a:lstStyle/>
           <a:p>
-            <a:pPr algn="l" indent="0" marL="0">
+            <a:pPr marL="0" indent="0" algn="l">
               <a:buNone/>
             </a:pPr>
             <a:r>
@@ -5835,9 +5832,9 @@
                 <a:solidFill>
                   <a:srgbClr val="1F2329"/>
                 </a:solidFill>
-                <a:latin typeface="微软雅黑" pitchFamily="34" charset="0"/>
-                <a:ea typeface="微软雅黑" pitchFamily="34" charset="-122"/>
-                <a:cs typeface="微软雅黑" pitchFamily="34" charset="-120"/>
+                <a:latin typeface="微软雅黑" panose="020B0503020204020204" pitchFamily="34" charset="-122"/>
+                <a:ea typeface="微软雅黑" panose="020B0503020204020204" pitchFamily="34" charset="-122"/>
+                <a:cs typeface="微软雅黑" panose="020B0503020204020204" pitchFamily="34" charset="-120"/>
               </a:rPr>
               <a:t>模仿题参考答案（自行对照）</a:t>
             </a:r>
@@ -5860,13 +5857,12 @@
             <a:avLst/>
           </a:prstGeom>
           <a:noFill/>
-          <a:ln/>
         </p:spPr>
         <p:txBody>
           <a:bodyPr wrap="square" rtlCol="0" anchor="t"/>
           <a:lstStyle/>
           <a:p>
-            <a:pPr algn="l" indent="0" marL="0">
+            <a:pPr marL="0" indent="0" algn="l">
               <a:lnSpc>
                 <a:spcPct val="115000"/>
               </a:lnSpc>
@@ -5877,25 +5873,68 @@
                 <a:solidFill>
                   <a:srgbClr val="1F4E9C"/>
                 </a:solidFill>
-                <a:latin typeface="微软雅黑" pitchFamily="34" charset="0"/>
-                <a:ea typeface="微软雅黑" pitchFamily="34" charset="-122"/>
-                <a:cs typeface="微软雅黑" pitchFamily="34" charset="-120"/>
+                <a:latin typeface="微软雅黑" panose="020B0503020204020204" pitchFamily="34" charset="-122"/>
+                <a:ea typeface="微软雅黑" panose="020B0503020204020204" pitchFamily="34" charset="-122"/>
+                <a:cs typeface="微软雅黑" panose="020B0503020204020204" pitchFamily="34" charset="-120"/>
               </a:rPr>
               <a:t>•  </a:t>
             </a:r>
-            <a:pPr algn="l" indent="0" marL="0">
+            <a:r>
+              <a:rPr lang="en-US" sz="1800" dirty="0">
+                <a:solidFill>
+                  <a:srgbClr val="000000"/>
+                </a:solidFill>
+              </a:rPr>
+              <a:t>判断一个序列是不是合法的 DFS/BFS：照着遍历规则模拟一遍，看能不能走出这个序列</a:t>
+            </a:r>
+            <a:endParaRPr lang="en-US" sz="1800" dirty="0"/>
+          </a:p>
+        </p:txBody>
+      </p:sp>
+      <p:sp>
+        <p:nvSpPr>
+          <p:cNvPr id="6" name="Text 4"/>
+          <p:cNvSpPr/>
+          <p:nvPr/>
+        </p:nvSpPr>
+        <p:spPr>
+          <a:xfrm>
+            <a:off x="896112" y="3209544"/>
+            <a:ext cx="10454335" cy="740664"/>
+          </a:xfrm>
+          <a:prstGeom prst="rect">
+            <a:avLst/>
+          </a:prstGeom>
+          <a:noFill/>
+        </p:spPr>
+        <p:txBody>
+          <a:bodyPr wrap="square" rtlCol="0" anchor="t"/>
+          <a:lstStyle/>
+          <a:p>
+            <a:pPr marL="0" indent="0" algn="l">
               <a:lnSpc>
                 <a:spcPct val="115000"/>
               </a:lnSpc>
               <a:buNone/>
             </a:pPr>
             <a:r>
+              <a:rPr lang="en-US" sz="1800" b="1" dirty="0">
+                <a:solidFill>
+                  <a:srgbClr val="1F4E9C"/>
+                </a:solidFill>
+                <a:latin typeface="微软雅黑" panose="020B0503020204020204" pitchFamily="34" charset="-122"/>
+                <a:ea typeface="微软雅黑" panose="020B0503020204020204" pitchFamily="34" charset="-122"/>
+                <a:cs typeface="微软雅黑" panose="020B0503020204020204" pitchFamily="34" charset="-120"/>
+              </a:rPr>
+              <a:t>•  </a:t>
+            </a:r>
+            <a:r>
               <a:rPr lang="en-US" sz="1800" dirty="0">
                 <a:solidFill>
                   <a:srgbClr val="000000"/>
                 </a:solidFill>
               </a:rPr>
-              <a:t>判断一个序列是不是合法的 DFS/BFS：照着遍历规则模拟一遍，看能不能走出这个序列</a:t>
+              <a:t>DFS 合法的关键：每一步要么走到未访问的邻居、要么回退，不能凭空跳到不相邻的未访问顶点</a:t>
             </a:r>
             <a:endParaRPr lang="en-US" sz="1800" dirty="0"/>
           </a:p>
@@ -5903,26 +5942,25 @@
       </p:sp>
       <p:sp>
         <p:nvSpPr>
-          <p:cNvPr id="6" name="Text 4"/>
-          <p:cNvSpPr/>
-          <p:nvPr/>
-        </p:nvSpPr>
-        <p:spPr>
-          <a:xfrm>
-            <a:off x="896112" y="3209544"/>
-            <a:ext cx="10454335" cy="740664"/>
-          </a:xfrm>
-          <a:prstGeom prst="rect">
-            <a:avLst/>
-          </a:prstGeom>
-          <a:noFill/>
-          <a:ln/>
+          <p:cNvPr id="7" name="Text 5"/>
+          <p:cNvSpPr/>
+          <p:nvPr/>
+        </p:nvSpPr>
+        <p:spPr>
+          <a:xfrm>
+            <a:off x="896112" y="4023360"/>
+            <a:ext cx="10454335" cy="397764"/>
+          </a:xfrm>
+          <a:prstGeom prst="rect">
+            <a:avLst/>
+          </a:prstGeom>
+          <a:noFill/>
         </p:spPr>
         <p:txBody>
           <a:bodyPr wrap="square" rtlCol="0" anchor="t"/>
           <a:lstStyle/>
           <a:p>
-            <a:pPr algn="l" indent="0" marL="0">
+            <a:pPr marL="0" indent="0" algn="l">
               <a:lnSpc>
                 <a:spcPct val="115000"/>
               </a:lnSpc>
@@ -5933,130 +5971,61 @@
                 <a:solidFill>
                   <a:srgbClr val="1F4E9C"/>
                 </a:solidFill>
-                <a:latin typeface="微软雅黑" pitchFamily="34" charset="0"/>
-                <a:ea typeface="微软雅黑" pitchFamily="34" charset="-122"/>
-                <a:cs typeface="微软雅黑" pitchFamily="34" charset="-120"/>
+                <a:latin typeface="微软雅黑" panose="020B0503020204020204" pitchFamily="34" charset="-122"/>
+                <a:ea typeface="微软雅黑" panose="020B0503020204020204" pitchFamily="34" charset="-122"/>
+                <a:cs typeface="微软雅黑" panose="020B0503020204020204" pitchFamily="34" charset="-120"/>
               </a:rPr>
               <a:t>•  </a:t>
             </a:r>
-            <a:pPr algn="l" indent="0" marL="0">
+            <a:r>
+              <a:rPr lang="en-US" sz="1800" dirty="0">
+                <a:solidFill>
+                  <a:srgbClr val="000000"/>
+                </a:solidFill>
+              </a:rPr>
+              <a:t>BFS 合法的关键：必须按层扩，先访问的顶点的邻居要先于后访问顶点的邻居出队</a:t>
+            </a:r>
+            <a:endParaRPr lang="en-US" sz="1800" dirty="0"/>
+          </a:p>
+        </p:txBody>
+      </p:sp>
+      <p:sp>
+        <p:nvSpPr>
+          <p:cNvPr id="8" name="Text 6"/>
+          <p:cNvSpPr/>
+          <p:nvPr/>
+        </p:nvSpPr>
+        <p:spPr>
+          <a:xfrm>
+            <a:off x="896112" y="4494276"/>
+            <a:ext cx="10454335" cy="397764"/>
+          </a:xfrm>
+          <a:prstGeom prst="rect">
+            <a:avLst/>
+          </a:prstGeom>
+          <a:noFill/>
+        </p:spPr>
+        <p:txBody>
+          <a:bodyPr wrap="square" rtlCol="0" anchor="t"/>
+          <a:lstStyle/>
+          <a:p>
+            <a:pPr marL="0" indent="0" algn="l">
               <a:lnSpc>
                 <a:spcPct val="115000"/>
               </a:lnSpc>
               <a:buNone/>
             </a:pPr>
             <a:r>
-              <a:rPr lang="en-US" sz="1800" dirty="0">
-                <a:solidFill>
-                  <a:srgbClr val="000000"/>
-                </a:solidFill>
-              </a:rPr>
-              <a:t>DFS 合法的关键：每一步要么走到未访问的邻居、要么回退，不能凭空跳到不相邻的未访问顶点</a:t>
-            </a:r>
-            <a:endParaRPr lang="en-US" sz="1800" dirty="0"/>
-          </a:p>
-        </p:txBody>
-      </p:sp>
-      <p:sp>
-        <p:nvSpPr>
-          <p:cNvPr id="7" name="Text 5"/>
-          <p:cNvSpPr/>
-          <p:nvPr/>
-        </p:nvSpPr>
-        <p:spPr>
-          <a:xfrm>
-            <a:off x="896112" y="4023360"/>
-            <a:ext cx="10454335" cy="397764"/>
-          </a:xfrm>
-          <a:prstGeom prst="rect">
-            <a:avLst/>
-          </a:prstGeom>
-          <a:noFill/>
-          <a:ln/>
-        </p:spPr>
-        <p:txBody>
-          <a:bodyPr wrap="square" rtlCol="0" anchor="t"/>
-          <a:lstStyle/>
-          <a:p>
-            <a:pPr algn="l" indent="0" marL="0">
-              <a:lnSpc>
-                <a:spcPct val="115000"/>
-              </a:lnSpc>
-              <a:buNone/>
-            </a:pPr>
-            <a:r>
               <a:rPr lang="en-US" sz="1800" b="1" dirty="0">
                 <a:solidFill>
                   <a:srgbClr val="1F4E9C"/>
                 </a:solidFill>
-                <a:latin typeface="微软雅黑" pitchFamily="34" charset="0"/>
-                <a:ea typeface="微软雅黑" pitchFamily="34" charset="-122"/>
-                <a:cs typeface="微软雅黑" pitchFamily="34" charset="-120"/>
+                <a:latin typeface="微软雅黑" panose="020B0503020204020204" pitchFamily="34" charset="-122"/>
+                <a:ea typeface="微软雅黑" panose="020B0503020204020204" pitchFamily="34" charset="-122"/>
+                <a:cs typeface="微软雅黑" panose="020B0503020204020204" pitchFamily="34" charset="-120"/>
               </a:rPr>
               <a:t>•  </a:t>
             </a:r>
-            <a:pPr algn="l" indent="0" marL="0">
-              <a:lnSpc>
-                <a:spcPct val="115000"/>
-              </a:lnSpc>
-              <a:buNone/>
-            </a:pPr>
-            <a:r>
-              <a:rPr lang="en-US" sz="1800" dirty="0">
-                <a:solidFill>
-                  <a:srgbClr val="000000"/>
-                </a:solidFill>
-              </a:rPr>
-              <a:t>BFS 合法的关键：必须按层扩，先访问的顶点的邻居要先于后访问顶点的邻居出队</a:t>
-            </a:r>
-            <a:endParaRPr lang="en-US" sz="1800" dirty="0"/>
-          </a:p>
-        </p:txBody>
-      </p:sp>
-      <p:sp>
-        <p:nvSpPr>
-          <p:cNvPr id="8" name="Text 6"/>
-          <p:cNvSpPr/>
-          <p:nvPr/>
-        </p:nvSpPr>
-        <p:spPr>
-          <a:xfrm>
-            <a:off x="896112" y="4494276"/>
-            <a:ext cx="10454335" cy="397764"/>
-          </a:xfrm>
-          <a:prstGeom prst="rect">
-            <a:avLst/>
-          </a:prstGeom>
-          <a:noFill/>
-          <a:ln/>
-        </p:spPr>
-        <p:txBody>
-          <a:bodyPr wrap="square" rtlCol="0" anchor="t"/>
-          <a:lstStyle/>
-          <a:p>
-            <a:pPr algn="l" indent="0" marL="0">
-              <a:lnSpc>
-                <a:spcPct val="115000"/>
-              </a:lnSpc>
-              <a:buNone/>
-            </a:pPr>
-            <a:r>
-              <a:rPr lang="en-US" sz="1800" b="1" dirty="0">
-                <a:solidFill>
-                  <a:srgbClr val="1F4E9C"/>
-                </a:solidFill>
-                <a:latin typeface="微软雅黑" pitchFamily="34" charset="0"/>
-                <a:ea typeface="微软雅黑" pitchFamily="34" charset="-122"/>
-                <a:cs typeface="微软雅黑" pitchFamily="34" charset="-120"/>
-              </a:rPr>
-              <a:t>•  </a:t>
-            </a:r>
-            <a:pPr algn="l" indent="0" marL="0">
-              <a:lnSpc>
-                <a:spcPct val="115000"/>
-              </a:lnSpc>
-              <a:buNone/>
-            </a:pPr>
             <a:r>
               <a:rPr lang="en-US" sz="1800" dirty="0">
                 <a:solidFill>
@@ -6084,13 +6053,12 @@
             <a:avLst/>
           </a:prstGeom>
           <a:noFill/>
-          <a:ln/>
         </p:spPr>
         <p:txBody>
           <a:bodyPr wrap="square" rtlCol="0" anchor="t"/>
           <a:lstStyle/>
           <a:p>
-            <a:pPr algn="l" indent="0" marL="0">
+            <a:pPr marL="0" indent="0" algn="l">
               <a:buNone/>
             </a:pPr>
             <a:r>
@@ -6098,9 +6066,9 @@
                 <a:solidFill>
                   <a:srgbClr val="8A9099"/>
                 </a:solidFill>
-                <a:latin typeface="微软雅黑" pitchFamily="34" charset="0"/>
-                <a:ea typeface="微软雅黑" pitchFamily="34" charset="-122"/>
-                <a:cs typeface="微软雅黑" pitchFamily="34" charset="-120"/>
+                <a:latin typeface="微软雅黑" panose="020B0503020204020204" pitchFamily="34" charset="-122"/>
+                <a:ea typeface="微软雅黑" panose="020B0503020204020204" pitchFamily="34" charset="-122"/>
+                <a:cs typeface="微软雅黑" panose="020B0503020204020204" pitchFamily="34" charset="-120"/>
               </a:rPr>
               <a:t>题集勾画 7选21、7选22 就是这个考法；你拿遍历规则去卡每个选项，模拟一遍就能判断</a:t>
             </a:r>
@@ -6118,7 +6086,7 @@
 
 <file path=ppt/slides/slide2.xml><?xml version="1.0" encoding="utf-8"?>
 <p:sld xmlns:a="http://schemas.openxmlformats.org/drawingml/2006/main" xmlns:r="http://schemas.openxmlformats.org/officeDocument/2006/relationships" xmlns:p="http://schemas.openxmlformats.org/presentationml/2006/main">
-  <p:cSld name="Slide 2">
+  <p:cSld>
     <p:bg>
       <p:bgPr>
         <a:blipFill dpi="0" rotWithShape="1">
@@ -6162,13 +6130,12 @@
             <a:avLst/>
           </a:prstGeom>
           <a:noFill/>
-          <a:ln/>
         </p:spPr>
         <p:txBody>
           <a:bodyPr wrap="square" rtlCol="0" anchor="ctr"/>
           <a:lstStyle/>
           <a:p>
-            <a:pPr algn="r" indent="0" marL="0">
+            <a:pPr marL="0" indent="0" algn="r">
               <a:buNone/>
             </a:pPr>
             <a:r>
@@ -6176,9 +6143,9 @@
                 <a:solidFill>
                   <a:srgbClr val="8A9099"/>
                 </a:solidFill>
-                <a:latin typeface="微软雅黑" pitchFamily="34" charset="0"/>
-                <a:ea typeface="微软雅黑" pitchFamily="34" charset="-122"/>
-                <a:cs typeface="微软雅黑" pitchFamily="34" charset="-120"/>
+                <a:latin typeface="微软雅黑" panose="020B0503020204020204" pitchFamily="34" charset="-122"/>
+                <a:ea typeface="微软雅黑" panose="020B0503020204020204" pitchFamily="34" charset="-122"/>
+                <a:cs typeface="微软雅黑" panose="020B0503020204020204" pitchFamily="34" charset="-120"/>
               </a:rPr>
               <a:t>2 / 17</a:t>
             </a:r>
@@ -6201,13 +6168,12 @@
             <a:avLst/>
           </a:prstGeom>
           <a:noFill/>
-          <a:ln/>
         </p:spPr>
         <p:txBody>
           <a:bodyPr wrap="square" rtlCol="0" anchor="ctr"/>
           <a:lstStyle/>
           <a:p>
-            <a:pPr algn="l" indent="0" marL="0">
+            <a:pPr marL="0" indent="0" algn="l">
               <a:buNone/>
             </a:pPr>
             <a:r>
@@ -6215,9 +6181,9 @@
                 <a:solidFill>
                   <a:srgbClr val="1F4E9C"/>
                 </a:solidFill>
-                <a:latin typeface="微软雅黑" pitchFamily="34" charset="0"/>
-                <a:ea typeface="微软雅黑" pitchFamily="34" charset="-122"/>
-                <a:cs typeface="微软雅黑" pitchFamily="34" charset="-120"/>
+                <a:latin typeface="微软雅黑" panose="020B0503020204020204" pitchFamily="34" charset="-122"/>
+                <a:ea typeface="微软雅黑" panose="020B0503020204020204" pitchFamily="34" charset="-122"/>
+                <a:cs typeface="微软雅黑" panose="020B0503020204020204" pitchFamily="34" charset="-120"/>
               </a:rPr>
               <a:t>引题</a:t>
             </a:r>
@@ -6240,13 +6206,12 @@
             <a:avLst/>
           </a:prstGeom>
           <a:noFill/>
-          <a:ln/>
         </p:spPr>
         <p:txBody>
           <a:bodyPr wrap="square" rtlCol="0" anchor="ctr"/>
           <a:lstStyle/>
           <a:p>
-            <a:pPr algn="l" indent="0" marL="0">
+            <a:pPr marL="0" indent="0" algn="l">
               <a:buNone/>
             </a:pPr>
             <a:r>
@@ -6254,9 +6219,9 @@
                 <a:solidFill>
                   <a:srgbClr val="1F2329"/>
                 </a:solidFill>
-                <a:latin typeface="微软雅黑" pitchFamily="34" charset="0"/>
-                <a:ea typeface="微软雅黑" pitchFamily="34" charset="-122"/>
-                <a:cs typeface="微软雅黑" pitchFamily="34" charset="-120"/>
+                <a:latin typeface="微软雅黑" panose="020B0503020204020204" pitchFamily="34" charset="-122"/>
+                <a:ea typeface="微软雅黑" panose="020B0503020204020204" pitchFamily="34" charset="-122"/>
+                <a:cs typeface="微软雅黑" panose="020B0503020204020204" pitchFamily="34" charset="-120"/>
               </a:rPr>
               <a:t>一张图，两种存法，各存了什么</a:t>
             </a:r>
@@ -6279,13 +6244,12 @@
             <a:avLst/>
           </a:prstGeom>
           <a:noFill/>
-          <a:ln/>
         </p:spPr>
         <p:txBody>
           <a:bodyPr wrap="square" rtlCol="0" anchor="t"/>
           <a:lstStyle/>
           <a:p>
-            <a:pPr algn="l" indent="0" marL="0">
+            <a:pPr marL="0" indent="0" algn="l">
               <a:lnSpc>
                 <a:spcPct val="115000"/>
               </a:lnSpc>
@@ -6296,25 +6260,68 @@
                 <a:solidFill>
                   <a:srgbClr val="1F4E9C"/>
                 </a:solidFill>
-                <a:latin typeface="微软雅黑" pitchFamily="34" charset="0"/>
-                <a:ea typeface="微软雅黑" pitchFamily="34" charset="-122"/>
-                <a:cs typeface="微软雅黑" pitchFamily="34" charset="-120"/>
+                <a:latin typeface="微软雅黑" panose="020B0503020204020204" pitchFamily="34" charset="-122"/>
+                <a:ea typeface="微软雅黑" panose="020B0503020204020204" pitchFamily="34" charset="-122"/>
+                <a:cs typeface="微软雅黑" panose="020B0503020204020204" pitchFamily="34" charset="-120"/>
               </a:rPr>
               <a:t>•  </a:t>
             </a:r>
-            <a:pPr algn="l" indent="0" marL="0">
+            <a:r>
+              <a:rPr lang="en-US" sz="1800" dirty="0">
+                <a:solidFill>
+                  <a:srgbClr val="000000"/>
+                </a:solidFill>
+              </a:rPr>
+              <a:t>图比树复杂：结点（叫顶点）之间的关系任意，可以有环、可以多对多，不像树那样一层一层</a:t>
+            </a:r>
+            <a:endParaRPr lang="en-US" sz="1800" dirty="0"/>
+          </a:p>
+        </p:txBody>
+      </p:sp>
+      <p:sp>
+        <p:nvSpPr>
+          <p:cNvPr id="6" name="Text 4"/>
+          <p:cNvSpPr/>
+          <p:nvPr/>
+        </p:nvSpPr>
+        <p:spPr>
+          <a:xfrm>
+            <a:off x="896112" y="2866644"/>
+            <a:ext cx="10454335" cy="740664"/>
+          </a:xfrm>
+          <a:prstGeom prst="rect">
+            <a:avLst/>
+          </a:prstGeom>
+          <a:noFill/>
+        </p:spPr>
+        <p:txBody>
+          <a:bodyPr wrap="square" rtlCol="0" anchor="t"/>
+          <a:lstStyle/>
+          <a:p>
+            <a:pPr marL="0" indent="0" algn="l">
               <a:lnSpc>
                 <a:spcPct val="115000"/>
               </a:lnSpc>
               <a:buNone/>
             </a:pPr>
             <a:r>
+              <a:rPr lang="en-US" sz="1800" b="1" dirty="0">
+                <a:solidFill>
+                  <a:srgbClr val="1F4E9C"/>
+                </a:solidFill>
+                <a:latin typeface="微软雅黑" panose="020B0503020204020204" pitchFamily="34" charset="-122"/>
+                <a:ea typeface="微软雅黑" panose="020B0503020204020204" pitchFamily="34" charset="-122"/>
+                <a:cs typeface="微软雅黑" panose="020B0503020204020204" pitchFamily="34" charset="-120"/>
+              </a:rPr>
+              <a:t>•  </a:t>
+            </a:r>
+            <a:r>
               <a:rPr lang="en-US" sz="1800" dirty="0">
                 <a:solidFill>
                   <a:srgbClr val="000000"/>
                 </a:solidFill>
               </a:rPr>
-              <a:t>图比树复杂：结点（叫顶点）之间的关系任意，可以有环、可以多对多，不像树那样一层一层</a:t>
+              <a:t>存图有两种主流办法：邻接矩阵用一个二维数组记'谁和谁之间有边'，邻接表用顶点表加边表记'每个顶点连向谁'</a:t>
             </a:r>
             <a:endParaRPr lang="en-US" sz="1800" dirty="0"/>
           </a:p>
@@ -6322,26 +6329,25 @@
       </p:sp>
       <p:sp>
         <p:nvSpPr>
-          <p:cNvPr id="6" name="Text 4"/>
-          <p:cNvSpPr/>
-          <p:nvPr/>
-        </p:nvSpPr>
-        <p:spPr>
-          <a:xfrm>
-            <a:off x="896112" y="2866644"/>
+          <p:cNvPr id="7" name="Text 5"/>
+          <p:cNvSpPr/>
+          <p:nvPr/>
+        </p:nvSpPr>
+        <p:spPr>
+          <a:xfrm>
+            <a:off x="896112" y="3680460"/>
             <a:ext cx="10454335" cy="740664"/>
           </a:xfrm>
           <a:prstGeom prst="rect">
             <a:avLst/>
           </a:prstGeom>
           <a:noFill/>
-          <a:ln/>
         </p:spPr>
         <p:txBody>
           <a:bodyPr wrap="square" rtlCol="0" anchor="t"/>
           <a:lstStyle/>
           <a:p>
-            <a:pPr algn="l" indent="0" marL="0">
+            <a:pPr marL="0" indent="0" algn="l">
               <a:lnSpc>
                 <a:spcPct val="115000"/>
               </a:lnSpc>
@@ -6352,74 +6358,12 @@
                 <a:solidFill>
                   <a:srgbClr val="1F4E9C"/>
                 </a:solidFill>
-                <a:latin typeface="微软雅黑" pitchFamily="34" charset="0"/>
-                <a:ea typeface="微软雅黑" pitchFamily="34" charset="-122"/>
-                <a:cs typeface="微软雅黑" pitchFamily="34" charset="-120"/>
+                <a:latin typeface="微软雅黑" panose="020B0503020204020204" pitchFamily="34" charset="-122"/>
+                <a:ea typeface="微软雅黑" panose="020B0503020204020204" pitchFamily="34" charset="-122"/>
+                <a:cs typeface="微软雅黑" panose="020B0503020204020204" pitchFamily="34" charset="-120"/>
               </a:rPr>
               <a:t>•  </a:t>
             </a:r>
-            <a:pPr algn="l" indent="0" marL="0">
-              <a:lnSpc>
-                <a:spcPct val="115000"/>
-              </a:lnSpc>
-              <a:buNone/>
-            </a:pPr>
-            <a:r>
-              <a:rPr lang="en-US" sz="1800" dirty="0">
-                <a:solidFill>
-                  <a:srgbClr val="000000"/>
-                </a:solidFill>
-              </a:rPr>
-              <a:t>存图有两种主流办法：邻接矩阵用一个二维数组记'谁和谁之间有边'，邻接表用顶点表加边表记'每个顶点连向谁'</a:t>
-            </a:r>
-            <a:endParaRPr lang="en-US" sz="1800" dirty="0"/>
-          </a:p>
-        </p:txBody>
-      </p:sp>
-      <p:sp>
-        <p:nvSpPr>
-          <p:cNvPr id="7" name="Text 5"/>
-          <p:cNvSpPr/>
-          <p:nvPr/>
-        </p:nvSpPr>
-        <p:spPr>
-          <a:xfrm>
-            <a:off x="896112" y="3680460"/>
-            <a:ext cx="10454335" cy="740664"/>
-          </a:xfrm>
-          <a:prstGeom prst="rect">
-            <a:avLst/>
-          </a:prstGeom>
-          <a:noFill/>
-          <a:ln/>
-        </p:spPr>
-        <p:txBody>
-          <a:bodyPr wrap="square" rtlCol="0" anchor="t"/>
-          <a:lstStyle/>
-          <a:p>
-            <a:pPr algn="l" indent="0" marL="0">
-              <a:lnSpc>
-                <a:spcPct val="115000"/>
-              </a:lnSpc>
-              <a:buNone/>
-            </a:pPr>
-            <a:r>
-              <a:rPr lang="en-US" sz="1800" b="1" dirty="0">
-                <a:solidFill>
-                  <a:srgbClr val="1F4E9C"/>
-                </a:solidFill>
-                <a:latin typeface="微软雅黑" pitchFamily="34" charset="0"/>
-                <a:ea typeface="微软雅黑" pitchFamily="34" charset="-122"/>
-                <a:cs typeface="微软雅黑" pitchFamily="34" charset="-120"/>
-              </a:rPr>
-              <a:t>•  </a:t>
-            </a:r>
-            <a:pPr algn="l" indent="0" marL="0">
-              <a:lnSpc>
-                <a:spcPct val="115000"/>
-              </a:lnSpc>
-              <a:buNone/>
-            </a:pPr>
             <a:r>
               <a:rPr lang="en-US" sz="1800" dirty="0">
                 <a:solidFill>
@@ -6447,13 +6391,12 @@
             <a:avLst/>
           </a:prstGeom>
           <a:noFill/>
-          <a:ln/>
         </p:spPr>
         <p:txBody>
           <a:bodyPr wrap="square" rtlCol="0" anchor="t"/>
           <a:lstStyle/>
           <a:p>
-            <a:pPr algn="l" indent="0" marL="0">
+            <a:pPr marL="0" indent="0" algn="l">
               <a:buNone/>
             </a:pPr>
             <a:r>
@@ -6461,9 +6404,9 @@
                 <a:solidFill>
                   <a:srgbClr val="8A9099"/>
                 </a:solidFill>
-                <a:latin typeface="微软雅黑" pitchFamily="34" charset="0"/>
-                <a:ea typeface="微软雅黑" pitchFamily="34" charset="-122"/>
-                <a:cs typeface="微软雅黑" pitchFamily="34" charset="-120"/>
+                <a:latin typeface="微软雅黑" panose="020B0503020204020204" pitchFamily="34" charset="-122"/>
+                <a:ea typeface="微软雅黑" panose="020B0503020204020204" pitchFamily="34" charset="-122"/>
+                <a:cs typeface="微软雅黑" panose="020B0503020204020204" pitchFamily="34" charset="-120"/>
               </a:rPr>
               <a:t>图是 802 三大重点章之一，2020—2026 考了 5 道大题；这一节的两种存储和两种遍历，是后面所有图算法的前提</a:t>
             </a:r>
@@ -6481,7 +6424,7 @@
 
 <file path=ppt/slides/slide3.xml><?xml version="1.0" encoding="utf-8"?>
 <p:sld xmlns:a="http://schemas.openxmlformats.org/drawingml/2006/main" xmlns:r="http://schemas.openxmlformats.org/officeDocument/2006/relationships" xmlns:p="http://schemas.openxmlformats.org/presentationml/2006/main">
-  <p:cSld name="Slide 3">
+  <p:cSld>
     <p:bg>
       <p:bgPr>
         <a:blipFill dpi="0" rotWithShape="1">
@@ -6525,13 +6468,12 @@
             <a:avLst/>
           </a:prstGeom>
           <a:noFill/>
-          <a:ln/>
         </p:spPr>
         <p:txBody>
           <a:bodyPr wrap="square" rtlCol="0" anchor="ctr"/>
           <a:lstStyle/>
           <a:p>
-            <a:pPr algn="r" indent="0" marL="0">
+            <a:pPr marL="0" indent="0" algn="r">
               <a:buNone/>
             </a:pPr>
             <a:r>
@@ -6539,9 +6481,9 @@
                 <a:solidFill>
                   <a:srgbClr val="8A9099"/>
                 </a:solidFill>
-                <a:latin typeface="微软雅黑" pitchFamily="34" charset="0"/>
-                <a:ea typeface="微软雅黑" pitchFamily="34" charset="-122"/>
-                <a:cs typeface="微软雅黑" pitchFamily="34" charset="-120"/>
+                <a:latin typeface="微软雅黑" panose="020B0503020204020204" pitchFamily="34" charset="-122"/>
+                <a:ea typeface="微软雅黑" panose="020B0503020204020204" pitchFamily="34" charset="-122"/>
+                <a:cs typeface="微软雅黑" panose="020B0503020204020204" pitchFamily="34" charset="-120"/>
               </a:rPr>
               <a:t>3 / 17</a:t>
             </a:r>
@@ -6564,13 +6506,12 @@
             <a:avLst/>
           </a:prstGeom>
           <a:noFill/>
-          <a:ln/>
         </p:spPr>
         <p:txBody>
           <a:bodyPr wrap="square" rtlCol="0" anchor="ctr"/>
           <a:lstStyle/>
           <a:p>
-            <a:pPr algn="l" indent="0" marL="0">
+            <a:pPr marL="0" indent="0" algn="l">
               <a:buNone/>
             </a:pPr>
             <a:r>
@@ -6578,9 +6519,9 @@
                 <a:solidFill>
                   <a:srgbClr val="1F4E9C"/>
                 </a:solidFill>
-                <a:latin typeface="微软雅黑" pitchFamily="34" charset="0"/>
-                <a:ea typeface="微软雅黑" pitchFamily="34" charset="-122"/>
-                <a:cs typeface="微软雅黑" pitchFamily="34" charset="-120"/>
+                <a:latin typeface="微软雅黑" panose="020B0503020204020204" pitchFamily="34" charset="-122"/>
+                <a:ea typeface="微软雅黑" panose="020B0503020204020204" pitchFamily="34" charset="-122"/>
+                <a:cs typeface="微软雅黑" panose="020B0503020204020204" pitchFamily="34" charset="-120"/>
               </a:rPr>
               <a:t>存储 · 邻接矩阵</a:t>
             </a:r>
@@ -6603,13 +6544,12 @@
             <a:avLst/>
           </a:prstGeom>
           <a:noFill/>
-          <a:ln/>
         </p:spPr>
         <p:txBody>
           <a:bodyPr wrap="square" rtlCol="0" anchor="ctr"/>
           <a:lstStyle/>
           <a:p>
-            <a:pPr algn="l" indent="0" marL="0">
+            <a:pPr marL="0" indent="0" algn="l">
               <a:buNone/>
             </a:pPr>
             <a:r>
@@ -6617,9 +6557,9 @@
                 <a:solidFill>
                   <a:srgbClr val="1F2329"/>
                 </a:solidFill>
-                <a:latin typeface="微软雅黑" pitchFamily="34" charset="0"/>
-                <a:ea typeface="微软雅黑" pitchFamily="34" charset="-122"/>
-                <a:cs typeface="微软雅黑" pitchFamily="34" charset="-120"/>
+                <a:latin typeface="微软雅黑" panose="020B0503020204020204" pitchFamily="34" charset="-122"/>
+                <a:ea typeface="微软雅黑" panose="020B0503020204020204" pitchFamily="34" charset="-122"/>
+                <a:cs typeface="微软雅黑" panose="020B0503020204020204" pitchFamily="34" charset="-120"/>
               </a:rPr>
               <a:t>邻接矩阵：一个二维数组记边</a:t>
             </a:r>
@@ -6644,7 +6584,6 @@
           <a:solidFill>
             <a:srgbClr val="F7F9FC"/>
           </a:solidFill>
-          <a:ln/>
         </p:spPr>
       </p:sp>
       <p:sp>
@@ -6664,7 +6603,6 @@
           <a:solidFill>
             <a:srgbClr val="1F4E9C"/>
           </a:solidFill>
-          <a:ln/>
         </p:spPr>
       </p:sp>
       <p:sp>
@@ -6682,13 +6620,12 @@
             <a:avLst/>
           </a:prstGeom>
           <a:noFill/>
-          <a:ln/>
         </p:spPr>
         <p:txBody>
           <a:bodyPr wrap="square" rtlCol="0" anchor="t"/>
           <a:lstStyle/>
           <a:p>
-            <a:pPr algn="l" indent="0" marL="0">
+            <a:pPr marL="0" indent="0" algn="l">
               <a:lnSpc>
                 <a:spcPct val="125000"/>
               </a:lnSpc>
@@ -6699,9 +6636,9 @@
                 <a:solidFill>
                   <a:srgbClr val="1F2329"/>
                 </a:solidFill>
-                <a:latin typeface="Consolas" pitchFamily="34" charset="0"/>
-                <a:ea typeface="Consolas" pitchFamily="34" charset="-122"/>
-                <a:cs typeface="Consolas" pitchFamily="34" charset="-120"/>
+                <a:latin typeface="Consolas" panose="020B0609020204030204" pitchFamily="34" charset="0"/>
+                <a:ea typeface="Consolas" panose="020B0609020204030204" pitchFamily="34" charset="-122"/>
+                <a:cs typeface="Consolas" panose="020B0609020204030204" pitchFamily="34" charset="-120"/>
               </a:rPr>
               <a:t>#define MaxVertexNum 100
 typedef struct{
@@ -6731,13 +6668,12 @@
             <a:avLst/>
           </a:prstGeom>
           <a:noFill/>
-          <a:ln/>
         </p:spPr>
         <p:txBody>
           <a:bodyPr wrap="square" rtlCol="0" anchor="t"/>
           <a:lstStyle/>
           <a:p>
-            <a:pPr algn="l" indent="0" marL="0">
+            <a:pPr marL="0" indent="0" algn="l">
               <a:lnSpc>
                 <a:spcPct val="115000"/>
               </a:lnSpc>
@@ -6748,25 +6684,68 @@
                 <a:solidFill>
                   <a:srgbClr val="1F4E9C"/>
                 </a:solidFill>
-                <a:latin typeface="微软雅黑" pitchFamily="34" charset="0"/>
-                <a:ea typeface="微软雅黑" pitchFamily="34" charset="-122"/>
-                <a:cs typeface="微软雅黑" pitchFamily="34" charset="-120"/>
+                <a:latin typeface="微软雅黑" panose="020B0503020204020204" pitchFamily="34" charset="-122"/>
+                <a:ea typeface="微软雅黑" panose="020B0503020204020204" pitchFamily="34" charset="-122"/>
+                <a:cs typeface="微软雅黑" panose="020B0503020204020204" pitchFamily="34" charset="-120"/>
               </a:rPr>
               <a:t>•  </a:t>
             </a:r>
-            <a:pPr algn="l" indent="0" marL="0">
+            <a:r>
+              <a:rPr lang="en-US" sz="1500" dirty="0">
+                <a:solidFill>
+                  <a:srgbClr val="000000"/>
+                </a:solidFill>
+              </a:rPr>
+              <a:t>edge[i][j]=1 表示顶点 i 到 j 有边；无向图的矩阵对称，因为 i-j 和 j-i 是同一条边</a:t>
+            </a:r>
+            <a:endParaRPr lang="en-US" sz="1500" dirty="0"/>
+          </a:p>
+        </p:txBody>
+      </p:sp>
+      <p:sp>
+        <p:nvSpPr>
+          <p:cNvPr id="9" name="Text 7"/>
+          <p:cNvSpPr/>
+          <p:nvPr/>
+        </p:nvSpPr>
+        <p:spPr>
+          <a:xfrm>
+            <a:off x="896112" y="5155838"/>
+            <a:ext cx="10454335" cy="626364"/>
+          </a:xfrm>
+          <a:prstGeom prst="rect">
+            <a:avLst/>
+          </a:prstGeom>
+          <a:noFill/>
+        </p:spPr>
+        <p:txBody>
+          <a:bodyPr wrap="square" rtlCol="0" anchor="t"/>
+          <a:lstStyle/>
+          <a:p>
+            <a:pPr marL="0" indent="0" algn="l">
               <a:lnSpc>
                 <a:spcPct val="115000"/>
               </a:lnSpc>
               <a:buNone/>
             </a:pPr>
             <a:r>
+              <a:rPr lang="en-US" sz="1500" b="1" dirty="0">
+                <a:solidFill>
+                  <a:srgbClr val="1F4E9C"/>
+                </a:solidFill>
+                <a:latin typeface="微软雅黑" panose="020B0503020204020204" pitchFamily="34" charset="-122"/>
+                <a:ea typeface="微软雅黑" panose="020B0503020204020204" pitchFamily="34" charset="-122"/>
+                <a:cs typeface="微软雅黑" panose="020B0503020204020204" pitchFamily="34" charset="-120"/>
+              </a:rPr>
+              <a:t>•  </a:t>
+            </a:r>
+            <a:r>
               <a:rPr lang="en-US" sz="1500" dirty="0">
                 <a:solidFill>
                   <a:srgbClr val="000000"/>
                 </a:solidFill>
               </a:rPr>
-              <a:t>edge[i][j]=1 表示顶点 i 到 j 有边；无向图的矩阵对称，因为 i-j 和 j-i 是同一条边</a:t>
+              <a:t>有向图不对称，edge[i][j] 表示从 i 指向 j 的弧；带权图把 1 换成权值，不可达的位置存 INF（一个很大的数）</a:t>
             </a:r>
             <a:endParaRPr lang="en-US" sz="1500" dirty="0"/>
           </a:p>
@@ -6774,26 +6753,25 @@
       </p:sp>
       <p:sp>
         <p:nvSpPr>
-          <p:cNvPr id="9" name="Text 7"/>
-          <p:cNvSpPr/>
-          <p:nvPr/>
-        </p:nvSpPr>
-        <p:spPr>
-          <a:xfrm>
-            <a:off x="896112" y="5155838"/>
-            <a:ext cx="10454335" cy="626364"/>
-          </a:xfrm>
-          <a:prstGeom prst="rect">
-            <a:avLst/>
-          </a:prstGeom>
-          <a:noFill/>
-          <a:ln/>
+          <p:cNvPr id="10" name="Text 8"/>
+          <p:cNvSpPr/>
+          <p:nvPr/>
+        </p:nvSpPr>
+        <p:spPr>
+          <a:xfrm>
+            <a:off x="896112" y="5855354"/>
+            <a:ext cx="10454335" cy="340614"/>
+          </a:xfrm>
+          <a:prstGeom prst="rect">
+            <a:avLst/>
+          </a:prstGeom>
+          <a:noFill/>
         </p:spPr>
         <p:txBody>
           <a:bodyPr wrap="square" rtlCol="0" anchor="t"/>
           <a:lstStyle/>
           <a:p>
-            <a:pPr algn="l" indent="0" marL="0">
+            <a:pPr marL="0" indent="0" algn="l">
               <a:lnSpc>
                 <a:spcPct val="115000"/>
               </a:lnSpc>
@@ -6804,74 +6782,12 @@
                 <a:solidFill>
                   <a:srgbClr val="1F4E9C"/>
                 </a:solidFill>
-                <a:latin typeface="微软雅黑" pitchFamily="34" charset="0"/>
-                <a:ea typeface="微软雅黑" pitchFamily="34" charset="-122"/>
-                <a:cs typeface="微软雅黑" pitchFamily="34" charset="-120"/>
+                <a:latin typeface="微软雅黑" panose="020B0503020204020204" pitchFamily="34" charset="-122"/>
+                <a:ea typeface="微软雅黑" panose="020B0503020204020204" pitchFamily="34" charset="-122"/>
+                <a:cs typeface="微软雅黑" panose="020B0503020204020204" pitchFamily="34" charset="-120"/>
               </a:rPr>
               <a:t>•  </a:t>
             </a:r>
-            <a:pPr algn="l" indent="0" marL="0">
-              <a:lnSpc>
-                <a:spcPct val="115000"/>
-              </a:lnSpc>
-              <a:buNone/>
-            </a:pPr>
-            <a:r>
-              <a:rPr lang="en-US" sz="1500" dirty="0">
-                <a:solidFill>
-                  <a:srgbClr val="000000"/>
-                </a:solidFill>
-              </a:rPr>
-              <a:t>有向图不对称，edge[i][j] 表示从 i 指向 j 的弧；带权图把 1 换成权值，不可达的位置存 INF（一个很大的数）</a:t>
-            </a:r>
-            <a:endParaRPr lang="en-US" sz="1500" dirty="0"/>
-          </a:p>
-        </p:txBody>
-      </p:sp>
-      <p:sp>
-        <p:nvSpPr>
-          <p:cNvPr id="10" name="Text 8"/>
-          <p:cNvSpPr/>
-          <p:nvPr/>
-        </p:nvSpPr>
-        <p:spPr>
-          <a:xfrm>
-            <a:off x="896112" y="5855354"/>
-            <a:ext cx="10454335" cy="340614"/>
-          </a:xfrm>
-          <a:prstGeom prst="rect">
-            <a:avLst/>
-          </a:prstGeom>
-          <a:noFill/>
-          <a:ln/>
-        </p:spPr>
-        <p:txBody>
-          <a:bodyPr wrap="square" rtlCol="0" anchor="t"/>
-          <a:lstStyle/>
-          <a:p>
-            <a:pPr algn="l" indent="0" marL="0">
-              <a:lnSpc>
-                <a:spcPct val="115000"/>
-              </a:lnSpc>
-              <a:buNone/>
-            </a:pPr>
-            <a:r>
-              <a:rPr lang="en-US" sz="1500" b="1" dirty="0">
-                <a:solidFill>
-                  <a:srgbClr val="1F4E9C"/>
-                </a:solidFill>
-                <a:latin typeface="微软雅黑" pitchFamily="34" charset="0"/>
-                <a:ea typeface="微软雅黑" pitchFamily="34" charset="-122"/>
-                <a:cs typeface="微软雅黑" pitchFamily="34" charset="-120"/>
-              </a:rPr>
-              <a:t>•  </a:t>
-            </a:r>
-            <a:pPr algn="l" indent="0" marL="0">
-              <a:lnSpc>
-                <a:spcPct val="115000"/>
-              </a:lnSpc>
-              <a:buNone/>
-            </a:pPr>
             <a:r>
               <a:rPr lang="en-US" sz="1500" dirty="0">
                 <a:solidFill>
@@ -6894,7 +6810,7 @@
 
 <file path=ppt/slides/slide4.xml><?xml version="1.0" encoding="utf-8"?>
 <p:sld xmlns:a="http://schemas.openxmlformats.org/drawingml/2006/main" xmlns:r="http://schemas.openxmlformats.org/officeDocument/2006/relationships" xmlns:p="http://schemas.openxmlformats.org/presentationml/2006/main">
-  <p:cSld name="Slide 4">
+  <p:cSld>
     <p:bg>
       <p:bgPr>
         <a:blipFill dpi="0" rotWithShape="1">
@@ -6938,13 +6854,12 @@
             <a:avLst/>
           </a:prstGeom>
           <a:noFill/>
-          <a:ln/>
         </p:spPr>
         <p:txBody>
           <a:bodyPr wrap="square" rtlCol="0" anchor="ctr"/>
           <a:lstStyle/>
           <a:p>
-            <a:pPr algn="r" indent="0" marL="0">
+            <a:pPr marL="0" indent="0" algn="r">
               <a:buNone/>
             </a:pPr>
             <a:r>
@@ -6952,9 +6867,9 @@
                 <a:solidFill>
                   <a:srgbClr val="8A9099"/>
                 </a:solidFill>
-                <a:latin typeface="微软雅黑" pitchFamily="34" charset="0"/>
-                <a:ea typeface="微软雅黑" pitchFamily="34" charset="-122"/>
-                <a:cs typeface="微软雅黑" pitchFamily="34" charset="-120"/>
+                <a:latin typeface="微软雅黑" panose="020B0503020204020204" pitchFamily="34" charset="-122"/>
+                <a:ea typeface="微软雅黑" panose="020B0503020204020204" pitchFamily="34" charset="-122"/>
+                <a:cs typeface="微软雅黑" panose="020B0503020204020204" pitchFamily="34" charset="-120"/>
               </a:rPr>
               <a:t>4 / 17</a:t>
             </a:r>
@@ -6977,13 +6892,12 @@
             <a:avLst/>
           </a:prstGeom>
           <a:noFill/>
-          <a:ln/>
         </p:spPr>
         <p:txBody>
           <a:bodyPr wrap="square" rtlCol="0" anchor="ctr"/>
           <a:lstStyle/>
           <a:p>
-            <a:pPr algn="l" indent="0" marL="0">
+            <a:pPr marL="0" indent="0" algn="l">
               <a:buNone/>
             </a:pPr>
             <a:r>
@@ -6991,9 +6905,9 @@
                 <a:solidFill>
                   <a:srgbClr val="1F4E9C"/>
                 </a:solidFill>
-                <a:latin typeface="微软雅黑" pitchFamily="34" charset="0"/>
-                <a:ea typeface="微软雅黑" pitchFamily="34" charset="-122"/>
-                <a:cs typeface="微软雅黑" pitchFamily="34" charset="-120"/>
+                <a:latin typeface="微软雅黑" panose="020B0503020204020204" pitchFamily="34" charset="-122"/>
+                <a:ea typeface="微软雅黑" panose="020B0503020204020204" pitchFamily="34" charset="-122"/>
+                <a:cs typeface="微软雅黑" panose="020B0503020204020204" pitchFamily="34" charset="-120"/>
               </a:rPr>
               <a:t>存储 · 邻接表</a:t>
             </a:r>
@@ -7016,13 +6930,12 @@
             <a:avLst/>
           </a:prstGeom>
           <a:noFill/>
-          <a:ln/>
         </p:spPr>
         <p:txBody>
           <a:bodyPr wrap="square" rtlCol="0" anchor="ctr"/>
           <a:lstStyle/>
           <a:p>
-            <a:pPr algn="l" indent="0" marL="0">
+            <a:pPr marL="0" indent="0" algn="l">
               <a:buNone/>
             </a:pPr>
             <a:r>
@@ -7030,9 +6943,9 @@
                 <a:solidFill>
                   <a:srgbClr val="1F2329"/>
                 </a:solidFill>
-                <a:latin typeface="微软雅黑" pitchFamily="34" charset="0"/>
-                <a:ea typeface="微软雅黑" pitchFamily="34" charset="-122"/>
-                <a:cs typeface="微软雅黑" pitchFamily="34" charset="-120"/>
+                <a:latin typeface="微软雅黑" panose="020B0503020204020204" pitchFamily="34" charset="-122"/>
+                <a:ea typeface="微软雅黑" panose="020B0503020204020204" pitchFamily="34" charset="-122"/>
+                <a:cs typeface="微软雅黑" panose="020B0503020204020204" pitchFamily="34" charset="-120"/>
               </a:rPr>
               <a:t>邻接表：顶点表加边表，只存真实存在的边</a:t>
             </a:r>
@@ -7057,7 +6970,6 @@
           <a:solidFill>
             <a:srgbClr val="F7F9FC"/>
           </a:solidFill>
-          <a:ln/>
         </p:spPr>
       </p:sp>
       <p:sp>
@@ -7077,7 +6989,6 @@
           <a:solidFill>
             <a:srgbClr val="1F4E9C"/>
           </a:solidFill>
-          <a:ln/>
         </p:spPr>
       </p:sp>
       <p:sp>
@@ -7095,13 +7006,12 @@
             <a:avLst/>
           </a:prstGeom>
           <a:noFill/>
-          <a:ln/>
         </p:spPr>
         <p:txBody>
           <a:bodyPr wrap="square" rtlCol="0" anchor="t"/>
           <a:lstStyle/>
           <a:p>
-            <a:pPr algn="l" indent="0" marL="0">
+            <a:pPr marL="0" indent="0" algn="l">
               <a:lnSpc>
                 <a:spcPct val="125000"/>
               </a:lnSpc>
@@ -7112,9 +7022,9 @@
                 <a:solidFill>
                   <a:srgbClr val="1F2329"/>
                 </a:solidFill>
-                <a:latin typeface="Consolas" pitchFamily="34" charset="0"/>
-                <a:ea typeface="Consolas" pitchFamily="34" charset="-122"/>
-                <a:cs typeface="Consolas" pitchFamily="34" charset="-120"/>
+                <a:latin typeface="Consolas" panose="020B0609020204030204" pitchFamily="34" charset="0"/>
+                <a:ea typeface="Consolas" panose="020B0609020204030204" pitchFamily="34" charset="-122"/>
+                <a:cs typeface="Consolas" panose="020B0609020204030204" pitchFamily="34" charset="-120"/>
               </a:rPr>
               <a:t>typedef struct ArcNode{ int adjvex; int weight; struct ArcNode *nextarc; }ArcNode;  // 边表结点
 typedef struct VNode{ VertexType data; ArcNode *firstarc; }VNode, AdjList[MaxVertexNum];  // 顶点表
@@ -7140,13 +7050,12 @@
             <a:avLst/>
           </a:prstGeom>
           <a:noFill/>
-          <a:ln/>
         </p:spPr>
         <p:txBody>
           <a:bodyPr wrap="square" rtlCol="0" anchor="t"/>
           <a:lstStyle/>
           <a:p>
-            <a:pPr algn="l" indent="0" marL="0">
+            <a:pPr marL="0" indent="0" algn="l">
               <a:lnSpc>
                 <a:spcPct val="115000"/>
               </a:lnSpc>
@@ -7157,25 +7066,68 @@
                 <a:solidFill>
                   <a:srgbClr val="1F4E9C"/>
                 </a:solidFill>
-                <a:latin typeface="微软雅黑" pitchFamily="34" charset="0"/>
-                <a:ea typeface="微软雅黑" pitchFamily="34" charset="-122"/>
-                <a:cs typeface="微软雅黑" pitchFamily="34" charset="-120"/>
+                <a:latin typeface="微软雅黑" panose="020B0503020204020204" pitchFamily="34" charset="-122"/>
+                <a:ea typeface="微软雅黑" panose="020B0503020204020204" pitchFamily="34" charset="-122"/>
+                <a:cs typeface="微软雅黑" panose="020B0503020204020204" pitchFamily="34" charset="-120"/>
               </a:rPr>
               <a:t>•  </a:t>
             </a:r>
-            <a:pPr algn="l" indent="0" marL="0">
+            <a:r>
+              <a:rPr lang="en-US" sz="1800" dirty="0">
+                <a:solidFill>
+                  <a:srgbClr val="000000"/>
+                </a:solidFill>
+              </a:rPr>
+              <a:t>每个顶点一个表头 VNode，firstarc 指向它的边表；边表结点 ArcNode 记 adjvex（连到哪个顶点）、nextarc 串起下一条边</a:t>
+            </a:r>
+            <a:endParaRPr lang="en-US" sz="1800" dirty="0"/>
+          </a:p>
+        </p:txBody>
+      </p:sp>
+      <p:sp>
+        <p:nvSpPr>
+          <p:cNvPr id="9" name="Text 7"/>
+          <p:cNvSpPr/>
+          <p:nvPr/>
+        </p:nvSpPr>
+        <p:spPr>
+          <a:xfrm>
+            <a:off x="896112" y="4681728"/>
+            <a:ext cx="10454335" cy="740664"/>
+          </a:xfrm>
+          <a:prstGeom prst="rect">
+            <a:avLst/>
+          </a:prstGeom>
+          <a:noFill/>
+        </p:spPr>
+        <p:txBody>
+          <a:bodyPr wrap="square" rtlCol="0" anchor="t"/>
+          <a:lstStyle/>
+          <a:p>
+            <a:pPr marL="0" indent="0" algn="l">
               <a:lnSpc>
                 <a:spcPct val="115000"/>
               </a:lnSpc>
               <a:buNone/>
             </a:pPr>
             <a:r>
+              <a:rPr lang="en-US" sz="1800" b="1" dirty="0">
+                <a:solidFill>
+                  <a:srgbClr val="1F4E9C"/>
+                </a:solidFill>
+                <a:latin typeface="微软雅黑" panose="020B0503020204020204" pitchFamily="34" charset="-122"/>
+                <a:ea typeface="微软雅黑" panose="020B0503020204020204" pitchFamily="34" charset="-122"/>
+                <a:cs typeface="微软雅黑" panose="020B0503020204020204" pitchFamily="34" charset="-120"/>
+              </a:rPr>
+              <a:t>•  </a:t>
+            </a:r>
+            <a:r>
               <a:rPr lang="en-US" sz="1800" dirty="0">
                 <a:solidFill>
                   <a:srgbClr val="000000"/>
                 </a:solidFill>
               </a:rPr>
-              <a:t>每个顶点一个表头 VNode，firstarc 指向它的边表；边表结点 ArcNode 记 adjvex（连到哪个顶点）、nextarc 串起下一条边</a:t>
+              <a:t>只存实际存在的边，空间 O(n+e)，稀疏图比邻接矩阵省得多；weight 是带权时用的，强化阶段讲 Prim 会用到</a:t>
             </a:r>
             <a:endParaRPr lang="en-US" sz="1800" dirty="0"/>
           </a:p>
@@ -7183,26 +7135,25 @@
       </p:sp>
       <p:sp>
         <p:nvSpPr>
-          <p:cNvPr id="9" name="Text 7"/>
-          <p:cNvSpPr/>
-          <p:nvPr/>
-        </p:nvSpPr>
-        <p:spPr>
-          <a:xfrm>
-            <a:off x="896112" y="4681728"/>
-            <a:ext cx="10454335" cy="740664"/>
-          </a:xfrm>
-          <a:prstGeom prst="rect">
-            <a:avLst/>
-          </a:prstGeom>
-          <a:noFill/>
-          <a:ln/>
+          <p:cNvPr id="10" name="Text 8"/>
+          <p:cNvSpPr/>
+          <p:nvPr/>
+        </p:nvSpPr>
+        <p:spPr>
+          <a:xfrm>
+            <a:off x="896112" y="5495544"/>
+            <a:ext cx="10454335" cy="397764"/>
+          </a:xfrm>
+          <a:prstGeom prst="rect">
+            <a:avLst/>
+          </a:prstGeom>
+          <a:noFill/>
         </p:spPr>
         <p:txBody>
           <a:bodyPr wrap="square" rtlCol="0" anchor="t"/>
           <a:lstStyle/>
           <a:p>
-            <a:pPr algn="l" indent="0" marL="0">
+            <a:pPr marL="0" indent="0" algn="l">
               <a:lnSpc>
                 <a:spcPct val="115000"/>
               </a:lnSpc>
@@ -7213,74 +7164,12 @@
                 <a:solidFill>
                   <a:srgbClr val="1F4E9C"/>
                 </a:solidFill>
-                <a:latin typeface="微软雅黑" pitchFamily="34" charset="0"/>
-                <a:ea typeface="微软雅黑" pitchFamily="34" charset="-122"/>
-                <a:cs typeface="微软雅黑" pitchFamily="34" charset="-120"/>
+                <a:latin typeface="微软雅黑" panose="020B0503020204020204" pitchFamily="34" charset="-122"/>
+                <a:ea typeface="微软雅黑" panose="020B0503020204020204" pitchFamily="34" charset="-122"/>
+                <a:cs typeface="微软雅黑" panose="020B0503020204020204" pitchFamily="34" charset="-120"/>
               </a:rPr>
               <a:t>•  </a:t>
             </a:r>
-            <a:pPr algn="l" indent="0" marL="0">
-              <a:lnSpc>
-                <a:spcPct val="115000"/>
-              </a:lnSpc>
-              <a:buNone/>
-            </a:pPr>
-            <a:r>
-              <a:rPr lang="en-US" sz="1800" dirty="0">
-                <a:solidFill>
-                  <a:srgbClr val="000000"/>
-                </a:solidFill>
-              </a:rPr>
-              <a:t>只存实际存在的边，空间 O(n+e)，稀疏图比邻接矩阵省得多；weight 是带权时用的，强化阶段讲 Prim 会用到</a:t>
-            </a:r>
-            <a:endParaRPr lang="en-US" sz="1800" dirty="0"/>
-          </a:p>
-        </p:txBody>
-      </p:sp>
-      <p:sp>
-        <p:nvSpPr>
-          <p:cNvPr id="10" name="Text 8"/>
-          <p:cNvSpPr/>
-          <p:nvPr/>
-        </p:nvSpPr>
-        <p:spPr>
-          <a:xfrm>
-            <a:off x="896112" y="5495544"/>
-            <a:ext cx="10454335" cy="397764"/>
-          </a:xfrm>
-          <a:prstGeom prst="rect">
-            <a:avLst/>
-          </a:prstGeom>
-          <a:noFill/>
-          <a:ln/>
-        </p:spPr>
-        <p:txBody>
-          <a:bodyPr wrap="square" rtlCol="0" anchor="t"/>
-          <a:lstStyle/>
-          <a:p>
-            <a:pPr algn="l" indent="0" marL="0">
-              <a:lnSpc>
-                <a:spcPct val="115000"/>
-              </a:lnSpc>
-              <a:buNone/>
-            </a:pPr>
-            <a:r>
-              <a:rPr lang="en-US" sz="1800" b="1" dirty="0">
-                <a:solidFill>
-                  <a:srgbClr val="1F4E9C"/>
-                </a:solidFill>
-                <a:latin typeface="微软雅黑" pitchFamily="34" charset="0"/>
-                <a:ea typeface="微软雅黑" pitchFamily="34" charset="-122"/>
-                <a:cs typeface="微软雅黑" pitchFamily="34" charset="-120"/>
-              </a:rPr>
-              <a:t>•  </a:t>
-            </a:r>
-            <a:pPr algn="l" indent="0" marL="0">
-              <a:lnSpc>
-                <a:spcPct val="115000"/>
-              </a:lnSpc>
-              <a:buNone/>
-            </a:pPr>
             <a:r>
               <a:rPr lang="en-US" sz="1800" dirty="0">
                 <a:solidFill>
@@ -7303,7 +7192,32 @@
 
 <file path=ppt/slides/slide5.xml><?xml version="1.0" encoding="utf-8"?>
 <p:sld xmlns:a="http://schemas.openxmlformats.org/drawingml/2006/main" xmlns:r="http://schemas.openxmlformats.org/officeDocument/2006/relationships" xmlns:p="http://schemas.openxmlformats.org/presentationml/2006/main">
-  <p:cSld name="Slide 5">
+  <p:cSld>
+    <p:spTree>
+      <p:nvGrpSpPr>
+        <p:cNvPr id="1" name=""/>
+        <p:cNvGrpSpPr/>
+        <p:nvPr/>
+      </p:nvGrpSpPr>
+      <p:grpSpPr>
+        <a:xfrm>
+          <a:off x="0" y="0"/>
+          <a:ext cx="0" cy="0"/>
+          <a:chOff x="0" y="0"/>
+          <a:chExt cx="0" cy="0"/>
+        </a:xfrm>
+      </p:grpSpPr>
+    </p:spTree>
+  </p:cSld>
+  <p:clrMapOvr>
+    <a:masterClrMapping/>
+  </p:clrMapOvr>
+</p:sld>
+</file>
+
+<file path=ppt/slides/slide6.xml><?xml version="1.0" encoding="utf-8"?>
+<p:sld xmlns:a="http://schemas.openxmlformats.org/drawingml/2006/main" xmlns:r="http://schemas.openxmlformats.org/officeDocument/2006/relationships" xmlns:p="http://schemas.openxmlformats.org/presentationml/2006/main">
+  <p:cSld>
     <p:bg>
       <p:bgPr>
         <a:blipFill dpi="0" rotWithShape="1">
@@ -7347,13 +7261,12 @@
             <a:avLst/>
           </a:prstGeom>
           <a:noFill/>
-          <a:ln/>
         </p:spPr>
         <p:txBody>
           <a:bodyPr wrap="square" rtlCol="0" anchor="ctr"/>
           <a:lstStyle/>
           <a:p>
-            <a:pPr algn="r" indent="0" marL="0">
+            <a:pPr marL="0" indent="0" algn="r">
               <a:buNone/>
             </a:pPr>
             <a:r>
@@ -7361,9 +7274,9 @@
                 <a:solidFill>
                   <a:srgbClr val="8A9099"/>
                 </a:solidFill>
-                <a:latin typeface="微软雅黑" pitchFamily="34" charset="0"/>
-                <a:ea typeface="微软雅黑" pitchFamily="34" charset="-122"/>
-                <a:cs typeface="微软雅黑" pitchFamily="34" charset="-120"/>
+                <a:latin typeface="微软雅黑" panose="020B0503020204020204" pitchFamily="34" charset="-122"/>
+                <a:ea typeface="微软雅黑" panose="020B0503020204020204" pitchFamily="34" charset="-122"/>
+                <a:cs typeface="微软雅黑" panose="020B0503020204020204" pitchFamily="34" charset="-120"/>
               </a:rPr>
               <a:t>5 / 17</a:t>
             </a:r>
@@ -7386,13 +7299,12 @@
             <a:avLst/>
           </a:prstGeom>
           <a:noFill/>
-          <a:ln/>
         </p:spPr>
         <p:txBody>
           <a:bodyPr wrap="square" rtlCol="0" anchor="ctr"/>
           <a:lstStyle/>
           <a:p>
-            <a:pPr algn="l" indent="0" marL="0">
+            <a:pPr marL="0" indent="0" algn="l">
               <a:buNone/>
             </a:pPr>
             <a:r>
@@ -7400,9 +7312,9 @@
                 <a:solidFill>
                   <a:srgbClr val="1F4E9C"/>
                 </a:solidFill>
-                <a:latin typeface="微软雅黑" pitchFamily="34" charset="0"/>
-                <a:ea typeface="微软雅黑" pitchFamily="34" charset="-122"/>
-                <a:cs typeface="微软雅黑" pitchFamily="34" charset="-120"/>
+                <a:latin typeface="微软雅黑" panose="020B0503020204020204" pitchFamily="34" charset="-122"/>
+                <a:ea typeface="微软雅黑" panose="020B0503020204020204" pitchFamily="34" charset="-122"/>
+                <a:cs typeface="微软雅黑" panose="020B0503020204020204" pitchFamily="34" charset="-120"/>
               </a:rPr>
               <a:t>字段名统一</a:t>
             </a:r>
@@ -7425,13 +7337,12 @@
             <a:avLst/>
           </a:prstGeom>
           <a:noFill/>
-          <a:ln/>
         </p:spPr>
         <p:txBody>
           <a:bodyPr wrap="square" rtlCol="0" anchor="ctr"/>
           <a:lstStyle/>
           <a:p>
-            <a:pPr algn="l" indent="0" marL="0">
+            <a:pPr marL="0" indent="0" algn="l">
               <a:buNone/>
             </a:pPr>
             <a:r>
@@ -7439,9 +7350,9 @@
                 <a:solidFill>
                   <a:srgbClr val="1F2329"/>
                 </a:solidFill>
-                <a:latin typeface="微软雅黑" pitchFamily="34" charset="0"/>
-                <a:ea typeface="微软雅黑" pitchFamily="34" charset="-122"/>
-                <a:cs typeface="微软雅黑" pitchFamily="34" charset="-120"/>
+                <a:latin typeface="微软雅黑" panose="020B0503020204020204" pitchFamily="34" charset="-122"/>
+                <a:ea typeface="微软雅黑" panose="020B0503020204020204" pitchFamily="34" charset="-122"/>
+                <a:cs typeface="微软雅黑" panose="020B0503020204020204" pitchFamily="34" charset="-120"/>
               </a:rPr>
               <a:t>字段名统一：以题目给的为准</a:t>
             </a:r>
@@ -7464,13 +7375,12 @@
             <a:avLst/>
           </a:prstGeom>
           <a:noFill/>
-          <a:ln/>
         </p:spPr>
         <p:txBody>
           <a:bodyPr wrap="square" rtlCol="0" anchor="t"/>
           <a:lstStyle/>
           <a:p>
-            <a:pPr algn="l" indent="0" marL="0">
+            <a:pPr marL="0" indent="0" algn="l">
               <a:lnSpc>
                 <a:spcPct val="115000"/>
               </a:lnSpc>
@@ -7481,25 +7391,68 @@
                 <a:solidFill>
                   <a:srgbClr val="1F4E9C"/>
                 </a:solidFill>
-                <a:latin typeface="微软雅黑" pitchFamily="34" charset="0"/>
-                <a:ea typeface="微软雅黑" pitchFamily="34" charset="-122"/>
-                <a:cs typeface="微软雅黑" pitchFamily="34" charset="-120"/>
+                <a:latin typeface="微软雅黑" panose="020B0503020204020204" pitchFamily="34" charset="-122"/>
+                <a:ea typeface="微软雅黑" panose="020B0503020204020204" pitchFamily="34" charset="-122"/>
+                <a:cs typeface="微软雅黑" panose="020B0503020204020204" pitchFamily="34" charset="-120"/>
               </a:rPr>
               <a:t>•  </a:t>
             </a:r>
-            <a:pPr algn="l" indent="0" marL="0">
+            <a:r>
+              <a:rPr lang="en-US" sz="1800" dirty="0">
+                <a:solidFill>
+                  <a:srgbClr val="000000"/>
+                </a:solidFill>
+              </a:rPr>
+              <a:t>边表结点的下一指针，本课程统一叫 nextarc；但有的真题（如 2024、2025）题面自己给的字段叫 next，那就以题目为准、抄题目的字段名</a:t>
+            </a:r>
+            <a:endParaRPr lang="en-US" sz="1800" dirty="0"/>
+          </a:p>
+        </p:txBody>
+      </p:sp>
+      <p:sp>
+        <p:nvSpPr>
+          <p:cNvPr id="6" name="Text 4"/>
+          <p:cNvSpPr/>
+          <p:nvPr/>
+        </p:nvSpPr>
+        <p:spPr>
+          <a:xfrm>
+            <a:off x="896112" y="3209544"/>
+            <a:ext cx="10454335" cy="740664"/>
+          </a:xfrm>
+          <a:prstGeom prst="rect">
+            <a:avLst/>
+          </a:prstGeom>
+          <a:noFill/>
+        </p:spPr>
+        <p:txBody>
+          <a:bodyPr wrap="square" rtlCol="0" anchor="t"/>
+          <a:lstStyle/>
+          <a:p>
+            <a:pPr marL="0" indent="0" algn="l">
               <a:lnSpc>
                 <a:spcPct val="115000"/>
               </a:lnSpc>
               <a:buNone/>
             </a:pPr>
             <a:r>
+              <a:rPr lang="en-US" sz="1800" b="1" dirty="0">
+                <a:solidFill>
+                  <a:srgbClr val="1F4E9C"/>
+                </a:solidFill>
+                <a:latin typeface="微软雅黑" panose="020B0503020204020204" pitchFamily="34" charset="-122"/>
+                <a:ea typeface="微软雅黑" panose="020B0503020204020204" pitchFamily="34" charset="-122"/>
+                <a:cs typeface="微软雅黑" panose="020B0503020204020204" pitchFamily="34" charset="-120"/>
+              </a:rPr>
+              <a:t>•  </a:t>
+            </a:r>
+            <a:r>
               <a:rPr lang="en-US" sz="1800" dirty="0">
                 <a:solidFill>
                   <a:srgbClr val="000000"/>
                 </a:solidFill>
               </a:rPr>
-              <a:t>边表结点的下一指针，本课程统一叫 nextarc；但有的真题（如 2024、2025）题面自己给的字段叫 next，那就以题目为准、抄题目的字段名</a:t>
+              <a:t>邻接矩阵本课程统一用 vex、edge、vexnum、arcnum；个别真题会给另一套字段名，答题时跟着题目给的走</a:t>
             </a:r>
             <a:endParaRPr lang="en-US" sz="1800" dirty="0"/>
           </a:p>
@@ -7507,26 +7460,25 @@
       </p:sp>
       <p:sp>
         <p:nvSpPr>
-          <p:cNvPr id="6" name="Text 4"/>
-          <p:cNvSpPr/>
-          <p:nvPr/>
-        </p:nvSpPr>
-        <p:spPr>
-          <a:xfrm>
-            <a:off x="896112" y="3209544"/>
-            <a:ext cx="10454335" cy="740664"/>
-          </a:xfrm>
-          <a:prstGeom prst="rect">
-            <a:avLst/>
-          </a:prstGeom>
-          <a:noFill/>
-          <a:ln/>
+          <p:cNvPr id="7" name="Text 5"/>
+          <p:cNvSpPr/>
+          <p:nvPr/>
+        </p:nvSpPr>
+        <p:spPr>
+          <a:xfrm>
+            <a:off x="896112" y="4023360"/>
+            <a:ext cx="10454335" cy="397764"/>
+          </a:xfrm>
+          <a:prstGeom prst="rect">
+            <a:avLst/>
+          </a:prstGeom>
+          <a:noFill/>
         </p:spPr>
         <p:txBody>
           <a:bodyPr wrap="square" rtlCol="0" anchor="t"/>
           <a:lstStyle/>
           <a:p>
-            <a:pPr algn="l" indent="0" marL="0">
+            <a:pPr marL="0" indent="0" algn="l">
               <a:lnSpc>
                 <a:spcPct val="115000"/>
               </a:lnSpc>
@@ -7537,74 +7489,12 @@
                 <a:solidFill>
                   <a:srgbClr val="1F4E9C"/>
                 </a:solidFill>
-                <a:latin typeface="微软雅黑" pitchFamily="34" charset="0"/>
-                <a:ea typeface="微软雅黑" pitchFamily="34" charset="-122"/>
-                <a:cs typeface="微软雅黑" pitchFamily="34" charset="-120"/>
+                <a:latin typeface="微软雅黑" panose="020B0503020204020204" pitchFamily="34" charset="-122"/>
+                <a:ea typeface="微软雅黑" panose="020B0503020204020204" pitchFamily="34" charset="-122"/>
+                <a:cs typeface="微软雅黑" panose="020B0503020204020204" pitchFamily="34" charset="-120"/>
               </a:rPr>
               <a:t>•  </a:t>
             </a:r>
-            <a:pPr algn="l" indent="0" marL="0">
-              <a:lnSpc>
-                <a:spcPct val="115000"/>
-              </a:lnSpc>
-              <a:buNone/>
-            </a:pPr>
-            <a:r>
-              <a:rPr lang="en-US" sz="1800" dirty="0">
-                <a:solidFill>
-                  <a:srgbClr val="000000"/>
-                </a:solidFill>
-              </a:rPr>
-              <a:t>邻接矩阵本课程统一用 vex、edge、vexnum、arcnum；个别真题会给另一套字段名，答题时跟着题目给的走</a:t>
-            </a:r>
-            <a:endParaRPr lang="en-US" sz="1800" dirty="0"/>
-          </a:p>
-        </p:txBody>
-      </p:sp>
-      <p:sp>
-        <p:nvSpPr>
-          <p:cNvPr id="7" name="Text 5"/>
-          <p:cNvSpPr/>
-          <p:nvPr/>
-        </p:nvSpPr>
-        <p:spPr>
-          <a:xfrm>
-            <a:off x="896112" y="4023360"/>
-            <a:ext cx="10454335" cy="397764"/>
-          </a:xfrm>
-          <a:prstGeom prst="rect">
-            <a:avLst/>
-          </a:prstGeom>
-          <a:noFill/>
-          <a:ln/>
-        </p:spPr>
-        <p:txBody>
-          <a:bodyPr wrap="square" rtlCol="0" anchor="t"/>
-          <a:lstStyle/>
-          <a:p>
-            <a:pPr algn="l" indent="0" marL="0">
-              <a:lnSpc>
-                <a:spcPct val="115000"/>
-              </a:lnSpc>
-              <a:buNone/>
-            </a:pPr>
-            <a:r>
-              <a:rPr lang="en-US" sz="1800" b="1" dirty="0">
-                <a:solidFill>
-                  <a:srgbClr val="1F4E9C"/>
-                </a:solidFill>
-                <a:latin typeface="微软雅黑" pitchFamily="34" charset="0"/>
-                <a:ea typeface="微软雅黑" pitchFamily="34" charset="-122"/>
-                <a:cs typeface="微软雅黑" pitchFamily="34" charset="-120"/>
-              </a:rPr>
-              <a:t>•  </a:t>
-            </a:r>
-            <a:pPr algn="l" indent="0" marL="0">
-              <a:lnSpc>
-                <a:spcPct val="115000"/>
-              </a:lnSpc>
-              <a:buNone/>
-            </a:pPr>
             <a:r>
               <a:rPr lang="en-US" sz="1800" dirty="0">
                 <a:solidFill>
@@ -7632,13 +7522,12 @@
             <a:avLst/>
           </a:prstGeom>
           <a:noFill/>
-          <a:ln/>
         </p:spPr>
         <p:txBody>
           <a:bodyPr wrap="square" rtlCol="0" anchor="t"/>
           <a:lstStyle/>
           <a:p>
-            <a:pPr algn="l" indent="0" marL="0">
+            <a:pPr marL="0" indent="0" algn="l">
               <a:buNone/>
             </a:pPr>
             <a:r>
@@ -7646,9 +7535,9 @@
                 <a:solidFill>
                   <a:srgbClr val="8A9099"/>
                 </a:solidFill>
-                <a:latin typeface="微软雅黑" pitchFamily="34" charset="0"/>
-                <a:ea typeface="微软雅黑" pitchFamily="34" charset="-122"/>
-                <a:cs typeface="微软雅黑" pitchFamily="34" charset="-120"/>
+                <a:latin typeface="微软雅黑" panose="020B0503020204020204" pitchFamily="34" charset="-122"/>
+                <a:ea typeface="微软雅黑" panose="020B0503020204020204" pitchFamily="34" charset="-122"/>
+                <a:cs typeface="微软雅黑" panose="020B0503020204020204" pitchFamily="34" charset="-120"/>
               </a:rPr>
               <a:t>一句话规则：字段名以题目给出的定义为准，答题时抄题目的；本课程正文用统一的这一套，方便你记</a:t>
             </a:r>
@@ -7664,9 +7553,9 @@
 </p:sld>
 </file>
 
-<file path=ppt/slides/slide6.xml><?xml version="1.0" encoding="utf-8"?>
+<file path=ppt/slides/slide7.xml><?xml version="1.0" encoding="utf-8"?>
 <p:sld xmlns:a="http://schemas.openxmlformats.org/drawingml/2006/main" xmlns:r="http://schemas.openxmlformats.org/officeDocument/2006/relationships" xmlns:p="http://schemas.openxmlformats.org/presentationml/2006/main">
-  <p:cSld name="Slide 6">
+  <p:cSld>
     <p:bg>
       <p:bgPr>
         <a:blipFill dpi="0" rotWithShape="1">
@@ -7710,13 +7599,12 @@
             <a:avLst/>
           </a:prstGeom>
           <a:noFill/>
-          <a:ln/>
         </p:spPr>
         <p:txBody>
           <a:bodyPr wrap="square" rtlCol="0" anchor="ctr"/>
           <a:lstStyle/>
           <a:p>
-            <a:pPr algn="r" indent="0" marL="0">
+            <a:pPr marL="0" indent="0" algn="r">
               <a:buNone/>
             </a:pPr>
             <a:r>
@@ -7724,9 +7612,9 @@
                 <a:solidFill>
                   <a:srgbClr val="8A9099"/>
                 </a:solidFill>
-                <a:latin typeface="微软雅黑" pitchFamily="34" charset="0"/>
-                <a:ea typeface="微软雅黑" pitchFamily="34" charset="-122"/>
-                <a:cs typeface="微软雅黑" pitchFamily="34" charset="-120"/>
+                <a:latin typeface="微软雅黑" panose="020B0503020204020204" pitchFamily="34" charset="-122"/>
+                <a:ea typeface="微软雅黑" panose="020B0503020204020204" pitchFamily="34" charset="-122"/>
+                <a:cs typeface="微软雅黑" panose="020B0503020204020204" pitchFamily="34" charset="-120"/>
               </a:rPr>
               <a:t>6 / 17</a:t>
             </a:r>
@@ -7749,13 +7637,12 @@
             <a:avLst/>
           </a:prstGeom>
           <a:noFill/>
-          <a:ln/>
         </p:spPr>
         <p:txBody>
           <a:bodyPr wrap="square" rtlCol="0" anchor="ctr"/>
           <a:lstStyle/>
           <a:p>
-            <a:pPr algn="l" indent="0" marL="0">
+            <a:pPr marL="0" indent="0" algn="l">
               <a:buNone/>
             </a:pPr>
             <a:r>
@@ -7763,9 +7650,9 @@
                 <a:solidFill>
                   <a:srgbClr val="1F4E9C"/>
                 </a:solidFill>
-                <a:latin typeface="微软雅黑" pitchFamily="34" charset="0"/>
-                <a:ea typeface="微软雅黑" pitchFamily="34" charset="-122"/>
-                <a:cs typeface="微软雅黑" pitchFamily="34" charset="-120"/>
+                <a:latin typeface="微软雅黑" panose="020B0503020204020204" pitchFamily="34" charset="-122"/>
+                <a:ea typeface="微软雅黑" panose="020B0503020204020204" pitchFamily="34" charset="-122"/>
+                <a:cs typeface="微软雅黑" panose="020B0503020204020204" pitchFamily="34" charset="-120"/>
               </a:rPr>
               <a:t>存储的应用</a:t>
             </a:r>
@@ -7788,13 +7675,12 @@
             <a:avLst/>
           </a:prstGeom>
           <a:noFill/>
-          <a:ln/>
         </p:spPr>
         <p:txBody>
           <a:bodyPr wrap="square" rtlCol="0" anchor="ctr"/>
           <a:lstStyle/>
           <a:p>
-            <a:pPr algn="l" indent="0" marL="0">
+            <a:pPr marL="0" indent="0" algn="l">
               <a:buNone/>
             </a:pPr>
             <a:r>
@@ -7802,9 +7688,9 @@
                 <a:solidFill>
                   <a:srgbClr val="1F2329"/>
                 </a:solidFill>
-                <a:latin typeface="微软雅黑" pitchFamily="34" charset="0"/>
-                <a:ea typeface="微软雅黑" pitchFamily="34" charset="-122"/>
-                <a:cs typeface="微软雅黑" pitchFamily="34" charset="-120"/>
+                <a:latin typeface="微软雅黑" panose="020B0503020204020204" pitchFamily="34" charset="-122"/>
+                <a:ea typeface="微软雅黑" panose="020B0503020204020204" pitchFamily="34" charset="-122"/>
+                <a:cs typeface="微软雅黑" panose="020B0503020204020204" pitchFamily="34" charset="-120"/>
               </a:rPr>
               <a:t>求所有顶点的入度（2026真题第一步）</a:t>
             </a:r>
@@ -7829,7 +7715,6 @@
           <a:solidFill>
             <a:srgbClr val="F7F9FC"/>
           </a:solidFill>
-          <a:ln/>
         </p:spPr>
       </p:sp>
       <p:sp>
@@ -7849,7 +7734,6 @@
           <a:solidFill>
             <a:srgbClr val="1F4E9C"/>
           </a:solidFill>
-          <a:ln/>
         </p:spPr>
       </p:sp>
       <p:sp>
@@ -7867,13 +7751,12 @@
             <a:avLst/>
           </a:prstGeom>
           <a:noFill/>
-          <a:ln/>
         </p:spPr>
         <p:txBody>
           <a:bodyPr wrap="square" rtlCol="0" anchor="t"/>
           <a:lstStyle/>
           <a:p>
-            <a:pPr algn="l" indent="0" marL="0">
+            <a:pPr marL="0" indent="0" algn="l">
               <a:lnSpc>
                 <a:spcPct val="125000"/>
               </a:lnSpc>
@@ -7884,9 +7767,9 @@
                 <a:solidFill>
                   <a:srgbClr val="1F2329"/>
                 </a:solidFill>
-                <a:latin typeface="Consolas" pitchFamily="34" charset="0"/>
-                <a:ea typeface="Consolas" pitchFamily="34" charset="-122"/>
-                <a:cs typeface="Consolas" pitchFamily="34" charset="-120"/>
+                <a:latin typeface="Consolas" panose="020B0609020204030204" pitchFamily="34" charset="0"/>
+                <a:ea typeface="Consolas" panose="020B0609020204030204" pitchFamily="34" charset="-122"/>
+                <a:cs typeface="Consolas" panose="020B0609020204030204" pitchFamily="34" charset="-120"/>
               </a:rPr>
               <a:t>void Indegree(ALGraph G, int indeg[]){
     for(int i = 0; i &lt; G.vexnum; i++) indeg[i] = 0;          // 先清零
@@ -7915,13 +7798,12 @@
             <a:avLst/>
           </a:prstGeom>
           <a:noFill/>
-          <a:ln/>
         </p:spPr>
         <p:txBody>
           <a:bodyPr wrap="square" rtlCol="0" anchor="t"/>
           <a:lstStyle/>
           <a:p>
-            <a:pPr algn="l" indent="0" marL="0">
+            <a:pPr marL="0" indent="0" algn="l">
               <a:buNone/>
             </a:pPr>
             <a:r>
@@ -7929,9 +7811,9 @@
                 <a:solidFill>
                   <a:srgbClr val="8A9099"/>
                 </a:solidFill>
-                <a:latin typeface="微软雅黑" pitchFamily="34" charset="0"/>
-                <a:ea typeface="微软雅黑" pitchFamily="34" charset="-122"/>
-                <a:cs typeface="微软雅黑" pitchFamily="34" charset="-120"/>
+                <a:latin typeface="微软雅黑" panose="020B0503020204020204" pitchFamily="34" charset="-122"/>
+                <a:ea typeface="微软雅黑" panose="020B0503020204020204" pitchFamily="34" charset="-122"/>
+                <a:cs typeface="微软雅黑" panose="020B0503020204020204" pitchFamily="34" charset="-120"/>
               </a:rPr>
               <a:t>为什么必须遍历所有顶点的边表？入度是'指向它的弧有多少条'，这些弧分散在各个顶点的边表里，只看一个顶点的边表只能得到它的出度。这是拓扑排序的第一步</a:t>
             </a:r>
@@ -7947,9 +7829,9 @@
 </p:sld>
 </file>
 
-<file path=ppt/slides/slide7.xml><?xml version="1.0" encoding="utf-8"?>
+<file path=ppt/slides/slide8.xml><?xml version="1.0" encoding="utf-8"?>
 <p:sld xmlns:a="http://schemas.openxmlformats.org/drawingml/2006/main" xmlns:r="http://schemas.openxmlformats.org/officeDocument/2006/relationships" xmlns:p="http://schemas.openxmlformats.org/presentationml/2006/main">
-  <p:cSld name="Slide 7">
+  <p:cSld>
     <p:bg>
       <p:bgPr>
         <a:blipFill dpi="0" rotWithShape="1">
@@ -7993,13 +7875,12 @@
             <a:avLst/>
           </a:prstGeom>
           <a:noFill/>
-          <a:ln/>
         </p:spPr>
         <p:txBody>
           <a:bodyPr wrap="square" rtlCol="0" anchor="ctr"/>
           <a:lstStyle/>
           <a:p>
-            <a:pPr algn="r" indent="0" marL="0">
+            <a:pPr marL="0" indent="0" algn="r">
               <a:buNone/>
             </a:pPr>
             <a:r>
@@ -8007,9 +7888,9 @@
                 <a:solidFill>
                   <a:srgbClr val="8A9099"/>
                 </a:solidFill>
-                <a:latin typeface="微软雅黑" pitchFamily="34" charset="0"/>
-                <a:ea typeface="微软雅黑" pitchFamily="34" charset="-122"/>
-                <a:cs typeface="微软雅黑" pitchFamily="34" charset="-120"/>
+                <a:latin typeface="微软雅黑" panose="020B0503020204020204" pitchFamily="34" charset="-122"/>
+                <a:ea typeface="微软雅黑" panose="020B0503020204020204" pitchFamily="34" charset="-122"/>
+                <a:cs typeface="微软雅黑" panose="020B0503020204020204" pitchFamily="34" charset="-120"/>
               </a:rPr>
               <a:t>7 / 17</a:t>
             </a:r>
@@ -8032,13 +7913,12 @@
             <a:avLst/>
           </a:prstGeom>
           <a:noFill/>
-          <a:ln/>
         </p:spPr>
         <p:txBody>
           <a:bodyPr wrap="square" rtlCol="0" anchor="ctr"/>
           <a:lstStyle/>
           <a:p>
-            <a:pPr algn="l" indent="0" marL="0">
+            <a:pPr marL="0" indent="0" algn="l">
               <a:buNone/>
             </a:pPr>
             <a:r>
@@ -8046,9 +7926,9 @@
                 <a:solidFill>
                   <a:srgbClr val="1F4E9C"/>
                 </a:solidFill>
-                <a:latin typeface="微软雅黑" pitchFamily="34" charset="0"/>
-                <a:ea typeface="微软雅黑" pitchFamily="34" charset="-122"/>
-                <a:cs typeface="微软雅黑" pitchFamily="34" charset="-120"/>
+                <a:latin typeface="微软雅黑" panose="020B0503020204020204" pitchFamily="34" charset="-122"/>
+                <a:ea typeface="微软雅黑" panose="020B0503020204020204" pitchFamily="34" charset="-122"/>
+                <a:cs typeface="微软雅黑" panose="020B0503020204020204" pitchFamily="34" charset="-120"/>
               </a:rPr>
               <a:t>遍历 · 为什么要 visited</a:t>
             </a:r>
@@ -8071,13 +7951,12 @@
             <a:avLst/>
           </a:prstGeom>
           <a:noFill/>
-          <a:ln/>
         </p:spPr>
         <p:txBody>
           <a:bodyPr wrap="square" rtlCol="0" anchor="ctr"/>
           <a:lstStyle/>
           <a:p>
-            <a:pPr algn="l" indent="0" marL="0">
+            <a:pPr marL="0" indent="0" algn="l">
               <a:buNone/>
             </a:pPr>
             <a:r>
@@ -8085,9 +7964,9 @@
                 <a:solidFill>
                   <a:srgbClr val="1F2329"/>
                 </a:solidFill>
-                <a:latin typeface="微软雅黑" pitchFamily="34" charset="0"/>
-                <a:ea typeface="微软雅黑" pitchFamily="34" charset="-122"/>
-                <a:cs typeface="微软雅黑" pitchFamily="34" charset="-120"/>
+                <a:latin typeface="微软雅黑" panose="020B0503020204020204" pitchFamily="34" charset="-122"/>
+                <a:ea typeface="微软雅黑" panose="020B0503020204020204" pitchFamily="34" charset="-122"/>
+                <a:cs typeface="微软雅黑" panose="020B0503020204020204" pitchFamily="34" charset="-120"/>
               </a:rPr>
               <a:t>图的遍历为什么必须用 visited</a:t>
             </a:r>
@@ -8110,13 +7989,12 @@
             <a:avLst/>
           </a:prstGeom>
           <a:noFill/>
-          <a:ln/>
         </p:spPr>
         <p:txBody>
           <a:bodyPr wrap="square" rtlCol="0" anchor="t"/>
           <a:lstStyle/>
           <a:p>
-            <a:pPr algn="l" indent="0" marL="0">
+            <a:pPr marL="0" indent="0" algn="l">
               <a:lnSpc>
                 <a:spcPct val="115000"/>
               </a:lnSpc>
@@ -8127,25 +8005,68 @@
                 <a:solidFill>
                   <a:srgbClr val="1F4E9C"/>
                 </a:solidFill>
-                <a:latin typeface="微软雅黑" pitchFamily="34" charset="0"/>
-                <a:ea typeface="微软雅黑" pitchFamily="34" charset="-122"/>
-                <a:cs typeface="微软雅黑" pitchFamily="34" charset="-120"/>
+                <a:latin typeface="微软雅黑" panose="020B0503020204020204" pitchFamily="34" charset="-122"/>
+                <a:ea typeface="微软雅黑" panose="020B0503020204020204" pitchFamily="34" charset="-122"/>
+                <a:cs typeface="微软雅黑" panose="020B0503020204020204" pitchFamily="34" charset="-120"/>
               </a:rPr>
               <a:t>•  </a:t>
             </a:r>
-            <a:pPr algn="l" indent="0" marL="0">
+            <a:r>
+              <a:rPr lang="en-US" sz="1800" dirty="0">
+                <a:solidFill>
+                  <a:srgbClr val="000000"/>
+                </a:solidFill>
+              </a:rPr>
+              <a:t>树没有环，从上往下走不会重复；图有环，还可能多对多，不标记就会绕圈、重复访问甚至死循环</a:t>
+            </a:r>
+            <a:endParaRPr lang="en-US" sz="1800" dirty="0"/>
+          </a:p>
+        </p:txBody>
+      </p:sp>
+      <p:sp>
+        <p:nvSpPr>
+          <p:cNvPr id="6" name="Text 4"/>
+          <p:cNvSpPr/>
+          <p:nvPr/>
+        </p:nvSpPr>
+        <p:spPr>
+          <a:xfrm>
+            <a:off x="896112" y="3209544"/>
+            <a:ext cx="10454335" cy="397764"/>
+          </a:xfrm>
+          <a:prstGeom prst="rect">
+            <a:avLst/>
+          </a:prstGeom>
+          <a:noFill/>
+        </p:spPr>
+        <p:txBody>
+          <a:bodyPr wrap="square" rtlCol="0" anchor="t"/>
+          <a:lstStyle/>
+          <a:p>
+            <a:pPr marL="0" indent="0" algn="l">
               <a:lnSpc>
                 <a:spcPct val="115000"/>
               </a:lnSpc>
               <a:buNone/>
             </a:pPr>
             <a:r>
+              <a:rPr lang="en-US" sz="1800" b="1" dirty="0">
+                <a:solidFill>
+                  <a:srgbClr val="1F4E9C"/>
+                </a:solidFill>
+                <a:latin typeface="微软雅黑" panose="020B0503020204020204" pitchFamily="34" charset="-122"/>
+                <a:ea typeface="微软雅黑" panose="020B0503020204020204" pitchFamily="34" charset="-122"/>
+                <a:cs typeface="微软雅黑" panose="020B0503020204020204" pitchFamily="34" charset="-120"/>
+              </a:rPr>
+              <a:t>•  </a:t>
+            </a:r>
+            <a:r>
               <a:rPr lang="en-US" sz="1800" dirty="0">
                 <a:solidFill>
                   <a:srgbClr val="000000"/>
                 </a:solidFill>
               </a:rPr>
-              <a:t>树没有环，从上往下走不会重复；图有环，还可能多对多，不标记就会绕圈、重复访问甚至死循环</a:t>
+              <a:t>所以用一个 visited 数组记'这个顶点访问过没有'，访问过就不再进去</a:t>
             </a:r>
             <a:endParaRPr lang="en-US" sz="1800" dirty="0"/>
           </a:p>
@@ -8153,26 +8074,25 @@
       </p:sp>
       <p:sp>
         <p:nvSpPr>
-          <p:cNvPr id="6" name="Text 4"/>
-          <p:cNvSpPr/>
-          <p:nvPr/>
-        </p:nvSpPr>
-        <p:spPr>
-          <a:xfrm>
-            <a:off x="896112" y="3209544"/>
-            <a:ext cx="10454335" cy="397764"/>
-          </a:xfrm>
-          <a:prstGeom prst="rect">
-            <a:avLst/>
-          </a:prstGeom>
-          <a:noFill/>
-          <a:ln/>
+          <p:cNvPr id="7" name="Text 5"/>
+          <p:cNvSpPr/>
+          <p:nvPr/>
+        </p:nvSpPr>
+        <p:spPr>
+          <a:xfrm>
+            <a:off x="896112" y="3680460"/>
+            <a:ext cx="10454335" cy="740664"/>
+          </a:xfrm>
+          <a:prstGeom prst="rect">
+            <a:avLst/>
+          </a:prstGeom>
+          <a:noFill/>
         </p:spPr>
         <p:txBody>
           <a:bodyPr wrap="square" rtlCol="0" anchor="t"/>
           <a:lstStyle/>
           <a:p>
-            <a:pPr algn="l" indent="0" marL="0">
+            <a:pPr marL="0" indent="0" algn="l">
               <a:lnSpc>
                 <a:spcPct val="115000"/>
               </a:lnSpc>
@@ -8183,74 +8103,12 @@
                 <a:solidFill>
                   <a:srgbClr val="1F4E9C"/>
                 </a:solidFill>
-                <a:latin typeface="微软雅黑" pitchFamily="34" charset="0"/>
-                <a:ea typeface="微软雅黑" pitchFamily="34" charset="-122"/>
-                <a:cs typeface="微软雅黑" pitchFamily="34" charset="-120"/>
+                <a:latin typeface="微软雅黑" panose="020B0503020204020204" pitchFamily="34" charset="-122"/>
+                <a:ea typeface="微软雅黑" panose="020B0503020204020204" pitchFamily="34" charset="-122"/>
+                <a:cs typeface="微软雅黑" panose="020B0503020204020204" pitchFamily="34" charset="-120"/>
               </a:rPr>
               <a:t>•  </a:t>
             </a:r>
-            <a:pPr algn="l" indent="0" marL="0">
-              <a:lnSpc>
-                <a:spcPct val="115000"/>
-              </a:lnSpc>
-              <a:buNone/>
-            </a:pPr>
-            <a:r>
-              <a:rPr lang="en-US" sz="1800" dirty="0">
-                <a:solidFill>
-                  <a:srgbClr val="000000"/>
-                </a:solidFill>
-              </a:rPr>
-              <a:t>所以用一个 visited 数组记'这个顶点访问过没有'，访问过就不再进去</a:t>
-            </a:r>
-            <a:endParaRPr lang="en-US" sz="1800" dirty="0"/>
-          </a:p>
-        </p:txBody>
-      </p:sp>
-      <p:sp>
-        <p:nvSpPr>
-          <p:cNvPr id="7" name="Text 5"/>
-          <p:cNvSpPr/>
-          <p:nvPr/>
-        </p:nvSpPr>
-        <p:spPr>
-          <a:xfrm>
-            <a:off x="896112" y="3680460"/>
-            <a:ext cx="10454335" cy="740664"/>
-          </a:xfrm>
-          <a:prstGeom prst="rect">
-            <a:avLst/>
-          </a:prstGeom>
-          <a:noFill/>
-          <a:ln/>
-        </p:spPr>
-        <p:txBody>
-          <a:bodyPr wrap="square" rtlCol="0" anchor="t"/>
-          <a:lstStyle/>
-          <a:p>
-            <a:pPr algn="l" indent="0" marL="0">
-              <a:lnSpc>
-                <a:spcPct val="115000"/>
-              </a:lnSpc>
-              <a:buNone/>
-            </a:pPr>
-            <a:r>
-              <a:rPr lang="en-US" sz="1800" b="1" dirty="0">
-                <a:solidFill>
-                  <a:srgbClr val="1F4E9C"/>
-                </a:solidFill>
-                <a:latin typeface="微软雅黑" pitchFamily="34" charset="0"/>
-                <a:ea typeface="微软雅黑" pitchFamily="34" charset="-122"/>
-                <a:cs typeface="微软雅黑" pitchFamily="34" charset="-120"/>
-              </a:rPr>
-              <a:t>•  </a:t>
-            </a:r>
-            <a:pPr algn="l" indent="0" marL="0">
-              <a:lnSpc>
-                <a:spcPct val="115000"/>
-              </a:lnSpc>
-              <a:buNone/>
-            </a:pPr>
             <a:r>
               <a:rPr lang="en-US" sz="1800" dirty="0">
                 <a:solidFill>
@@ -8278,13 +8136,12 @@
             <a:avLst/>
           </a:prstGeom>
           <a:noFill/>
-          <a:ln/>
         </p:spPr>
         <p:txBody>
           <a:bodyPr wrap="square" rtlCol="0" anchor="t"/>
           <a:lstStyle/>
           <a:p>
-            <a:pPr algn="l" indent="0" marL="0">
+            <a:pPr marL="0" indent="0" algn="l">
               <a:buNone/>
             </a:pPr>
             <a:r>
@@ -8292,9 +8149,9 @@
                 <a:solidFill>
                   <a:srgbClr val="8A9099"/>
                 </a:solidFill>
-                <a:latin typeface="微软雅黑" pitchFamily="34" charset="0"/>
-                <a:ea typeface="微软雅黑" pitchFamily="34" charset="-122"/>
-                <a:cs typeface="微软雅黑" pitchFamily="34" charset="-120"/>
+                <a:latin typeface="微软雅黑" panose="020B0503020204020204" pitchFamily="34" charset="-122"/>
+                <a:ea typeface="微软雅黑" panose="020B0503020204020204" pitchFamily="34" charset="-122"/>
+                <a:cs typeface="微软雅黑" panose="020B0503020204020204" pitchFamily="34" charset="-120"/>
               </a:rPr>
               <a:t>图的遍历有两种：DFS 深度优先（一条路走到黑再回头）和 BFS 广度优先（一层一层扩），和树的遍历思路相通</a:t>
             </a:r>
@@ -8310,9 +8167,9 @@
 </p:sld>
 </file>
 
-<file path=ppt/slides/slide8.xml><?xml version="1.0" encoding="utf-8"?>
+<file path=ppt/slides/slide9.xml><?xml version="1.0" encoding="utf-8"?>
 <p:sld xmlns:a="http://schemas.openxmlformats.org/drawingml/2006/main" xmlns:r="http://schemas.openxmlformats.org/officeDocument/2006/relationships" xmlns:p="http://schemas.openxmlformats.org/presentationml/2006/main">
-  <p:cSld name="Slide 8">
+  <p:cSld>
     <p:bg>
       <p:bgPr>
         <a:blipFill dpi="0" rotWithShape="1">
@@ -8356,13 +8213,12 @@
             <a:avLst/>
           </a:prstGeom>
           <a:noFill/>
-          <a:ln/>
         </p:spPr>
         <p:txBody>
           <a:bodyPr wrap="square" rtlCol="0" anchor="ctr"/>
           <a:lstStyle/>
           <a:p>
-            <a:pPr algn="r" indent="0" marL="0">
+            <a:pPr marL="0" indent="0" algn="r">
               <a:buNone/>
             </a:pPr>
             <a:r>
@@ -8370,9 +8226,9 @@
                 <a:solidFill>
                   <a:srgbClr val="8A9099"/>
                 </a:solidFill>
-                <a:latin typeface="微软雅黑" pitchFamily="34" charset="0"/>
-                <a:ea typeface="微软雅黑" pitchFamily="34" charset="-122"/>
-                <a:cs typeface="微软雅黑" pitchFamily="34" charset="-120"/>
+                <a:latin typeface="微软雅黑" panose="020B0503020204020204" pitchFamily="34" charset="-122"/>
+                <a:ea typeface="微软雅黑" panose="020B0503020204020204" pitchFamily="34" charset="-122"/>
+                <a:cs typeface="微软雅黑" panose="020B0503020204020204" pitchFamily="34" charset="-120"/>
               </a:rPr>
               <a:t>8 / 17</a:t>
             </a:r>
@@ -8395,13 +8251,12 @@
             <a:avLst/>
           </a:prstGeom>
           <a:noFill/>
-          <a:ln/>
         </p:spPr>
         <p:txBody>
           <a:bodyPr wrap="square" rtlCol="0" anchor="ctr"/>
           <a:lstStyle/>
           <a:p>
-            <a:pPr algn="l" indent="0" marL="0">
+            <a:pPr marL="0" indent="0" algn="l">
               <a:buNone/>
             </a:pPr>
             <a:r>
@@ -8409,9 +8264,9 @@
                 <a:solidFill>
                   <a:srgbClr val="1F4E9C"/>
                 </a:solidFill>
-                <a:latin typeface="微软雅黑" pitchFamily="34" charset="0"/>
-                <a:ea typeface="微软雅黑" pitchFamily="34" charset="-122"/>
-                <a:cs typeface="微软雅黑" pitchFamily="34" charset="-120"/>
+                <a:latin typeface="微软雅黑" panose="020B0503020204020204" pitchFamily="34" charset="-122"/>
+                <a:ea typeface="微软雅黑" panose="020B0503020204020204" pitchFamily="34" charset="-122"/>
+                <a:cs typeface="微软雅黑" panose="020B0503020204020204" pitchFamily="34" charset="-120"/>
               </a:rPr>
               <a:t>遍历 · DFS</a:t>
             </a:r>
@@ -8434,13 +8289,12 @@
             <a:avLst/>
           </a:prstGeom>
           <a:noFill/>
-          <a:ln/>
         </p:spPr>
         <p:txBody>
           <a:bodyPr wrap="square" rtlCol="0" anchor="ctr"/>
           <a:lstStyle/>
           <a:p>
-            <a:pPr algn="l" indent="0" marL="0">
+            <a:pPr marL="0" indent="0" algn="l">
               <a:buNone/>
             </a:pPr>
             <a:r>
@@ -8448,9 +8302,9 @@
                 <a:solidFill>
                   <a:srgbClr val="1F2329"/>
                 </a:solidFill>
-                <a:latin typeface="微软雅黑" pitchFamily="34" charset="0"/>
-                <a:ea typeface="微软雅黑" pitchFamily="34" charset="-122"/>
-                <a:cs typeface="微软雅黑" pitchFamily="34" charset="-120"/>
+                <a:latin typeface="微软雅黑" panose="020B0503020204020204" pitchFamily="34" charset="-122"/>
+                <a:ea typeface="微软雅黑" panose="020B0503020204020204" pitchFamily="34" charset="-122"/>
+                <a:cs typeface="微软雅黑" panose="020B0503020204020204" pitchFamily="34" charset="-120"/>
               </a:rPr>
               <a:t>DFS 深度优先：递归版逐行看</a:t>
             </a:r>
@@ -8475,7 +8329,6 @@
           <a:solidFill>
             <a:srgbClr val="F7F9FC"/>
           </a:solidFill>
-          <a:ln/>
         </p:spPr>
       </p:sp>
       <p:sp>
@@ -8495,7 +8348,6 @@
           <a:solidFill>
             <a:srgbClr val="1F4E9C"/>
           </a:solidFill>
-          <a:ln/>
         </p:spPr>
       </p:sp>
       <p:sp>
@@ -8513,13 +8365,12 @@
             <a:avLst/>
           </a:prstGeom>
           <a:noFill/>
-          <a:ln/>
         </p:spPr>
         <p:txBody>
           <a:bodyPr wrap="square" rtlCol="0" anchor="t"/>
           <a:lstStyle/>
           <a:p>
-            <a:pPr algn="l" indent="0" marL="0">
+            <a:pPr marL="0" indent="0" algn="l">
               <a:lnSpc>
                 <a:spcPct val="125000"/>
               </a:lnSpc>
@@ -8530,9 +8381,9 @@
                 <a:solidFill>
                   <a:srgbClr val="1F2329"/>
                 </a:solidFill>
-                <a:latin typeface="Consolas" pitchFamily="34" charset="0"/>
-                <a:ea typeface="Consolas" pitchFamily="34" charset="-122"/>
-                <a:cs typeface="Consolas" pitchFamily="34" charset="-120"/>
+                <a:latin typeface="Consolas" panose="020B0609020204030204" pitchFamily="34" charset="0"/>
+                <a:ea typeface="Consolas" panose="020B0609020204030204" pitchFamily="34" charset="-122"/>
+                <a:cs typeface="Consolas" panose="020B0609020204030204" pitchFamily="34" charset="-120"/>
               </a:rPr>
               <a:t>bool visited[MaxVertexNum];
 void DFS(ALGraph G, int v){
@@ -8561,13 +8412,12 @@
             <a:avLst/>
           </a:prstGeom>
           <a:noFill/>
-          <a:ln/>
         </p:spPr>
         <p:txBody>
           <a:bodyPr wrap="square" rtlCol="0" anchor="t"/>
           <a:lstStyle/>
           <a:p>
-            <a:pPr algn="l" indent="0" marL="0">
+            <a:pPr marL="0" indent="0" algn="l">
               <a:buNone/>
             </a:pPr>
             <a:r>
@@ -8575,296 +8425,11 @@
                 <a:solidFill>
                   <a:srgbClr val="8A9099"/>
                 </a:solidFill>
-                <a:latin typeface="微软雅黑" pitchFamily="34" charset="0"/>
-                <a:ea typeface="微软雅黑" pitchFamily="34" charset="-122"/>
-                <a:cs typeface="微软雅黑" pitchFamily="34" charset="-120"/>
+                <a:latin typeface="微软雅黑" panose="020B0503020204020204" pitchFamily="34" charset="-122"/>
+                <a:ea typeface="微软雅黑" panose="020B0503020204020204" pitchFamily="34" charset="-122"/>
+                <a:cs typeface="微软雅黑" panose="020B0503020204020204" pitchFamily="34" charset="-120"/>
               </a:rPr>
               <a:t>两个要点：先 visit 再标记，次序别反；递归前必须判 !visited，否则有环的图会无限递归下去</a:t>
-            </a:r>
-            <a:endParaRPr lang="en-US" sz="1500" dirty="0"/>
-          </a:p>
-        </p:txBody>
-      </p:sp>
-    </p:spTree>
-  </p:cSld>
-  <p:clrMapOvr>
-    <a:masterClrMapping/>
-  </p:clrMapOvr>
-</p:sld>
-</file>
-
-<file path=ppt/slides/slide9.xml><?xml version="1.0" encoding="utf-8"?>
-<p:sld xmlns:a="http://schemas.openxmlformats.org/drawingml/2006/main" xmlns:r="http://schemas.openxmlformats.org/officeDocument/2006/relationships" xmlns:p="http://schemas.openxmlformats.org/presentationml/2006/main">
-  <p:cSld name="Slide 9">
-    <p:bg>
-      <p:bgPr>
-        <a:blipFill dpi="0" rotWithShape="1">
-          <a:blip r:embed="rId1">
-            <a:lum/>
-          </a:blip>
-          <a:srcRect/>
-          <a:stretch>
-            <a:fillRect/>
-          </a:stretch>
-        </a:blipFill>
-        <a:effectLst/>
-      </p:bgPr>
-    </p:bg>
-    <p:spTree>
-      <p:nvGrpSpPr>
-        <p:cNvPr id="1" name=""/>
-        <p:cNvGrpSpPr/>
-        <p:nvPr/>
-      </p:nvGrpSpPr>
-      <p:grpSpPr>
-        <a:xfrm>
-          <a:off x="0" y="0"/>
-          <a:ext cx="0" cy="0"/>
-          <a:chOff x="0" y="0"/>
-          <a:chExt cx="0" cy="0"/>
-        </a:xfrm>
-      </p:grpSpPr>
-      <p:sp>
-        <p:nvSpPr>
-          <p:cNvPr id="2" name="Text 0"/>
-          <p:cNvSpPr/>
-          <p:nvPr/>
-        </p:nvSpPr>
-        <p:spPr>
-          <a:xfrm>
-            <a:off x="10362895" y="6016752"/>
-            <a:ext cx="1463040" cy="320040"/>
-          </a:xfrm>
-          <a:prstGeom prst="rect">
-            <a:avLst/>
-          </a:prstGeom>
-          <a:noFill/>
-          <a:ln/>
-        </p:spPr>
-        <p:txBody>
-          <a:bodyPr wrap="square" rtlCol="0" anchor="ctr"/>
-          <a:lstStyle/>
-          <a:p>
-            <a:pPr algn="r" indent="0" marL="0">
-              <a:buNone/>
-            </a:pPr>
-            <a:r>
-              <a:rPr lang="en-US" sz="1000" dirty="0">
-                <a:solidFill>
-                  <a:srgbClr val="8A9099"/>
-                </a:solidFill>
-                <a:latin typeface="微软雅黑" pitchFamily="34" charset="0"/>
-                <a:ea typeface="微软雅黑" pitchFamily="34" charset="-122"/>
-                <a:cs typeface="微软雅黑" pitchFamily="34" charset="-120"/>
-              </a:rPr>
-              <a:t>9 / 17</a:t>
-            </a:r>
-            <a:endParaRPr lang="en-US" sz="1000" dirty="0"/>
-          </a:p>
-        </p:txBody>
-      </p:sp>
-      <p:sp>
-        <p:nvSpPr>
-          <p:cNvPr id="3" name="Text 1"/>
-          <p:cNvSpPr/>
-          <p:nvPr/>
-        </p:nvSpPr>
-        <p:spPr>
-          <a:xfrm>
-            <a:off x="822960" y="960120"/>
-            <a:ext cx="10545775" cy="365760"/>
-          </a:xfrm>
-          <a:prstGeom prst="rect">
-            <a:avLst/>
-          </a:prstGeom>
-          <a:noFill/>
-          <a:ln/>
-        </p:spPr>
-        <p:txBody>
-          <a:bodyPr wrap="square" rtlCol="0" anchor="ctr"/>
-          <a:lstStyle/>
-          <a:p>
-            <a:pPr algn="l" indent="0" marL="0">
-              <a:buNone/>
-            </a:pPr>
-            <a:r>
-              <a:rPr lang="en-US" sz="1400" b="1" dirty="0">
-                <a:solidFill>
-                  <a:srgbClr val="1F4E9C"/>
-                </a:solidFill>
-                <a:latin typeface="微软雅黑" pitchFamily="34" charset="0"/>
-                <a:ea typeface="微软雅黑" pitchFamily="34" charset="-122"/>
-                <a:cs typeface="微软雅黑" pitchFamily="34" charset="-120"/>
-              </a:rPr>
-              <a:t>遍历 · BFS · 检查页</a:t>
-            </a:r>
-            <a:endParaRPr lang="en-US" sz="1400" dirty="0"/>
-          </a:p>
-        </p:txBody>
-      </p:sp>
-      <p:sp>
-        <p:nvSpPr>
-          <p:cNvPr id="4" name="Text 2"/>
-          <p:cNvSpPr/>
-          <p:nvPr/>
-        </p:nvSpPr>
-        <p:spPr>
-          <a:xfrm>
-            <a:off x="822960" y="1344168"/>
-            <a:ext cx="10545775" cy="731520"/>
-          </a:xfrm>
-          <a:prstGeom prst="rect">
-            <a:avLst/>
-          </a:prstGeom>
-          <a:noFill/>
-          <a:ln/>
-        </p:spPr>
-        <p:txBody>
-          <a:bodyPr wrap="square" rtlCol="0" anchor="ctr"/>
-          <a:lstStyle/>
-          <a:p>
-            <a:pPr algn="l" indent="0" marL="0">
-              <a:buNone/>
-            </a:pPr>
-            <a:r>
-              <a:rPr lang="en-US" sz="2800" b="1" dirty="0">
-                <a:solidFill>
-                  <a:srgbClr val="1F2329"/>
-                </a:solidFill>
-                <a:latin typeface="微软雅黑" pitchFamily="34" charset="0"/>
-                <a:ea typeface="微软雅黑" pitchFamily="34" charset="-122"/>
-                <a:cs typeface="微软雅黑" pitchFamily="34" charset="-120"/>
-              </a:rPr>
-              <a:t>BFS 广度优先：为什么入队时就标记（先自己想）</a:t>
-            </a:r>
-            <a:endParaRPr lang="en-US" sz="2800" dirty="0"/>
-          </a:p>
-        </p:txBody>
-      </p:sp>
-      <p:sp>
-        <p:nvSpPr>
-          <p:cNvPr id="5" name="Shape 3"/>
-          <p:cNvSpPr/>
-          <p:nvPr/>
-        </p:nvSpPr>
-        <p:spPr>
-          <a:xfrm>
-            <a:off x="822960" y="2395728"/>
-            <a:ext cx="10545775" cy="2459736"/>
-          </a:xfrm>
-          <a:prstGeom prst="rect">
-            <a:avLst/>
-          </a:prstGeom>
-          <a:solidFill>
-            <a:srgbClr val="F7F9FC"/>
-          </a:solidFill>
-          <a:ln/>
-        </p:spPr>
-      </p:sp>
-      <p:sp>
-        <p:nvSpPr>
-          <p:cNvPr id="6" name="Shape 4"/>
-          <p:cNvSpPr/>
-          <p:nvPr/>
-        </p:nvSpPr>
-        <p:spPr>
-          <a:xfrm>
-            <a:off x="822960" y="2395728"/>
-            <a:ext cx="50292" cy="2459736"/>
-          </a:xfrm>
-          <a:prstGeom prst="rect">
-            <a:avLst/>
-          </a:prstGeom>
-          <a:solidFill>
-            <a:srgbClr val="1F4E9C"/>
-          </a:solidFill>
-          <a:ln/>
-        </p:spPr>
-      </p:sp>
-      <p:sp>
-        <p:nvSpPr>
-          <p:cNvPr id="7" name="Text 5"/>
-          <p:cNvSpPr/>
-          <p:nvPr/>
-        </p:nvSpPr>
-        <p:spPr>
-          <a:xfrm>
-            <a:off x="1078992" y="2505456"/>
-            <a:ext cx="10033711" cy="2240280"/>
-          </a:xfrm>
-          <a:prstGeom prst="rect">
-            <a:avLst/>
-          </a:prstGeom>
-          <a:noFill/>
-          <a:ln/>
-        </p:spPr>
-        <p:txBody>
-          <a:bodyPr wrap="square" rtlCol="0" anchor="t"/>
-          <a:lstStyle/>
-          <a:p>
-            <a:pPr algn="l" indent="0" marL="0">
-              <a:lnSpc>
-                <a:spcPct val="125000"/>
-              </a:lnSpc>
-              <a:buNone/>
-            </a:pPr>
-            <a:r>
-              <a:rPr lang="en-US" sz="1400" dirty="0">
-                <a:solidFill>
-                  <a:srgbClr val="1F2329"/>
-                </a:solidFill>
-                <a:latin typeface="Consolas" pitchFamily="34" charset="0"/>
-                <a:ea typeface="Consolas" pitchFamily="34" charset="-122"/>
-                <a:cs typeface="Consolas" pitchFamily="34" charset="-120"/>
-              </a:rPr>
-              <a:t>void BFS(ALGraph G, int v){
-    visit(v); visited[v] = true; EnQueue(Q, v);      // 入队时就标记
-    while(!IsEmpty(Q)){
-        DeQueue(Q, v);
-        for(ArcNode *p = G.vertices[v].firstarc; p != NULL; p = p-&gt;nextarc)
-            if(!visited[p-&gt;adjvex]){ visit(p-&gt;adjvex); visited[p-&gt;adjvex]=true; EnQueue(Q, p-&gt;adjvex); }
-    }
-}
-</a:t>
-            </a:r>
-            <a:endParaRPr lang="en-US" sz="1400" dirty="0"/>
-          </a:p>
-        </p:txBody>
-      </p:sp>
-      <p:sp>
-        <p:nvSpPr>
-          <p:cNvPr id="8" name="Text 6"/>
-          <p:cNvSpPr/>
-          <p:nvPr/>
-        </p:nvSpPr>
-        <p:spPr>
-          <a:xfrm>
-            <a:off x="822960" y="5056632"/>
-            <a:ext cx="10545775" cy="644652"/>
-          </a:xfrm>
-          <a:prstGeom prst="rect">
-            <a:avLst/>
-          </a:prstGeom>
-          <a:noFill/>
-          <a:ln/>
-        </p:spPr>
-        <p:txBody>
-          <a:bodyPr wrap="square" rtlCol="0" anchor="t"/>
-          <a:lstStyle/>
-          <a:p>
-            <a:pPr algn="l" indent="0" marL="0">
-              <a:buNone/>
-            </a:pPr>
-            <a:r>
-              <a:rPr lang="en-US" sz="1500" dirty="0">
-                <a:solidFill>
-                  <a:srgbClr val="8A9099"/>
-                </a:solidFill>
-                <a:latin typeface="微软雅黑" pitchFamily="34" charset="0"/>
-                <a:ea typeface="微软雅黑" pitchFamily="34" charset="-122"/>
-                <a:cs typeface="微软雅黑" pitchFamily="34" charset="-120"/>
-              </a:rPr>
-              <a:t>先想：如果把标记挪到出队时才做，会怎样？——同一个顶点会被多个邻居重复入队，visit 输出好几遍、队列也变长。入队时就标记，保证每个顶点最多入队一次</a:t>
             </a:r>
             <a:endParaRPr lang="en-US" sz="1500" dirty="0"/>
           </a:p>
@@ -8921,7 +8486,7 @@
     </a:clrScheme>
     <a:fontScheme name="Office">
       <a:majorFont>
-        <a:latin typeface="Calibri Light" panose="020F0302020204030204"/>
+        <a:latin typeface="Calibri Light"/>
         <a:ea typeface=""/>
         <a:cs typeface=""/>
         <a:font script="Jpan" typeface="游ゴシック Light"/>
@@ -8954,26 +8519,9 @@
         <a:font script="Viet" typeface="Times New Roman"/>
         <a:font script="Uigh" typeface="Microsoft Uighur"/>
         <a:font script="Geor" typeface="Sylfaen"/>
-        <a:font script="Armn" typeface="Arial"/>
-        <a:font script="Bugi" typeface="Leelawadee UI"/>
-        <a:font script="Bopo" typeface="Microsoft JhengHei"/>
-        <a:font script="Java" typeface="Javanese Text"/>
-        <a:font script="Lisu" typeface="Segoe UI"/>
-        <a:font script="Mymr" typeface="Myanmar Text"/>
-        <a:font script="Nkoo" typeface="Ebrima"/>
-        <a:font script="Olck" typeface="Nirmala UI"/>
-        <a:font script="Osma" typeface="Ebrima"/>
-        <a:font script="Phag" typeface="Phagspa"/>
-        <a:font script="Syrn" typeface="Estrangelo Edessa"/>
-        <a:font script="Syrj" typeface="Estrangelo Edessa"/>
-        <a:font script="Syre" typeface="Estrangelo Edessa"/>
-        <a:font script="Sora" typeface="Nirmala UI"/>
-        <a:font script="Tale" typeface="Microsoft Tai Le"/>
-        <a:font script="Talu" typeface="Microsoft New Tai Lue"/>
-        <a:font script="Tfng" typeface="Ebrima"/>
       </a:majorFont>
       <a:minorFont>
-        <a:latin typeface="Calibri" panose="020F0502020204030204"/>
+        <a:latin typeface="Calibri"/>
         <a:ea typeface=""/>
         <a:cs typeface=""/>
         <a:font script="Jpan" typeface="游ゴシック"/>
@@ -9006,23 +8554,6 @@
         <a:font script="Viet" typeface="Arial"/>
         <a:font script="Uigh" typeface="Microsoft Uighur"/>
         <a:font script="Geor" typeface="Sylfaen"/>
-        <a:font script="Armn" typeface="Arial"/>
-        <a:font script="Bugi" typeface="Leelawadee UI"/>
-        <a:font script="Bopo" typeface="Microsoft JhengHei"/>
-        <a:font script="Java" typeface="Javanese Text"/>
-        <a:font script="Lisu" typeface="Segoe UI"/>
-        <a:font script="Mymr" typeface="Myanmar Text"/>
-        <a:font script="Nkoo" typeface="Ebrima"/>
-        <a:font script="Olck" typeface="Nirmala UI"/>
-        <a:font script="Osma" typeface="Ebrima"/>
-        <a:font script="Phag" typeface="Phagspa"/>
-        <a:font script="Syrn" typeface="Estrangelo Edessa"/>
-        <a:font script="Syrj" typeface="Estrangelo Edessa"/>
-        <a:font script="Syre" typeface="Estrangelo Edessa"/>
-        <a:font script="Sora" typeface="Nirmala UI"/>
-        <a:font script="Tale" typeface="Microsoft Tai Le"/>
-        <a:font script="Talu" typeface="Microsoft New Tai Lue"/>
-        <a:font script="Tfng" typeface="Ebrima"/>
       </a:minorFont>
     </a:fontScheme>
     <a:fmtScheme name="Office">
@@ -9163,8 +8694,265 @@
       </a:bgFillStyleLst>
     </a:fmtScheme>
   </a:themeElements>
-  <a:objectDefaults/>
-  <a:extraClrSchemeLst/>
+  <a:extLst>
+    <a:ext uri="{05A4C25C-085E-4340-85A3-A5531E510DB2}">
+      <thm15:themeFamily xmlns:thm15="http://schemas.microsoft.com/office/thememl/2012/main" name="Office Theme" id="{62F939B6-93AF-4DB8-9C6B-D6C7DFDC589F}" vid="{4A3C46E8-61CC-4603-A589-7422A47A8E4A}"/>
+    </a:ext>
+  </a:extLst>
+</a:theme>
+</file>
+
+<file path=ppt/theme/theme2.xml><?xml version="1.0" encoding="utf-8"?>
+<a:theme xmlns:a="http://schemas.openxmlformats.org/drawingml/2006/main" name="Office Theme">
+  <a:themeElements>
+    <a:clrScheme name="Office">
+      <a:dk1>
+        <a:sysClr val="windowText" lastClr="000000"/>
+      </a:dk1>
+      <a:lt1>
+        <a:sysClr val="window" lastClr="FFFFFF"/>
+      </a:lt1>
+      <a:dk2>
+        <a:srgbClr val="44546A"/>
+      </a:dk2>
+      <a:lt2>
+        <a:srgbClr val="E7E6E6"/>
+      </a:lt2>
+      <a:accent1>
+        <a:srgbClr val="4472C4"/>
+      </a:accent1>
+      <a:accent2>
+        <a:srgbClr val="ED7D31"/>
+      </a:accent2>
+      <a:accent3>
+        <a:srgbClr val="A5A5A5"/>
+      </a:accent3>
+      <a:accent4>
+        <a:srgbClr val="FFC000"/>
+      </a:accent4>
+      <a:accent5>
+        <a:srgbClr val="5B9BD5"/>
+      </a:accent5>
+      <a:accent6>
+        <a:srgbClr val="70AD47"/>
+      </a:accent6>
+      <a:hlink>
+        <a:srgbClr val="0563C1"/>
+      </a:hlink>
+      <a:folHlink>
+        <a:srgbClr val="954F72"/>
+      </a:folHlink>
+    </a:clrScheme>
+    <a:fontScheme name="Office">
+      <a:majorFont>
+        <a:latin typeface="Calibri Light"/>
+        <a:ea typeface=""/>
+        <a:cs typeface=""/>
+        <a:font script="Jpan" typeface="游ゴシック Light"/>
+        <a:font script="Hang" typeface="맑은 고딕"/>
+        <a:font script="Hans" typeface="等线 Light"/>
+        <a:font script="Hant" typeface="新細明體"/>
+        <a:font script="Arab" typeface="Times New Roman"/>
+        <a:font script="Hebr" typeface="Times New Roman"/>
+        <a:font script="Thai" typeface="Angsana New"/>
+        <a:font script="Ethi" typeface="Nyala"/>
+        <a:font script="Beng" typeface="Vrinda"/>
+        <a:font script="Gujr" typeface="Shruti"/>
+        <a:font script="Khmr" typeface="MoolBoran"/>
+        <a:font script="Knda" typeface="Tunga"/>
+        <a:font script="Guru" typeface="Raavi"/>
+        <a:font script="Cans" typeface="Euphemia"/>
+        <a:font script="Cher" typeface="Plantagenet Cherokee"/>
+        <a:font script="Yiii" typeface="Microsoft Yi Baiti"/>
+        <a:font script="Tibt" typeface="Microsoft Himalaya"/>
+        <a:font script="Thaa" typeface="MV Boli"/>
+        <a:font script="Deva" typeface="Mangal"/>
+        <a:font script="Telu" typeface="Gautami"/>
+        <a:font script="Taml" typeface="Latha"/>
+        <a:font script="Syrc" typeface="Estrangelo Edessa"/>
+        <a:font script="Orya" typeface="Kalinga"/>
+        <a:font script="Mlym" typeface="Kartika"/>
+        <a:font script="Laoo" typeface="DokChampa"/>
+        <a:font script="Sinh" typeface="Iskoola Pota"/>
+        <a:font script="Mong" typeface="Mongolian Baiti"/>
+        <a:font script="Viet" typeface="Times New Roman"/>
+        <a:font script="Uigh" typeface="Microsoft Uighur"/>
+        <a:font script="Geor" typeface="Sylfaen"/>
+      </a:majorFont>
+      <a:minorFont>
+        <a:latin typeface="Calibri"/>
+        <a:ea typeface=""/>
+        <a:cs typeface=""/>
+        <a:font script="Jpan" typeface="游ゴシック"/>
+        <a:font script="Hang" typeface="맑은 고딕"/>
+        <a:font script="Hans" typeface="等线"/>
+        <a:font script="Hant" typeface="新細明體"/>
+        <a:font script="Arab" typeface="Arial"/>
+        <a:font script="Hebr" typeface="Arial"/>
+        <a:font script="Thai" typeface="Cordia New"/>
+        <a:font script="Ethi" typeface="Nyala"/>
+        <a:font script="Beng" typeface="Vrinda"/>
+        <a:font script="Gujr" typeface="Shruti"/>
+        <a:font script="Khmr" typeface="DaunPenh"/>
+        <a:font script="Knda" typeface="Tunga"/>
+        <a:font script="Guru" typeface="Raavi"/>
+        <a:font script="Cans" typeface="Euphemia"/>
+        <a:font script="Cher" typeface="Plantagenet Cherokee"/>
+        <a:font script="Yiii" typeface="Microsoft Yi Baiti"/>
+        <a:font script="Tibt" typeface="Microsoft Himalaya"/>
+        <a:font script="Thaa" typeface="MV Boli"/>
+        <a:font script="Deva" typeface="Mangal"/>
+        <a:font script="Telu" typeface="Gautami"/>
+        <a:font script="Taml" typeface="Latha"/>
+        <a:font script="Syrc" typeface="Estrangelo Edessa"/>
+        <a:font script="Orya" typeface="Kalinga"/>
+        <a:font script="Mlym" typeface="Kartika"/>
+        <a:font script="Laoo" typeface="DokChampa"/>
+        <a:font script="Sinh" typeface="Iskoola Pota"/>
+        <a:font script="Mong" typeface="Mongolian Baiti"/>
+        <a:font script="Viet" typeface="Arial"/>
+        <a:font script="Uigh" typeface="Microsoft Uighur"/>
+        <a:font script="Geor" typeface="Sylfaen"/>
+      </a:minorFont>
+    </a:fontScheme>
+    <a:fmtScheme name="Office">
+      <a:fillStyleLst>
+        <a:solidFill>
+          <a:schemeClr val="phClr"/>
+        </a:solidFill>
+        <a:gradFill rotWithShape="1">
+          <a:gsLst>
+            <a:gs pos="0">
+              <a:schemeClr val="phClr">
+                <a:lumMod val="110000"/>
+                <a:satMod val="105000"/>
+                <a:tint val="67000"/>
+              </a:schemeClr>
+            </a:gs>
+            <a:gs pos="50000">
+              <a:schemeClr val="phClr">
+                <a:lumMod val="105000"/>
+                <a:satMod val="103000"/>
+                <a:tint val="73000"/>
+              </a:schemeClr>
+            </a:gs>
+            <a:gs pos="100000">
+              <a:schemeClr val="phClr">
+                <a:lumMod val="105000"/>
+                <a:satMod val="109000"/>
+                <a:tint val="81000"/>
+              </a:schemeClr>
+            </a:gs>
+          </a:gsLst>
+          <a:lin ang="5400000" scaled="0"/>
+        </a:gradFill>
+        <a:gradFill rotWithShape="1">
+          <a:gsLst>
+            <a:gs pos="0">
+              <a:schemeClr val="phClr">
+                <a:satMod val="103000"/>
+                <a:lumMod val="102000"/>
+                <a:tint val="94000"/>
+              </a:schemeClr>
+            </a:gs>
+            <a:gs pos="50000">
+              <a:schemeClr val="phClr">
+                <a:satMod val="110000"/>
+                <a:lumMod val="100000"/>
+                <a:shade val="100000"/>
+              </a:schemeClr>
+            </a:gs>
+            <a:gs pos="100000">
+              <a:schemeClr val="phClr">
+                <a:lumMod val="99000"/>
+                <a:satMod val="120000"/>
+                <a:shade val="78000"/>
+              </a:schemeClr>
+            </a:gs>
+          </a:gsLst>
+          <a:lin ang="5400000" scaled="0"/>
+        </a:gradFill>
+      </a:fillStyleLst>
+      <a:lnStyleLst>
+        <a:ln w="6350" cap="flat" cmpd="sng" algn="ctr">
+          <a:solidFill>
+            <a:schemeClr val="phClr"/>
+          </a:solidFill>
+          <a:prstDash val="solid"/>
+          <a:miter lim="800000"/>
+        </a:ln>
+        <a:ln w="12700" cap="flat" cmpd="sng" algn="ctr">
+          <a:solidFill>
+            <a:schemeClr val="phClr"/>
+          </a:solidFill>
+          <a:prstDash val="solid"/>
+          <a:miter lim="800000"/>
+        </a:ln>
+        <a:ln w="19050" cap="flat" cmpd="sng" algn="ctr">
+          <a:solidFill>
+            <a:schemeClr val="phClr"/>
+          </a:solidFill>
+          <a:prstDash val="solid"/>
+          <a:miter lim="800000"/>
+        </a:ln>
+      </a:lnStyleLst>
+      <a:effectStyleLst>
+        <a:effectStyle>
+          <a:effectLst/>
+        </a:effectStyle>
+        <a:effectStyle>
+          <a:effectLst/>
+        </a:effectStyle>
+        <a:effectStyle>
+          <a:effectLst>
+            <a:outerShdw blurRad="57150" dist="19050" dir="5400000" algn="ctr" rotWithShape="0">
+              <a:srgbClr val="000000">
+                <a:alpha val="63000"/>
+              </a:srgbClr>
+            </a:outerShdw>
+          </a:effectLst>
+        </a:effectStyle>
+      </a:effectStyleLst>
+      <a:bgFillStyleLst>
+        <a:solidFill>
+          <a:schemeClr val="phClr"/>
+        </a:solidFill>
+        <a:solidFill>
+          <a:schemeClr val="phClr">
+            <a:tint val="95000"/>
+            <a:satMod val="170000"/>
+          </a:schemeClr>
+        </a:solidFill>
+        <a:gradFill rotWithShape="1">
+          <a:gsLst>
+            <a:gs pos="0">
+              <a:schemeClr val="phClr">
+                <a:tint val="93000"/>
+                <a:satMod val="150000"/>
+                <a:shade val="98000"/>
+                <a:lumMod val="102000"/>
+              </a:schemeClr>
+            </a:gs>
+            <a:gs pos="50000">
+              <a:schemeClr val="phClr">
+                <a:tint val="98000"/>
+                <a:satMod val="130000"/>
+                <a:shade val="90000"/>
+                <a:lumMod val="103000"/>
+              </a:schemeClr>
+            </a:gs>
+            <a:gs pos="100000">
+              <a:schemeClr val="phClr">
+                <a:shade val="63000"/>
+                <a:satMod val="120000"/>
+              </a:schemeClr>
+            </a:gs>
+          </a:gsLst>
+          <a:lin ang="5400000" scaled="0"/>
+        </a:gradFill>
+      </a:bgFillStyleLst>
+    </a:fmtScheme>
+  </a:themeElements>
   <a:extLst>
     <a:ext uri="{05A4C25C-085E-4340-85A3-A5531E510DB2}">
       <thm15:themeFamily xmlns:thm15="http://schemas.microsoft.com/office/thememl/2012/main" name="Office Theme" id="{62F939B6-93AF-4DB8-9C6B-D6C7DFDC589F}" vid="{4A3C46E8-61CC-4603-A589-7422A47A8E4A}"/>
